--- a/static/guide/03_開発の進め方.pptx
+++ b/static/guide/03_開発の進め方.pptx
@@ -1837,8 +1837,8 @@
         </p:nvSpPr>
         <p:spPr>
           <a:xfrm>
-            <a:off x="5394960" y="1051560"/>
-            <a:ext cx="3291840" cy="3017520"/>
+            <a:off x="5394960" y="868680"/>
+            <a:ext cx="3291840" cy="3520440"/>
           </a:xfrm>
           <a:prstGeom prst="rect">
             <a:avLst/>
@@ -1862,7 +1862,7 @@
         </p:nvSpPr>
         <p:spPr>
           <a:xfrm>
-            <a:off x="5623560" y="1207008"/>
+            <a:off x="5623560" y="1024128"/>
             <a:ext cx="2834640" cy="274320"/>
           </a:xfrm>
           <a:prstGeom prst="rect">
@@ -1887,7 +1887,7 @@
                 <a:ea typeface="Consolas" pitchFamily="34" charset="-122"/>
                 <a:cs typeface="Consolas" pitchFamily="34" charset="-120"/>
               </a:rPr>
-              <a:t>// 資料は 4 本</a:t>
+              <a:t>// 資料は 5 本</a:t>
             </a:r>
             <a:endParaRPr lang="en-US" sz="1000" dirty="0"/>
           </a:p>
@@ -1901,7 +1901,7 @@
         </p:nvSpPr>
         <p:spPr>
           <a:xfrm>
-            <a:off x="5623560" y="1600200"/>
+            <a:off x="5623560" y="1417320"/>
             <a:ext cx="411480" cy="237744"/>
           </a:xfrm>
           <a:prstGeom prst="rect">
@@ -1940,7 +1940,7 @@
         </p:nvSpPr>
         <p:spPr>
           <a:xfrm>
-            <a:off x="6035040" y="1600200"/>
+            <a:off x="6035040" y="1417320"/>
             <a:ext cx="2514600" cy="237744"/>
           </a:xfrm>
           <a:prstGeom prst="rect">
@@ -1979,7 +1979,7 @@
         </p:nvSpPr>
         <p:spPr>
           <a:xfrm>
-            <a:off x="6035040" y="1847088"/>
+            <a:off x="6035040" y="1664208"/>
             <a:ext cx="2514600" cy="201168"/>
           </a:xfrm>
           <a:prstGeom prst="rect">
@@ -2018,7 +2018,7 @@
         </p:nvSpPr>
         <p:spPr>
           <a:xfrm>
-            <a:off x="5623560" y="2203704"/>
+            <a:off x="5623560" y="2020824"/>
             <a:ext cx="411480" cy="237744"/>
           </a:xfrm>
           <a:prstGeom prst="rect">
@@ -2057,7 +2057,7 @@
         </p:nvSpPr>
         <p:spPr>
           <a:xfrm>
-            <a:off x="6035040" y="2203704"/>
+            <a:off x="6035040" y="2020824"/>
             <a:ext cx="2514600" cy="237744"/>
           </a:xfrm>
           <a:prstGeom prst="rect">
@@ -2096,7 +2096,7 @@
         </p:nvSpPr>
         <p:spPr>
           <a:xfrm>
-            <a:off x="6035040" y="2450592"/>
+            <a:off x="6035040" y="2267712"/>
             <a:ext cx="2514600" cy="201168"/>
           </a:xfrm>
           <a:prstGeom prst="rect">
@@ -2135,7 +2135,7 @@
         </p:nvSpPr>
         <p:spPr>
           <a:xfrm>
-            <a:off x="5623560" y="2807208"/>
+            <a:off x="5623560" y="2624328"/>
             <a:ext cx="411480" cy="237744"/>
           </a:xfrm>
           <a:prstGeom prst="rect">
@@ -2174,7 +2174,7 @@
         </p:nvSpPr>
         <p:spPr>
           <a:xfrm>
-            <a:off x="6035040" y="2807208"/>
+            <a:off x="6035040" y="2624328"/>
             <a:ext cx="2514600" cy="237744"/>
           </a:xfrm>
           <a:prstGeom prst="rect">
@@ -2213,7 +2213,7 @@
         </p:nvSpPr>
         <p:spPr>
           <a:xfrm>
-            <a:off x="6035040" y="3054096"/>
+            <a:off x="6035040" y="2871216"/>
             <a:ext cx="2514600" cy="201168"/>
           </a:xfrm>
           <a:prstGeom prst="rect">
@@ -2252,7 +2252,7 @@
         </p:nvSpPr>
         <p:spPr>
           <a:xfrm>
-            <a:off x="5486400" y="3355848"/>
+            <a:off x="5486400" y="3172968"/>
             <a:ext cx="3108960" cy="548640"/>
           </a:xfrm>
           <a:prstGeom prst="rect">
@@ -2277,7 +2277,7 @@
         </p:nvSpPr>
         <p:spPr>
           <a:xfrm>
-            <a:off x="5623560" y="3410712"/>
+            <a:off x="5623560" y="3227832"/>
             <a:ext cx="411480" cy="237744"/>
           </a:xfrm>
           <a:prstGeom prst="rect">
@@ -2316,7 +2316,7 @@
         </p:nvSpPr>
         <p:spPr>
           <a:xfrm>
-            <a:off x="6035040" y="3410712"/>
+            <a:off x="6035040" y="3227832"/>
             <a:ext cx="2514600" cy="237744"/>
           </a:xfrm>
           <a:prstGeom prst="rect">
@@ -2355,7 +2355,7 @@
         </p:nvSpPr>
         <p:spPr>
           <a:xfrm>
-            <a:off x="6035040" y="3657600"/>
+            <a:off x="6035040" y="3474720"/>
             <a:ext cx="2514600" cy="201168"/>
           </a:xfrm>
           <a:prstGeom prst="rect">
@@ -2381,6 +2381,123 @@
                 <a:cs typeface="Meiryo" pitchFamily="34" charset="-120"/>
               </a:rPr>
               <a:t>全員・毎日</a:t>
+            </a:r>
+            <a:endParaRPr lang="en-US" sz="900" dirty="0"/>
+          </a:p>
+        </p:txBody>
+      </p:sp>
+      <p:sp>
+        <p:nvSpPr>
+          <p:cNvPr id="23" name="Text 21"/>
+          <p:cNvSpPr txBox="1"/>
+          <p:nvPr/>
+        </p:nvSpPr>
+        <p:spPr>
+          <a:xfrm>
+            <a:off x="5623560" y="3831336"/>
+            <a:ext cx="411480" cy="237744"/>
+          </a:xfrm>
+          <a:prstGeom prst="rect">
+            <a:avLst/>
+          </a:prstGeom>
+          <a:noFill/>
+          <a:ln/>
+        </p:spPr>
+        <p:txBody>
+          <a:bodyPr wrap="square" lIns="0" tIns="0" rIns="0" bIns="0" rtlCol="0" anchor="t"/>
+          <a:lstStyle/>
+          <a:p>
+            <a:pPr indent="0" marL="0">
+              <a:buNone/>
+            </a:pPr>
+            <a:r>
+              <a:rPr lang="en-US" sz="1300" b="1" dirty="0">
+                <a:solidFill>
+                  <a:srgbClr val="B9CAD9"/>
+                </a:solidFill>
+                <a:latin typeface="Consolas" pitchFamily="34" charset="0"/>
+                <a:ea typeface="Consolas" pitchFamily="34" charset="-122"/>
+                <a:cs typeface="Consolas" pitchFamily="34" charset="-120"/>
+              </a:rPr>
+              <a:t>04</a:t>
+            </a:r>
+            <a:endParaRPr lang="en-US" sz="1300" dirty="0"/>
+          </a:p>
+        </p:txBody>
+      </p:sp>
+      <p:sp>
+        <p:nvSpPr>
+          <p:cNvPr id="24" name="Text 22"/>
+          <p:cNvSpPr txBox="1"/>
+          <p:nvPr/>
+        </p:nvSpPr>
+        <p:spPr>
+          <a:xfrm>
+            <a:off x="6035040" y="3831336"/>
+            <a:ext cx="2514600" cy="237744"/>
+          </a:xfrm>
+          <a:prstGeom prst="rect">
+            <a:avLst/>
+          </a:prstGeom>
+          <a:noFill/>
+          <a:ln/>
+        </p:spPr>
+        <p:txBody>
+          <a:bodyPr wrap="square" lIns="0" tIns="0" rIns="0" bIns="0" rtlCol="0" anchor="t"/>
+          <a:lstStyle/>
+          <a:p>
+            <a:pPr indent="0" marL="0">
+              <a:buNone/>
+            </a:pPr>
+            <a:r>
+              <a:rPr lang="en-US" sz="1150" b="1" dirty="0">
+                <a:solidFill>
+                  <a:srgbClr val="B9CAD9"/>
+                </a:solidFill>
+                <a:latin typeface="Meiryo" pitchFamily="34" charset="0"/>
+                <a:ea typeface="Meiryo" pitchFamily="34" charset="-122"/>
+                <a:cs typeface="Meiryo" pitchFamily="34" charset="-120"/>
+              </a:rPr>
+              <a:t>アプリケーション構成</a:t>
+            </a:r>
+            <a:endParaRPr lang="en-US" sz="1150" dirty="0"/>
+          </a:p>
+        </p:txBody>
+      </p:sp>
+      <p:sp>
+        <p:nvSpPr>
+          <p:cNvPr id="25" name="Text 23"/>
+          <p:cNvSpPr txBox="1"/>
+          <p:nvPr/>
+        </p:nvSpPr>
+        <p:spPr>
+          <a:xfrm>
+            <a:off x="6035040" y="4078224"/>
+            <a:ext cx="2514600" cy="201168"/>
+          </a:xfrm>
+          <a:prstGeom prst="rect">
+            <a:avLst/>
+          </a:prstGeom>
+          <a:noFill/>
+          <a:ln/>
+        </p:spPr>
+        <p:txBody>
+          <a:bodyPr wrap="square" lIns="0" tIns="0" rIns="0" bIns="0" rtlCol="0" anchor="t"/>
+          <a:lstStyle/>
+          <a:p>
+            <a:pPr indent="0" marL="0">
+              <a:buNone/>
+            </a:pPr>
+            <a:r>
+              <a:rPr lang="en-US" sz="900" dirty="0">
+                <a:solidFill>
+                  <a:srgbClr val="B9CAD9"/>
+                </a:solidFill>
+                <a:latin typeface="Meiryo" pitchFamily="34" charset="0"/>
+                <a:ea typeface="Meiryo" pitchFamily="34" charset="-122"/>
+                <a:cs typeface="Meiryo" pitchFamily="34" charset="-120"/>
+              </a:rPr>
+              <a:t>全員</a:t>
             </a:r>
             <a:endParaRPr lang="en-US" sz="900" dirty="0"/>
           </a:p>

--- a/static/guide/03_開発の進め方.pptx
+++ b/static/guide/03_開発の進め方.pptx
@@ -7937,7 +7937,7 @@
                 <a:ea typeface="Meiryo" pitchFamily="34" charset="-122"/>
                 <a:cs typeface="Meiryo" pitchFamily="34" charset="-120"/>
               </a:rPr>
-              <a:t>VS Code の左下で main に戻る</a:t>
+              <a:t>マージすると funitclub.org に自動で反映される</a:t>
             </a:r>
             <a:endParaRPr lang="en-US" sz="1100" dirty="0"/>
           </a:p>
@@ -7958,7 +7958,7 @@
                 <a:ea typeface="Meiryo" pitchFamily="34" charset="-122"/>
                 <a:cs typeface="Meiryo" pitchFamily="34" charset="-120"/>
               </a:rPr>
-              <a:t>「ソース管理」→「…」→「プル」</a:t>
+              <a:t>VS Code の左下で main に戻り「ソース管理」→「…」→「プル」</a:t>
             </a:r>
             <a:endParaRPr lang="en-US" sz="1100" dirty="0"/>
           </a:p>
@@ -10591,7 +10591,7 @@
                 <a:ea typeface="Meiryo" pitchFamily="34" charset="-122"/>
                 <a:cs typeface="Meiryo" pitchFamily="34" charset="-120"/>
               </a:rPr>
-              <a:t>コマンドは Windows でも Mac でも同じ（作業部屋の中は Linux のため）。makemigrations / migrate / test は「ターミナル」→「タスクの実行」からも選べる。</a:t>
+              <a:t>コマンドは Windows でも Mac でも同じ（作業部屋の中は Linux のため）。パッケージの版は homepage とそろえる（公開のとき合流するため）。</a:t>
             </a:r>
             <a:endParaRPr lang="en-US" sz="1050" dirty="0"/>
           </a:p>

--- a/static/guide/03_開発の進め方.pptx
+++ b/static/guide/03_開発の進め方.pptx
@@ -510,7 +510,7 @@
           <a:p>
             <a:r>
               <a:rPr lang="en-US" dirty="0"/>
-              <a:t>パソコンの準備（資料 02）が終わった人向けの、毎日の作業の資料です。</a:t>
+              <a:t>パソコンの準備（資料 02）が終わった人向けの、作業の進め方の資料です。</a:t>
             </a:r>
             <a:endParaRPr lang="en-US" dirty="0"/>
           </a:p>
@@ -1718,7 +1718,7 @@
                 <a:ea typeface="Meiryo" pitchFamily="34" charset="-122"/>
                 <a:cs typeface="Meiryo" pitchFamily="34" charset="-120"/>
               </a:rPr>
-              <a:t>毎日の始め方と終わり方、ブランチ → プルリクエスト → マージの流れ、レビューのしかた。</a:t>
+              <a:t>作業の始め方と終わり方、ブランチ → プルリクエスト → マージの流れ、レビューのしかた。</a:t>
             </a:r>
             <a:endParaRPr lang="en-US" sz="1300" dirty="0"/>
           </a:p>
@@ -1784,7 +1784,7 @@
                 <a:ea typeface="Meiryo" pitchFamily="34" charset="-122"/>
                 <a:cs typeface="Meiryo" pitchFamily="34" charset="-120"/>
               </a:rPr>
-              <a:t>メンバー全員・毎日</a:t>
+              <a:t>メンバー全員</a:t>
             </a:r>
             <a:endParaRPr lang="en-US" sz="900" dirty="0"/>
           </a:p>
@@ -2380,7 +2380,7 @@
                 <a:ea typeface="Meiryo" pitchFamily="34" charset="-122"/>
                 <a:cs typeface="Meiryo" pitchFamily="34" charset="-120"/>
               </a:rPr>
-              <a:t>全員・毎日</a:t>
+              <a:t>全員</a:t>
             </a:r>
             <a:endParaRPr lang="en-US" sz="900" dirty="0"/>
           </a:p>
@@ -3969,7 +3969,7 @@
                 <a:ea typeface="Consolas" pitchFamily="34" charset="-122"/>
                 <a:cs typeface="Consolas" pitchFamily="34" charset="-120"/>
               </a:rPr>
-              <a:t>// 03  ·  毎日の作業</a:t>
+              <a:t>// 03  ·  作業の流れ</a:t>
             </a:r>
             <a:endParaRPr lang="en-US" sz="1100" dirty="0"/>
           </a:p>

--- a/static/guide/03_開発の進め方.pptx
+++ b/static/guide/03_開発の進め方.pptx
@@ -11648,7 +11648,7 @@
                 <a:ea typeface="Meiryo" pitchFamily="34" charset="-122"/>
                 <a:cs typeface="Meiryo" pitchFamily="34" charset="-120"/>
               </a:rPr>
-              <a:t>名前・紹介・資料の題。個人の名前は書かない</a:t>
+              <a:t>紹介と資料の題。構想資料は slides.html</a:t>
             </a:r>
             <a:endParaRPr lang="en-US" sz="1000" dirty="0"/>
           </a:p>
@@ -11751,9 +11751,48 @@
                 <a:ea typeface="Meiryo" pitchFamily="34" charset="-122"/>
                 <a:cs typeface="Meiryo" pitchFamily="34" charset="-120"/>
               </a:rPr>
-              <a:t>構想資料を slides.html に置く</a:t>
+              <a:t>チケットは GitHub の Issue に書く</a:t>
             </a:r>
             <a:endParaRPr lang="en-US" sz="1200" dirty="0"/>
+          </a:p>
+        </p:txBody>
+      </p:sp>
+      <p:sp>
+        <p:nvSpPr>
+          <p:cNvPr id="37" name="Text ticket note"/>
+          <p:cNvSpPr txBox="1"/>
+          <p:nvPr/>
+        </p:nvSpPr>
+        <p:spPr>
+          <a:xfrm>
+            <a:off x="5330952" y="3337560"/>
+            <a:ext cx="3172968" cy="438912"/>
+          </a:xfrm>
+          <a:prstGeom prst="rect">
+            <a:avLst/>
+          </a:prstGeom>
+          <a:noFill/>
+          <a:ln/>
+        </p:spPr>
+        <p:txBody>
+          <a:bodyPr wrap="square" lIns="0" tIns="0" rIns="0" bIns="0" rtlCol="0" anchor="t"/>
+          <a:lstStyle/>
+          <a:p>
+            <a:pPr indent="0" marL="0">
+              <a:buNone/>
+            </a:pPr>
+            <a:r>
+              <a:rPr lang="en-US" sz="1000" dirty="0">
+                <a:solidFill>
+                  <a:srgbClr val="1B2B3A"/>
+                </a:solidFill>
+                <a:latin typeface="Meiryo" pitchFamily="34" charset="0"/>
+                <a:ea typeface="Meiryo" pitchFamily="34" charset="-122"/>
+                <a:cs typeface="Meiryo" pitchFamily="34" charset="-120"/>
+              </a:rPr>
+              <a:t>題名と本文は公開。名前・連絡先・秘密は書かない</a:t>
+            </a:r>
+            <a:endParaRPr lang="en-US" sz="1000" dirty="0"/>
           </a:p>
         </p:txBody>
       </p:sp>

--- a/static/guide/03_開発の進め方.pptx
+++ b/static/guide/03_開発の進め方.pptx
@@ -12,6 +12,7 @@
     <p:sldId id="260" r:id="rId6"/>
     <p:sldId id="261" r:id="rId7"/>
     <p:sldId id="265" r:id="rId16"/>
+    <p:sldId id="266" r:id="rId17"/>
     <p:sldId id="262" r:id="rId8"/>
     <p:sldId id="263" r:id="rId9"/>
     <p:sldId id="264" r:id="rId10"/>
@@ -1719,7 +1720,7 @@
                 <a:ea typeface="Meiryo" pitchFamily="34" charset="-122"/>
                 <a:cs typeface="Meiryo" pitchFamily="34" charset="-120"/>
               </a:rPr>
-              <a:t>作業の始め方と終わり方、ブランチ → プルリクエスト → マージ、レビュー、活動ページの作り方。</a:t>
+              <a:t>作業の始め方と終わり方、ブランチ → プルリクエスト → マージ、レビュー、活動ページとチケットの書き方。</a:t>
             </a:r>
             <a:endParaRPr lang="en-US" sz="1300" dirty="0"/>
           </a:p>
@@ -2513,6 +2514,736 @@
 </file>
 
 <file path=ppt/slides/slide10.xml><?xml version="1.0" encoding="utf-8"?>
+<p:sld xmlns:a="http://schemas.openxmlformats.org/drawingml/2006/main" xmlns:r="http://schemas.openxmlformats.org/officeDocument/2006/relationships" xmlns:p="http://schemas.openxmlformats.org/presentationml/2006/main">
+  <p:cSld name="Slide 8">
+    <p:bg>
+      <p:bgPr>
+        <a:solidFill>
+          <a:srgbClr val="001E3C"/>
+        </a:solidFill>
+      </p:bgPr>
+    </p:bg>
+    <p:spTree>
+      <p:nvGrpSpPr>
+        <p:cNvPr id="1" name=""/>
+        <p:cNvGrpSpPr/>
+        <p:nvPr/>
+      </p:nvGrpSpPr>
+      <p:grpSpPr>
+        <a:xfrm>
+          <a:off x="0" y="0"/>
+          <a:ext cx="0" cy="0"/>
+          <a:chOff x="0" y="0"/>
+          <a:chExt cx="0" cy="0"/>
+        </a:xfrm>
+      </p:grpSpPr>
+      <p:sp>
+        <p:nvSpPr>
+          <p:cNvPr id="2" name="Text 0"/>
+          <p:cNvSpPr txBox="1"/>
+          <p:nvPr/>
+        </p:nvSpPr>
+        <p:spPr>
+          <a:xfrm>
+            <a:off x="457200" y="320040"/>
+            <a:ext cx="6858000" cy="274320"/>
+          </a:xfrm>
+          <a:prstGeom prst="rect">
+            <a:avLst/>
+          </a:prstGeom>
+          <a:noFill/>
+          <a:ln/>
+        </p:spPr>
+        <p:txBody>
+          <a:bodyPr wrap="square" lIns="0" tIns="0" rIns="0" bIns="0" rtlCol="0" anchor="t"/>
+          <a:lstStyle/>
+          <a:p>
+            <a:pPr indent="0" marL="0">
+              <a:buNone/>
+            </a:pPr>
+            <a:r>
+              <a:rPr lang="en-US" sz="1100" dirty="0">
+                <a:solidFill>
+                  <a:srgbClr val="5BB8FF"/>
+                </a:solidFill>
+                <a:latin typeface="Consolas" pitchFamily="34" charset="0"/>
+                <a:ea typeface="Consolas" pitchFamily="34" charset="-122"/>
+                <a:cs typeface="Consolas" pitchFamily="34" charset="-120"/>
+              </a:rPr>
+              <a:t>// 03  ·  ルール</a:t>
+            </a:r>
+            <a:endParaRPr lang="en-US" sz="1100" dirty="0"/>
+          </a:p>
+        </p:txBody>
+      </p:sp>
+      <p:sp>
+        <p:nvSpPr>
+          <p:cNvPr id="3" name="Text 1"/>
+          <p:cNvSpPr txBox="1"/>
+          <p:nvPr/>
+        </p:nvSpPr>
+        <p:spPr>
+          <a:xfrm>
+            <a:off x="457200" y="594360"/>
+            <a:ext cx="8229600" cy="594360"/>
+          </a:xfrm>
+          <a:prstGeom prst="rect">
+            <a:avLst/>
+          </a:prstGeom>
+          <a:noFill/>
+          <a:ln/>
+        </p:spPr>
+        <p:txBody>
+          <a:bodyPr wrap="square" lIns="0" tIns="0" rIns="0" bIns="0" rtlCol="0" anchor="ctr"/>
+          <a:lstStyle/>
+          <a:p>
+            <a:pPr indent="0" marL="0">
+              <a:buNone/>
+            </a:pPr>
+            <a:r>
+              <a:rPr lang="en-US" sz="2600" b="1" dirty="0">
+                <a:solidFill>
+                  <a:srgbClr val="FFFFFF"/>
+                </a:solidFill>
+                <a:latin typeface="Meiryo" pitchFamily="34" charset="0"/>
+                <a:ea typeface="Meiryo" pitchFamily="34" charset="-122"/>
+                <a:cs typeface="Meiryo" pitchFamily="34" charset="-120"/>
+              </a:rPr>
+              <a:t>守ることは 4 つだけ</a:t>
+            </a:r>
+            <a:endParaRPr lang="en-US" sz="2600" dirty="0"/>
+          </a:p>
+        </p:txBody>
+      </p:sp>
+      <p:sp>
+        <p:nvSpPr>
+          <p:cNvPr id="4" name="Shape 2"/>
+          <p:cNvSpPr/>
+          <p:nvPr/>
+        </p:nvSpPr>
+        <p:spPr>
+          <a:xfrm>
+            <a:off x="457200" y="1463040"/>
+            <a:ext cx="4023360" cy="1463040"/>
+          </a:xfrm>
+          <a:prstGeom prst="rect">
+            <a:avLst/>
+          </a:prstGeom>
+          <a:solidFill>
+            <a:srgbClr val="FFFFFF"/>
+          </a:solidFill>
+          <a:ln w="12700">
+            <a:solidFill>
+              <a:srgbClr val="FFFFFF"/>
+            </a:solidFill>
+            <a:prstDash val="solid"/>
+          </a:ln>
+        </p:spPr>
+      </p:sp>
+      <p:sp>
+        <p:nvSpPr>
+          <p:cNvPr id="5" name="Shape 3"/>
+          <p:cNvSpPr/>
+          <p:nvPr/>
+        </p:nvSpPr>
+        <p:spPr>
+          <a:xfrm>
+            <a:off x="731520" y="1737360"/>
+            <a:ext cx="548640" cy="548640"/>
+          </a:xfrm>
+          <a:prstGeom prst="ellipse">
+            <a:avLst/>
+          </a:prstGeom>
+          <a:solidFill>
+            <a:srgbClr val="5BB8FF"/>
+          </a:solidFill>
+          <a:ln w="12700">
+            <a:solidFill>
+              <a:srgbClr val="5BB8FF"/>
+            </a:solidFill>
+            <a:prstDash val="solid"/>
+          </a:ln>
+        </p:spPr>
+      </p:sp>
+      <p:pic>
+        <p:nvPicPr>
+          <p:cNvPr id="6" name="Image 0" descr="preencoded.png">    </p:cNvPr>
+          <p:cNvPicPr>
+            <a:picLocks noChangeAspect="1"/>
+          </p:cNvPicPr>
+          <p:nvPr/>
+        </p:nvPicPr>
+        <p:blipFill>
+          <a:blip r:embed="rId1"/>
+          <a:stretch>
+            <a:fillRect/>
+          </a:stretch>
+        </p:blipFill>
+        <p:spPr>
+          <a:xfrm>
+            <a:off x="874166" y="1880006"/>
+            <a:ext cx="263347" cy="263347"/>
+          </a:xfrm>
+          <a:prstGeom prst="rect">
+            <a:avLst/>
+          </a:prstGeom>
+        </p:spPr>
+      </p:pic>
+      <p:sp>
+        <p:nvSpPr>
+          <p:cNvPr id="7" name="Text 4"/>
+          <p:cNvSpPr txBox="1"/>
+          <p:nvPr/>
+        </p:nvSpPr>
+        <p:spPr>
+          <a:xfrm>
+            <a:off x="1463040" y="1737360"/>
+            <a:ext cx="2788920" cy="365760"/>
+          </a:xfrm>
+          <a:prstGeom prst="rect">
+            <a:avLst/>
+          </a:prstGeom>
+          <a:noFill/>
+          <a:ln/>
+        </p:spPr>
+        <p:txBody>
+          <a:bodyPr wrap="square" lIns="0" tIns="0" rIns="0" bIns="0" rtlCol="0" anchor="t"/>
+          <a:lstStyle/>
+          <a:p>
+            <a:pPr indent="0" marL="0">
+              <a:buNone/>
+            </a:pPr>
+            <a:r>
+              <a:rPr lang="en-US" sz="1400" b="1" dirty="0">
+                <a:solidFill>
+                  <a:srgbClr val="001E3C"/>
+                </a:solidFill>
+                <a:latin typeface="Meiryo" pitchFamily="34" charset="0"/>
+                <a:ea typeface="Meiryo" pitchFamily="34" charset="-122"/>
+                <a:cs typeface="Meiryo" pitchFamily="34" charset="-120"/>
+              </a:rPr>
+              <a:t>main に直接 push しない</a:t>
+            </a:r>
+            <a:endParaRPr lang="en-US" sz="1400" dirty="0"/>
+          </a:p>
+        </p:txBody>
+      </p:sp>
+      <p:sp>
+        <p:nvSpPr>
+          <p:cNvPr id="8" name="Text 5"/>
+          <p:cNvSpPr txBox="1"/>
+          <p:nvPr/>
+        </p:nvSpPr>
+        <p:spPr>
+          <a:xfrm>
+            <a:off x="1463040" y="2148840"/>
+            <a:ext cx="2788920" cy="685800"/>
+          </a:xfrm>
+          <a:prstGeom prst="rect">
+            <a:avLst/>
+          </a:prstGeom>
+          <a:noFill/>
+          <a:ln/>
+        </p:spPr>
+        <p:txBody>
+          <a:bodyPr wrap="square" lIns="0" tIns="0" rIns="0" bIns="0" rtlCol="0" anchor="t"/>
+          <a:lstStyle/>
+          <a:p>
+            <a:pPr indent="0" marL="0">
+              <a:lnSpc>
+                <a:spcPct val="120000"/>
+              </a:lnSpc>
+              <a:buNone/>
+            </a:pPr>
+            <a:r>
+              <a:rPr lang="en-US" sz="1100" dirty="0">
+                <a:solidFill>
+                  <a:srgbClr val="1B2B3A"/>
+                </a:solidFill>
+                <a:latin typeface="Meiryo" pitchFamily="34" charset="0"/>
+                <a:ea typeface="Meiryo" pitchFamily="34" charset="-122"/>
+                <a:cs typeface="Meiryo" pitchFamily="34" charset="-120"/>
+              </a:rPr>
+              <a:t>必ずプルリクエストを出し、テストとレビューを通す。</a:t>
+            </a:r>
+            <a:endParaRPr lang="en-US" sz="1100" dirty="0"/>
+          </a:p>
+        </p:txBody>
+      </p:sp>
+      <p:sp>
+        <p:nvSpPr>
+          <p:cNvPr id="9" name="Shape 6"/>
+          <p:cNvSpPr/>
+          <p:nvPr/>
+        </p:nvSpPr>
+        <p:spPr>
+          <a:xfrm>
+            <a:off x="4663440" y="1463040"/>
+            <a:ext cx="4023360" cy="1463040"/>
+          </a:xfrm>
+          <a:prstGeom prst="rect">
+            <a:avLst/>
+          </a:prstGeom>
+          <a:solidFill>
+            <a:srgbClr val="FFFFFF"/>
+          </a:solidFill>
+          <a:ln w="12700">
+            <a:solidFill>
+              <a:srgbClr val="FFFFFF"/>
+            </a:solidFill>
+            <a:prstDash val="solid"/>
+          </a:ln>
+        </p:spPr>
+      </p:sp>
+      <p:sp>
+        <p:nvSpPr>
+          <p:cNvPr id="10" name="Shape 7"/>
+          <p:cNvSpPr/>
+          <p:nvPr/>
+        </p:nvSpPr>
+        <p:spPr>
+          <a:xfrm>
+            <a:off x="4937760" y="1737360"/>
+            <a:ext cx="548640" cy="548640"/>
+          </a:xfrm>
+          <a:prstGeom prst="ellipse">
+            <a:avLst/>
+          </a:prstGeom>
+          <a:solidFill>
+            <a:srgbClr val="5BB8FF"/>
+          </a:solidFill>
+          <a:ln w="12700">
+            <a:solidFill>
+              <a:srgbClr val="5BB8FF"/>
+            </a:solidFill>
+            <a:prstDash val="solid"/>
+          </a:ln>
+        </p:spPr>
+      </p:sp>
+      <p:pic>
+        <p:nvPicPr>
+          <p:cNvPr id="11" name="Image 1" descr="preencoded.png">    </p:cNvPr>
+          <p:cNvPicPr>
+            <a:picLocks noChangeAspect="1"/>
+          </p:cNvPicPr>
+          <p:nvPr/>
+        </p:nvPicPr>
+        <p:blipFill>
+          <a:blip r:embed="rId2"/>
+          <a:stretch>
+            <a:fillRect/>
+          </a:stretch>
+        </p:blipFill>
+        <p:spPr>
+          <a:xfrm>
+            <a:off x="5080406" y="1880006"/>
+            <a:ext cx="263347" cy="263347"/>
+          </a:xfrm>
+          <a:prstGeom prst="rect">
+            <a:avLst/>
+          </a:prstGeom>
+        </p:spPr>
+      </p:pic>
+      <p:sp>
+        <p:nvSpPr>
+          <p:cNvPr id="12" name="Text 8"/>
+          <p:cNvSpPr txBox="1"/>
+          <p:nvPr/>
+        </p:nvSpPr>
+        <p:spPr>
+          <a:xfrm>
+            <a:off x="5669280" y="1737360"/>
+            <a:ext cx="2788920" cy="365760"/>
+          </a:xfrm>
+          <a:prstGeom prst="rect">
+            <a:avLst/>
+          </a:prstGeom>
+          <a:noFill/>
+          <a:ln/>
+        </p:spPr>
+        <p:txBody>
+          <a:bodyPr wrap="square" lIns="0" tIns="0" rIns="0" bIns="0" rtlCol="0" anchor="t"/>
+          <a:lstStyle/>
+          <a:p>
+            <a:pPr indent="0" marL="0">
+              <a:buNone/>
+            </a:pPr>
+            <a:r>
+              <a:rPr lang="en-US" sz="1400" b="1" dirty="0">
+                <a:solidFill>
+                  <a:srgbClr val="001E3C"/>
+                </a:solidFill>
+                <a:latin typeface="Meiryo" pitchFamily="34" charset="0"/>
+                <a:ea typeface="Meiryo" pitchFamily="34" charset="-122"/>
+                <a:cs typeface="Meiryo" pitchFamily="34" charset="-120"/>
+              </a:rPr>
+              <a:t>パスワードや API キーを書かない</a:t>
+            </a:r>
+            <a:endParaRPr lang="en-US" sz="1400" dirty="0"/>
+          </a:p>
+        </p:txBody>
+      </p:sp>
+      <p:sp>
+        <p:nvSpPr>
+          <p:cNvPr id="13" name="Text 9"/>
+          <p:cNvSpPr txBox="1"/>
+          <p:nvPr/>
+        </p:nvSpPr>
+        <p:spPr>
+          <a:xfrm>
+            <a:off x="5669280" y="2148840"/>
+            <a:ext cx="2788920" cy="685800"/>
+          </a:xfrm>
+          <a:prstGeom prst="rect">
+            <a:avLst/>
+          </a:prstGeom>
+          <a:noFill/>
+          <a:ln/>
+        </p:spPr>
+        <p:txBody>
+          <a:bodyPr wrap="square" lIns="0" tIns="0" rIns="0" bIns="0" rtlCol="0" anchor="t"/>
+          <a:lstStyle/>
+          <a:p>
+            <a:pPr indent="0" marL="0">
+              <a:lnSpc>
+                <a:spcPct val="120000"/>
+              </a:lnSpc>
+              <a:buNone/>
+            </a:pPr>
+            <a:r>
+              <a:rPr lang="en-US" sz="1100" dirty="0">
+                <a:solidFill>
+                  <a:srgbClr val="1B2B3A"/>
+                </a:solidFill>
+                <a:latin typeface="Meiryo" pitchFamily="34" charset="0"/>
+                <a:ea typeface="Meiryo" pitchFamily="34" charset="-122"/>
+                <a:cs typeface="Meiryo" pitchFamily="34" charset="-120"/>
+              </a:rPr>
+              <a:t>消しても履歴に残り、WG の全員が見られる。.env に置く。</a:t>
+            </a:r>
+            <a:endParaRPr lang="en-US" sz="1100" dirty="0"/>
+          </a:p>
+        </p:txBody>
+      </p:sp>
+      <p:sp>
+        <p:nvSpPr>
+          <p:cNvPr id="14" name="Shape 10"/>
+          <p:cNvSpPr/>
+          <p:nvPr/>
+        </p:nvSpPr>
+        <p:spPr>
+          <a:xfrm>
+            <a:off x="457200" y="3108960"/>
+            <a:ext cx="4023360" cy="1463040"/>
+          </a:xfrm>
+          <a:prstGeom prst="rect">
+            <a:avLst/>
+          </a:prstGeom>
+          <a:solidFill>
+            <a:srgbClr val="FFFFFF"/>
+          </a:solidFill>
+          <a:ln w="12700">
+            <a:solidFill>
+              <a:srgbClr val="FFFFFF"/>
+            </a:solidFill>
+            <a:prstDash val="solid"/>
+          </a:ln>
+        </p:spPr>
+      </p:sp>
+      <p:sp>
+        <p:nvSpPr>
+          <p:cNvPr id="15" name="Shape 11"/>
+          <p:cNvSpPr/>
+          <p:nvPr/>
+        </p:nvSpPr>
+        <p:spPr>
+          <a:xfrm>
+            <a:off x="731520" y="3383280"/>
+            <a:ext cx="548640" cy="548640"/>
+          </a:xfrm>
+          <a:prstGeom prst="ellipse">
+            <a:avLst/>
+          </a:prstGeom>
+          <a:solidFill>
+            <a:srgbClr val="5BB8FF"/>
+          </a:solidFill>
+          <a:ln w="12700">
+            <a:solidFill>
+              <a:srgbClr val="5BB8FF"/>
+            </a:solidFill>
+            <a:prstDash val="solid"/>
+          </a:ln>
+        </p:spPr>
+      </p:sp>
+      <p:pic>
+        <p:nvPicPr>
+          <p:cNvPr id="16" name="Image 2" descr="preencoded.png">    </p:cNvPr>
+          <p:cNvPicPr>
+            <a:picLocks noChangeAspect="1"/>
+          </p:cNvPicPr>
+          <p:nvPr/>
+        </p:nvPicPr>
+        <p:blipFill>
+          <a:blip r:embed="rId3"/>
+          <a:stretch>
+            <a:fillRect/>
+          </a:stretch>
+        </p:blipFill>
+        <p:spPr>
+          <a:xfrm>
+            <a:off x="874166" y="3525926"/>
+            <a:ext cx="263347" cy="263347"/>
+          </a:xfrm>
+          <a:prstGeom prst="rect">
+            <a:avLst/>
+          </a:prstGeom>
+        </p:spPr>
+      </p:pic>
+      <p:sp>
+        <p:nvSpPr>
+          <p:cNvPr id="17" name="Text 12"/>
+          <p:cNvSpPr txBox="1"/>
+          <p:nvPr/>
+        </p:nvSpPr>
+        <p:spPr>
+          <a:xfrm>
+            <a:off x="1463040" y="3383280"/>
+            <a:ext cx="2788920" cy="365760"/>
+          </a:xfrm>
+          <a:prstGeom prst="rect">
+            <a:avLst/>
+          </a:prstGeom>
+          <a:noFill/>
+          <a:ln/>
+        </p:spPr>
+        <p:txBody>
+          <a:bodyPr wrap="square" lIns="0" tIns="0" rIns="0" bIns="0" rtlCol="0" anchor="t"/>
+          <a:lstStyle/>
+          <a:p>
+            <a:pPr indent="0" marL="0">
+              <a:buNone/>
+            </a:pPr>
+            <a:r>
+              <a:rPr lang="en-US" sz="1400" b="1" dirty="0">
+                <a:solidFill>
+                  <a:srgbClr val="001E3C"/>
+                </a:solidFill>
+                <a:latin typeface="Meiryo" pitchFamily="34" charset="0"/>
+                <a:ea typeface="Meiryo" pitchFamily="34" charset="-122"/>
+                <a:cs typeface="Meiryo" pitchFamily="34" charset="-120"/>
+              </a:rPr>
+              <a:t>大学のアドレスを出さない</a:t>
+            </a:r>
+            <a:endParaRPr lang="en-US" sz="1400" dirty="0"/>
+          </a:p>
+        </p:txBody>
+      </p:sp>
+      <p:sp>
+        <p:nvSpPr>
+          <p:cNvPr id="18" name="Text 13"/>
+          <p:cNvSpPr txBox="1"/>
+          <p:nvPr/>
+        </p:nvSpPr>
+        <p:spPr>
+          <a:xfrm>
+            <a:off x="1463040" y="3794760"/>
+            <a:ext cx="2788920" cy="685800"/>
+          </a:xfrm>
+          <a:prstGeom prst="rect">
+            <a:avLst/>
+          </a:prstGeom>
+          <a:noFill/>
+          <a:ln/>
+        </p:spPr>
+        <p:txBody>
+          <a:bodyPr wrap="square" lIns="0" tIns="0" rIns="0" bIns="0" rtlCol="0" anchor="t"/>
+          <a:lstStyle/>
+          <a:p>
+            <a:pPr indent="0" marL="0">
+              <a:lnSpc>
+                <a:spcPct val="120000"/>
+              </a:lnSpc>
+              <a:buNone/>
+            </a:pPr>
+            <a:r>
+              <a:rPr lang="en-US" sz="1100" dirty="0">
+                <a:solidFill>
+                  <a:srgbClr val="1B2B3A"/>
+                </a:solidFill>
+                <a:latin typeface="Meiryo" pitchFamily="34" charset="0"/>
+                <a:ea typeface="Meiryo" pitchFamily="34" charset="-122"/>
+                <a:cs typeface="Meiryo" pitchFamily="34" charset="-120"/>
+              </a:rPr>
+              <a:t>学籍番号が公開されてしまう。コード・README・コミットのメールすべて。</a:t>
+            </a:r>
+            <a:endParaRPr lang="en-US" sz="1100" dirty="0"/>
+          </a:p>
+        </p:txBody>
+      </p:sp>
+      <p:sp>
+        <p:nvSpPr>
+          <p:cNvPr id="19" name="Shape 14"/>
+          <p:cNvSpPr/>
+          <p:nvPr/>
+        </p:nvSpPr>
+        <p:spPr>
+          <a:xfrm>
+            <a:off x="4663440" y="3108960"/>
+            <a:ext cx="4023360" cy="1463040"/>
+          </a:xfrm>
+          <a:prstGeom prst="rect">
+            <a:avLst/>
+          </a:prstGeom>
+          <a:solidFill>
+            <a:srgbClr val="FFFFFF"/>
+          </a:solidFill>
+          <a:ln w="12700">
+            <a:solidFill>
+              <a:srgbClr val="FFFFFF"/>
+            </a:solidFill>
+            <a:prstDash val="solid"/>
+          </a:ln>
+        </p:spPr>
+      </p:sp>
+      <p:sp>
+        <p:nvSpPr>
+          <p:cNvPr id="20" name="Shape 15"/>
+          <p:cNvSpPr/>
+          <p:nvPr/>
+        </p:nvSpPr>
+        <p:spPr>
+          <a:xfrm>
+            <a:off x="4937760" y="3383280"/>
+            <a:ext cx="548640" cy="548640"/>
+          </a:xfrm>
+          <a:prstGeom prst="ellipse">
+            <a:avLst/>
+          </a:prstGeom>
+          <a:solidFill>
+            <a:srgbClr val="5BB8FF"/>
+          </a:solidFill>
+          <a:ln w="12700">
+            <a:solidFill>
+              <a:srgbClr val="5BB8FF"/>
+            </a:solidFill>
+            <a:prstDash val="solid"/>
+          </a:ln>
+        </p:spPr>
+      </p:sp>
+      <p:pic>
+        <p:nvPicPr>
+          <p:cNvPr id="21" name="Image 3" descr="preencoded.png">    </p:cNvPr>
+          <p:cNvPicPr>
+            <a:picLocks noChangeAspect="1"/>
+          </p:cNvPicPr>
+          <p:nvPr/>
+        </p:nvPicPr>
+        <p:blipFill>
+          <a:blip r:embed="rId4"/>
+          <a:stretch>
+            <a:fillRect/>
+          </a:stretch>
+        </p:blipFill>
+        <p:spPr>
+          <a:xfrm>
+            <a:off x="5080406" y="3525926"/>
+            <a:ext cx="263347" cy="263347"/>
+          </a:xfrm>
+          <a:prstGeom prst="rect">
+            <a:avLst/>
+          </a:prstGeom>
+        </p:spPr>
+      </p:pic>
+      <p:sp>
+        <p:nvSpPr>
+          <p:cNvPr id="22" name="Text 16"/>
+          <p:cNvSpPr txBox="1"/>
+          <p:nvPr/>
+        </p:nvSpPr>
+        <p:spPr>
+          <a:xfrm>
+            <a:off x="5669280" y="3383280"/>
+            <a:ext cx="2788920" cy="365760"/>
+          </a:xfrm>
+          <a:prstGeom prst="rect">
+            <a:avLst/>
+          </a:prstGeom>
+          <a:noFill/>
+          <a:ln/>
+        </p:spPr>
+        <p:txBody>
+          <a:bodyPr wrap="square" lIns="0" tIns="0" rIns="0" bIns="0" rtlCol="0" anchor="t"/>
+          <a:lstStyle/>
+          <a:p>
+            <a:pPr indent="0" marL="0">
+              <a:buNone/>
+            </a:pPr>
+            <a:r>
+              <a:rPr lang="en-US" sz="1400" b="1" dirty="0">
+                <a:solidFill>
+                  <a:srgbClr val="001E3C"/>
+                </a:solidFill>
+                <a:latin typeface="Meiryo" pitchFamily="34" charset="0"/>
+                <a:ea typeface="Meiryo" pitchFamily="34" charset="-122"/>
+                <a:cs typeface="Meiryo" pitchFamily="34" charset="-120"/>
+              </a:rPr>
+              <a:t>送る前にテストを流す</a:t>
+            </a:r>
+            <a:endParaRPr lang="en-US" sz="1400" dirty="0"/>
+          </a:p>
+        </p:txBody>
+      </p:sp>
+      <p:sp>
+        <p:nvSpPr>
+          <p:cNvPr id="23" name="Text 17"/>
+          <p:cNvSpPr txBox="1"/>
+          <p:nvPr/>
+        </p:nvSpPr>
+        <p:spPr>
+          <a:xfrm>
+            <a:off x="5669280" y="3794760"/>
+            <a:ext cx="2788920" cy="685800"/>
+          </a:xfrm>
+          <a:prstGeom prst="rect">
+            <a:avLst/>
+          </a:prstGeom>
+          <a:noFill/>
+          <a:ln/>
+        </p:spPr>
+        <p:txBody>
+          <a:bodyPr wrap="square" lIns="0" tIns="0" rIns="0" bIns="0" rtlCol="0" anchor="t"/>
+          <a:lstStyle/>
+          <a:p>
+            <a:pPr indent="0" marL="0">
+              <a:lnSpc>
+                <a:spcPct val="120000"/>
+              </a:lnSpc>
+              <a:buNone/>
+            </a:pPr>
+            <a:r>
+              <a:rPr lang="en-US" sz="1100" dirty="0">
+                <a:solidFill>
+                  <a:srgbClr val="1B2B3A"/>
+                </a:solidFill>
+                <a:latin typeface="Meiryo" pitchFamily="34" charset="0"/>
+                <a:ea typeface="Meiryo" pitchFamily="34" charset="-122"/>
+                <a:cs typeface="Meiryo" pitchFamily="34" charset="-120"/>
+              </a:rPr>
+              <a:t>python manage.py test が通ってから送る。</a:t>
+            </a:r>
+            <a:endParaRPr lang="en-US" sz="1100" dirty="0"/>
+          </a:p>
+        </p:txBody>
+      </p:sp>
+    </p:spTree>
+  </p:cSld>
+  <p:clrMapOvr>
+    <a:masterClrMapping/>
+  </p:clrMapOvr>
+</p:sld>
+</file>
+
+<file path=ppt/slides/slide11.xml><?xml version="1.0" encoding="utf-8"?>
 <p:sld xmlns:a="http://schemas.openxmlformats.org/drawingml/2006/main" xmlns:r="http://schemas.openxmlformats.org/officeDocument/2006/relationships" xmlns:p="http://schemas.openxmlformats.org/presentationml/2006/main">
   <p:cSld name="Slide 9">
     <p:bg>
@@ -11947,6 +12678,1208 @@
 </file>
 
 <file path=ppt/slides/slide8.xml><?xml version="1.0" encoding="utf-8"?>
+<p:sld xmlns:a="http://schemas.openxmlformats.org/drawingml/2006/main" xmlns:p="http://schemas.openxmlformats.org/presentationml/2006/main" xmlns:r="http://schemas.openxmlformats.org/officeDocument/2006/relationships">
+  <p:cSld name="Slide 3">
+    <p:bg>
+      <p:bgPr>
+        <a:solidFill>
+          <a:srgbClr val="F2F5F8"/>
+        </a:solidFill>
+      </p:bgPr>
+    </p:bg>
+    <p:spTree>
+      <p:nvGrpSpPr>
+        <p:cNvPr id="1" name=""/>
+        <p:cNvGrpSpPr/>
+        <p:nvPr/>
+      </p:nvGrpSpPr>
+      <p:grpSpPr>
+        <a:xfrm>
+          <a:off x="0" y="0"/>
+          <a:ext cx="0" cy="0"/>
+          <a:chOff x="0" y="0"/>
+          <a:chExt cx="0" cy="0"/>
+        </a:xfrm>
+      </p:grpSpPr>
+      <p:sp>
+        <p:nvSpPr>
+          <p:cNvPr id="2" name="Text 0"/>
+          <p:cNvSpPr txBox="1"/>
+          <p:nvPr/>
+        </p:nvSpPr>
+        <p:spPr>
+          <a:xfrm>
+            <a:off x="457200" y="320040"/>
+            <a:ext cx="6858000" cy="274320"/>
+          </a:xfrm>
+          <a:prstGeom prst="rect">
+            <a:avLst/>
+          </a:prstGeom>
+          <a:noFill/>
+          <a:ln/>
+        </p:spPr>
+        <p:txBody>
+          <a:bodyPr wrap="square" lIns="0" tIns="0" rIns="0" bIns="0" rtlCol="0" anchor="t"/>
+          <a:lstStyle/>
+          <a:p>
+            <a:pPr indent="0" marL="0">
+              <a:buNone/>
+            </a:pPr>
+            <a:r>
+              <a:rPr lang="en-US" sz="1100" dirty="0">
+                <a:solidFill>
+                  <a:srgbClr val="1A4A70"/>
+                </a:solidFill>
+                <a:latin typeface="Consolas" pitchFamily="34" charset="0"/>
+                <a:ea typeface="Consolas" pitchFamily="34" charset="-122"/>
+                <a:cs typeface="Consolas" pitchFamily="34" charset="-120"/>
+              </a:rPr>
+              <a:t>// 03  ·  活動ページ</a:t>
+            </a:r>
+            <a:endParaRPr lang="en-US" sz="1100" dirty="0"/>
+          </a:p>
+        </p:txBody>
+      </p:sp>
+      <p:sp>
+        <p:nvSpPr>
+          <p:cNvPr id="3" name="Text 1"/>
+          <p:cNvSpPr txBox="1"/>
+          <p:nvPr/>
+        </p:nvSpPr>
+        <p:spPr>
+          <a:xfrm>
+            <a:off x="457200" y="594360"/>
+            <a:ext cx="8229600" cy="594360"/>
+          </a:xfrm>
+          <a:prstGeom prst="rect">
+            <a:avLst/>
+          </a:prstGeom>
+          <a:noFill/>
+          <a:ln/>
+        </p:spPr>
+        <p:txBody>
+          <a:bodyPr wrap="square" lIns="0" tIns="0" rIns="0" bIns="0" rtlCol="0" anchor="ctr"/>
+          <a:lstStyle/>
+          <a:p>
+            <a:pPr indent="0" marL="0">
+              <a:buNone/>
+            </a:pPr>
+            <a:r>
+              <a:rPr lang="en-US" sz="2600" b="1" dirty="0">
+                <a:solidFill>
+                  <a:srgbClr val="001E3C"/>
+                </a:solidFill>
+                <a:latin typeface="Meiryo" pitchFamily="34" charset="0"/>
+                <a:ea typeface="Meiryo" pitchFamily="34" charset="-122"/>
+                <a:cs typeface="Meiryo" pitchFamily="34" charset="-120"/>
+              </a:rPr>
+              <a:t>チケットを書く</a:t>
+            </a:r>
+            <a:endParaRPr lang="en-US" sz="2600" dirty="0"/>
+          </a:p>
+        </p:txBody>
+      </p:sp>
+      <p:sp>
+        <p:nvSpPr>
+          <p:cNvPr id="4" name="Shape 2"/>
+          <p:cNvSpPr/>
+          <p:nvPr/>
+        </p:nvSpPr>
+        <p:spPr>
+          <a:xfrm>
+            <a:off x="457200" y="1417320"/>
+            <a:ext cx="4023360" cy="3154680"/>
+          </a:xfrm>
+          <a:prstGeom prst="rect">
+            <a:avLst/>
+          </a:prstGeom>
+          <a:solidFill>
+            <a:srgbClr val="FFFFFF"/>
+          </a:solidFill>
+          <a:ln w="12700">
+            <a:solidFill>
+              <a:srgbClr val="FFFFFF"/>
+            </a:solidFill>
+            <a:prstDash val="solid"/>
+          </a:ln>
+          <a:effectLst>
+            <a:outerShdw sx="100000" sy="100000" kx="0" ky="0" algn="bl" rotWithShape="0" blurRad="76200" dist="25400" dir="5400000">
+              <a:srgbClr val="000000">
+                <a:alpha val="12000"/>
+              </a:srgbClr>
+            </a:outerShdw>
+          </a:effectLst>
+        </p:spPr>
+      </p:sp>
+      <p:sp>
+        <p:nvSpPr>
+          <p:cNvPr id="5" name="Shape 3"/>
+          <p:cNvSpPr/>
+          <p:nvPr/>
+        </p:nvSpPr>
+        <p:spPr>
+          <a:xfrm>
+            <a:off x="685800" y="1618488"/>
+            <a:ext cx="457200" cy="457200"/>
+          </a:xfrm>
+          <a:prstGeom prst="ellipse">
+            <a:avLst/>
+          </a:prstGeom>
+          <a:solidFill>
+            <a:srgbClr val="5BB8FF"/>
+          </a:solidFill>
+          <a:ln w="12700">
+            <a:solidFill>
+              <a:srgbClr val="5BB8FF"/>
+            </a:solidFill>
+            <a:prstDash val="solid"/>
+          </a:ln>
+        </p:spPr>
+      </p:sp>
+      <p:pic>
+        <p:nvPicPr>
+          <p:cNvPr id="36" name="Picture 35" descr="image.png"/>
+          <p:cNvPicPr>
+            <a:picLocks noChangeAspect="1"/>
+          </p:cNvPicPr>
+          <p:nvPr/>
+        </p:nvPicPr>
+        <p:blipFill>
+          <a:blip r:embed="rId6"/>
+          <a:stretch>
+            <a:fillRect/>
+          </a:stretch>
+        </p:blipFill>
+        <p:spPr>
+          <a:xfrm>
+            <a:off x="804672" y="1737360"/>
+            <a:ext cx="219456" cy="219456"/>
+          </a:xfrm>
+          <a:prstGeom prst="rect">
+            <a:avLst/>
+          </a:prstGeom>
+        </p:spPr>
+      </p:pic>
+      <p:sp>
+        <p:nvSpPr>
+          <p:cNvPr id="7" name="Text 4"/>
+          <p:cNvSpPr txBox="1"/>
+          <p:nvPr/>
+        </p:nvSpPr>
+        <p:spPr>
+          <a:xfrm>
+            <a:off x="1280160" y="1618488"/>
+            <a:ext cx="2743200" cy="457200"/>
+          </a:xfrm>
+          <a:prstGeom prst="rect">
+            <a:avLst/>
+          </a:prstGeom>
+          <a:noFill/>
+          <a:ln/>
+        </p:spPr>
+        <p:txBody>
+          <a:bodyPr wrap="square" lIns="0" tIns="0" rIns="0" bIns="0" rtlCol="0" anchor="ctr"/>
+          <a:lstStyle/>
+          <a:p>
+            <a:pPr indent="0" marL="0">
+              <a:buNone/>
+            </a:pPr>
+            <a:r>
+              <a:rPr lang="en-US" sz="1600" b="1" dirty="0">
+                <a:solidFill>
+                  <a:srgbClr val="001E3C"/>
+                </a:solidFill>
+                <a:latin typeface="Meiryo" pitchFamily="34" charset="0"/>
+                <a:ea typeface="Meiryo" pitchFamily="34" charset="-122"/>
+                <a:cs typeface="Meiryo" pitchFamily="34" charset="-120"/>
+              </a:rPr>
+              <a:t>起票する</a:t>
+            </a:r>
+            <a:endParaRPr lang="en-US" sz="1600" dirty="0"/>
+          </a:p>
+        </p:txBody>
+      </p:sp>
+      <p:sp>
+        <p:nvSpPr>
+          <p:cNvPr id="8" name="Shape 5"/>
+          <p:cNvSpPr/>
+          <p:nvPr/>
+        </p:nvSpPr>
+        <p:spPr>
+          <a:xfrm>
+            <a:off x="685800" y="2331720"/>
+            <a:ext cx="310896" cy="310896"/>
+          </a:xfrm>
+          <a:prstGeom prst="ellipse">
+            <a:avLst/>
+          </a:prstGeom>
+          <a:solidFill>
+            <a:srgbClr val="001E3C"/>
+          </a:solidFill>
+          <a:ln w="12700">
+            <a:solidFill>
+              <a:srgbClr val="001E3C"/>
+            </a:solidFill>
+            <a:prstDash val="solid"/>
+          </a:ln>
+        </p:spPr>
+      </p:sp>
+      <p:sp>
+        <p:nvSpPr>
+          <p:cNvPr id="9" name="Text 6"/>
+          <p:cNvSpPr txBox="1"/>
+          <p:nvPr/>
+        </p:nvSpPr>
+        <p:spPr>
+          <a:xfrm>
+            <a:off x="685800" y="2331720"/>
+            <a:ext cx="310896" cy="310896"/>
+          </a:xfrm>
+          <a:prstGeom prst="rect">
+            <a:avLst/>
+          </a:prstGeom>
+          <a:noFill/>
+          <a:ln/>
+        </p:spPr>
+        <p:txBody>
+          <a:bodyPr wrap="square" lIns="0" tIns="0" rIns="0" bIns="0" rtlCol="0" anchor="ctr"/>
+          <a:lstStyle/>
+          <a:p>
+            <a:pPr algn="ctr" indent="0" marL="0">
+              <a:buNone/>
+            </a:pPr>
+            <a:r>
+              <a:rPr lang="en-US" sz="1100" b="1" dirty="0">
+                <a:solidFill>
+                  <a:srgbClr val="FFFFFF"/>
+                </a:solidFill>
+                <a:latin typeface="Consolas" pitchFamily="34" charset="0"/>
+                <a:ea typeface="Consolas" pitchFamily="34" charset="-122"/>
+                <a:cs typeface="Consolas" pitchFamily="34" charset="-120"/>
+              </a:rPr>
+              <a:t>1</a:t>
+            </a:r>
+            <a:endParaRPr lang="en-US" sz="1100" dirty="0"/>
+          </a:p>
+        </p:txBody>
+      </p:sp>
+      <p:sp>
+        <p:nvSpPr>
+          <p:cNvPr id="10" name="Text 7"/>
+          <p:cNvSpPr txBox="1"/>
+          <p:nvPr/>
+        </p:nvSpPr>
+        <p:spPr>
+          <a:xfrm>
+            <a:off x="1124712" y="2340864"/>
+            <a:ext cx="3172968" cy="274320"/>
+          </a:xfrm>
+          <a:prstGeom prst="rect">
+            <a:avLst/>
+          </a:prstGeom>
+          <a:noFill/>
+          <a:ln/>
+        </p:spPr>
+        <p:txBody>
+          <a:bodyPr wrap="square" lIns="0" tIns="0" rIns="0" bIns="0" rtlCol="0" anchor="t"/>
+          <a:lstStyle/>
+          <a:p>
+            <a:pPr indent="0" marL="0">
+              <a:buNone/>
+            </a:pPr>
+            <a:r>
+              <a:rPr lang="en-US" sz="1200" b="1" dirty="0">
+                <a:solidFill>
+                  <a:srgbClr val="001E3C"/>
+                </a:solidFill>
+                <a:latin typeface="Meiryo" pitchFamily="34" charset="0"/>
+                <a:ea typeface="Meiryo" pitchFamily="34" charset="-122"/>
+                <a:cs typeface="Meiryo" pitchFamily="34" charset="-120"/>
+              </a:rPr>
+              <a:t>「GitHub で新しいチケット」</a:t>
+            </a:r>
+            <a:endParaRPr lang="en-US" sz="1200" dirty="0"/>
+          </a:p>
+        </p:txBody>
+      </p:sp>
+      <p:sp>
+        <p:nvSpPr>
+          <p:cNvPr id="11" name="Text 8"/>
+          <p:cNvSpPr txBox="1"/>
+          <p:nvPr/>
+        </p:nvSpPr>
+        <p:spPr>
+          <a:xfrm>
+            <a:off x="1124712" y="2606040"/>
+            <a:ext cx="3172968" cy="438912"/>
+          </a:xfrm>
+          <a:prstGeom prst="rect">
+            <a:avLst/>
+          </a:prstGeom>
+          <a:noFill/>
+          <a:ln/>
+        </p:spPr>
+        <p:txBody>
+          <a:bodyPr wrap="square" lIns="0" tIns="0" rIns="0" bIns="0" rtlCol="0" anchor="t"/>
+          <a:lstStyle/>
+          <a:p>
+            <a:pPr indent="0" marL="0">
+              <a:buNone/>
+            </a:pPr>
+            <a:r>
+              <a:rPr lang="en-US" sz="1000" dirty="0">
+                <a:solidFill>
+                  <a:srgbClr val="1B2B3A"/>
+                </a:solidFill>
+                <a:latin typeface="Meiryo" pitchFamily="34" charset="0"/>
+                <a:ea typeface="Meiryo" pitchFamily="34" charset="-122"/>
+                <a:cs typeface="Meiryo" pitchFamily="34" charset="-120"/>
+              </a:rPr>
+              <a:t>活動ページから。フォームを選んで書く</a:t>
+            </a:r>
+            <a:endParaRPr lang="en-US" sz="1000" dirty="0"/>
+          </a:p>
+        </p:txBody>
+      </p:sp>
+      <p:sp>
+        <p:nvSpPr>
+          <p:cNvPr id="12" name="Shape 9"/>
+          <p:cNvSpPr/>
+          <p:nvPr/>
+        </p:nvSpPr>
+        <p:spPr>
+          <a:xfrm>
+            <a:off x="685800" y="3063240"/>
+            <a:ext cx="310896" cy="310896"/>
+          </a:xfrm>
+          <a:prstGeom prst="ellipse">
+            <a:avLst/>
+          </a:prstGeom>
+          <a:solidFill>
+            <a:srgbClr val="001E3C"/>
+          </a:solidFill>
+          <a:ln w="12700">
+            <a:solidFill>
+              <a:srgbClr val="001E3C"/>
+            </a:solidFill>
+            <a:prstDash val="solid"/>
+          </a:ln>
+        </p:spPr>
+      </p:sp>
+      <p:sp>
+        <p:nvSpPr>
+          <p:cNvPr id="13" name="Text 10"/>
+          <p:cNvSpPr txBox="1"/>
+          <p:nvPr/>
+        </p:nvSpPr>
+        <p:spPr>
+          <a:xfrm>
+            <a:off x="685800" y="3063240"/>
+            <a:ext cx="310896" cy="310896"/>
+          </a:xfrm>
+          <a:prstGeom prst="rect">
+            <a:avLst/>
+          </a:prstGeom>
+          <a:noFill/>
+          <a:ln/>
+        </p:spPr>
+        <p:txBody>
+          <a:bodyPr wrap="square" lIns="0" tIns="0" rIns="0" bIns="0" rtlCol="0" anchor="ctr"/>
+          <a:lstStyle/>
+          <a:p>
+            <a:pPr algn="ctr" indent="0" marL="0">
+              <a:buNone/>
+            </a:pPr>
+            <a:r>
+              <a:rPr lang="en-US" sz="1100" b="1" dirty="0">
+                <a:solidFill>
+                  <a:srgbClr val="FFFFFF"/>
+                </a:solidFill>
+                <a:latin typeface="Consolas" pitchFamily="34" charset="0"/>
+                <a:ea typeface="Consolas" pitchFamily="34" charset="-122"/>
+                <a:cs typeface="Consolas" pitchFamily="34" charset="-120"/>
+              </a:rPr>
+              <a:t>2</a:t>
+            </a:r>
+            <a:endParaRPr lang="en-US" sz="1100" dirty="0"/>
+          </a:p>
+        </p:txBody>
+      </p:sp>
+      <p:sp>
+        <p:nvSpPr>
+          <p:cNvPr id="14" name="Text 11"/>
+          <p:cNvSpPr txBox="1"/>
+          <p:nvPr/>
+        </p:nvSpPr>
+        <p:spPr>
+          <a:xfrm>
+            <a:off x="1124712" y="3072384"/>
+            <a:ext cx="3172968" cy="274320"/>
+          </a:xfrm>
+          <a:prstGeom prst="rect">
+            <a:avLst/>
+          </a:prstGeom>
+          <a:noFill/>
+          <a:ln/>
+        </p:spPr>
+        <p:txBody>
+          <a:bodyPr wrap="square" lIns="0" tIns="0" rIns="0" bIns="0" rtlCol="0" anchor="t"/>
+          <a:lstStyle/>
+          <a:p>
+            <a:pPr indent="0" marL="0">
+              <a:buNone/>
+            </a:pPr>
+            <a:r>
+              <a:rPr lang="en-US" sz="1200" b="1" dirty="0">
+                <a:solidFill>
+                  <a:srgbClr val="001E3C"/>
+                </a:solidFill>
+                <a:latin typeface="Meiryo" pitchFamily="34" charset="0"/>
+                <a:ea typeface="Meiryo" pitchFamily="34" charset="-122"/>
+                <a:cs typeface="Meiryo" pitchFamily="34" charset="-120"/>
+              </a:rPr>
+              <a:t>Issues → New issue</a:t>
+            </a:r>
+            <a:endParaRPr lang="en-US" sz="1200" dirty="0"/>
+          </a:p>
+        </p:txBody>
+      </p:sp>
+      <p:sp>
+        <p:nvSpPr>
+          <p:cNvPr id="15" name="Text 12"/>
+          <p:cNvSpPr txBox="1"/>
+          <p:nvPr/>
+        </p:nvSpPr>
+        <p:spPr>
+          <a:xfrm>
+            <a:off x="1124712" y="3337560"/>
+            <a:ext cx="3172968" cy="438912"/>
+          </a:xfrm>
+          <a:prstGeom prst="rect">
+            <a:avLst/>
+          </a:prstGeom>
+          <a:noFill/>
+          <a:ln/>
+        </p:spPr>
+        <p:txBody>
+          <a:bodyPr wrap="square" lIns="0" tIns="0" rIns="0" bIns="0" rtlCol="0" anchor="t"/>
+          <a:lstStyle/>
+          <a:p>
+            <a:pPr indent="0" marL="0">
+              <a:buNone/>
+            </a:pPr>
+            <a:r>
+              <a:rPr lang="en-US" sz="1000" dirty="0">
+                <a:solidFill>
+                  <a:srgbClr val="1B2B3A"/>
+                </a:solidFill>
+                <a:latin typeface="Meiryo" pitchFamily="34" charset="0"/>
+                <a:ea typeface="Meiryo" pitchFamily="34" charset="-122"/>
+                <a:cs typeface="Meiryo" pitchFamily="34" charset="-120"/>
+              </a:rPr>
+              <a:t>リポジトリからでも同じフォームが開く</a:t>
+            </a:r>
+            <a:endParaRPr lang="en-US" sz="1000" dirty="0"/>
+          </a:p>
+        </p:txBody>
+      </p:sp>
+      <p:sp>
+        <p:nvSpPr>
+          <p:cNvPr id="16" name="Shape 13"/>
+          <p:cNvSpPr/>
+          <p:nvPr/>
+        </p:nvSpPr>
+        <p:spPr>
+          <a:xfrm>
+            <a:off x="685800" y="3794760"/>
+            <a:ext cx="310896" cy="310896"/>
+          </a:xfrm>
+          <a:prstGeom prst="ellipse">
+            <a:avLst/>
+          </a:prstGeom>
+          <a:solidFill>
+            <a:srgbClr val="001E3C"/>
+          </a:solidFill>
+          <a:ln w="12700">
+            <a:solidFill>
+              <a:srgbClr val="001E3C"/>
+            </a:solidFill>
+            <a:prstDash val="solid"/>
+          </a:ln>
+        </p:spPr>
+      </p:sp>
+      <p:sp>
+        <p:nvSpPr>
+          <p:cNvPr id="17" name="Text 14"/>
+          <p:cNvSpPr txBox="1"/>
+          <p:nvPr/>
+        </p:nvSpPr>
+        <p:spPr>
+          <a:xfrm>
+            <a:off x="685800" y="3794760"/>
+            <a:ext cx="310896" cy="310896"/>
+          </a:xfrm>
+          <a:prstGeom prst="rect">
+            <a:avLst/>
+          </a:prstGeom>
+          <a:noFill/>
+          <a:ln/>
+        </p:spPr>
+        <p:txBody>
+          <a:bodyPr wrap="square" lIns="0" tIns="0" rIns="0" bIns="0" rtlCol="0" anchor="ctr"/>
+          <a:lstStyle/>
+          <a:p>
+            <a:pPr algn="ctr" indent="0" marL="0">
+              <a:buNone/>
+            </a:pPr>
+            <a:r>
+              <a:rPr lang="en-US" sz="1100" b="1" dirty="0">
+                <a:solidFill>
+                  <a:srgbClr val="FFFFFF"/>
+                </a:solidFill>
+                <a:latin typeface="Consolas" pitchFamily="34" charset="0"/>
+                <a:ea typeface="Consolas" pitchFamily="34" charset="-122"/>
+                <a:cs typeface="Consolas" pitchFamily="34" charset="-120"/>
+              </a:rPr>
+              <a:t>3</a:t>
+            </a:r>
+            <a:endParaRPr lang="en-US" sz="1100" dirty="0"/>
+          </a:p>
+        </p:txBody>
+      </p:sp>
+      <p:sp>
+        <p:nvSpPr>
+          <p:cNvPr id="18" name="Text 15"/>
+          <p:cNvSpPr txBox="1"/>
+          <p:nvPr/>
+        </p:nvSpPr>
+        <p:spPr>
+          <a:xfrm>
+            <a:off x="1124712" y="3803904"/>
+            <a:ext cx="3172968" cy="274320"/>
+          </a:xfrm>
+          <a:prstGeom prst="rect">
+            <a:avLst/>
+          </a:prstGeom>
+          <a:noFill/>
+          <a:ln/>
+        </p:spPr>
+        <p:txBody>
+          <a:bodyPr wrap="square" lIns="0" tIns="0" rIns="0" bIns="0" rtlCol="0" anchor="t"/>
+          <a:lstStyle/>
+          <a:p>
+            <a:pPr indent="0" marL="0">
+              <a:buNone/>
+            </a:pPr>
+            <a:r>
+              <a:rPr lang="en-US" sz="1200" b="1" dirty="0">
+                <a:solidFill>
+                  <a:srgbClr val="001E3C"/>
+                </a:solidFill>
+                <a:latin typeface="Meiryo" pitchFamily="34" charset="0"/>
+                <a:ea typeface="Meiryo" pitchFamily="34" charset="-122"/>
+                <a:cs typeface="Meiryo" pitchFamily="34" charset="-120"/>
+              </a:rPr>
+              <a:t>ボードからは Create new issue</a:t>
+            </a:r>
+            <a:endParaRPr lang="en-US" sz="1200" dirty="0"/>
+          </a:p>
+        </p:txBody>
+      </p:sp>
+      <p:sp>
+        <p:nvSpPr>
+          <p:cNvPr id="19" name="Text 16"/>
+          <p:cNvSpPr txBox="1"/>
+          <p:nvPr/>
+        </p:nvSpPr>
+        <p:spPr>
+          <a:xfrm>
+            <a:off x="1124712" y="4069080"/>
+            <a:ext cx="3172968" cy="438912"/>
+          </a:xfrm>
+          <a:prstGeom prst="rect">
+            <a:avLst/>
+          </a:prstGeom>
+          <a:noFill/>
+          <a:ln/>
+        </p:spPr>
+        <p:txBody>
+          <a:bodyPr wrap="square" lIns="0" tIns="0" rIns="0" bIns="0" rtlCol="0" anchor="t"/>
+          <a:lstStyle/>
+          <a:p>
+            <a:pPr indent="0" marL="0">
+              <a:buNone/>
+            </a:pPr>
+            <a:r>
+              <a:rPr lang="en-US" sz="1000" dirty="0">
+                <a:solidFill>
+                  <a:srgbClr val="1B2B3A"/>
+                </a:solidFill>
+                <a:latin typeface="Meiryo" pitchFamily="34" charset="0"/>
+                <a:ea typeface="Meiryo" pitchFamily="34" charset="-122"/>
+                <a:cs typeface="Meiryo" pitchFamily="34" charset="-120"/>
+              </a:rPr>
+              <a:t>「+ Add item」の下書きは活動ページに出ない</a:t>
+            </a:r>
+            <a:endParaRPr lang="en-US" sz="1000" dirty="0"/>
+          </a:p>
+        </p:txBody>
+      </p:sp>
+      <p:sp>
+        <p:nvSpPr>
+          <p:cNvPr id="20" name="Shape 17"/>
+          <p:cNvSpPr/>
+          <p:nvPr/>
+        </p:nvSpPr>
+        <p:spPr>
+          <a:xfrm>
+            <a:off x="4663440" y="1417320"/>
+            <a:ext cx="4023360" cy="3154680"/>
+          </a:xfrm>
+          <a:prstGeom prst="rect">
+            <a:avLst/>
+          </a:prstGeom>
+          <a:solidFill>
+            <a:srgbClr val="FFFFFF"/>
+          </a:solidFill>
+          <a:ln w="12700">
+            <a:solidFill>
+              <a:srgbClr val="FFFFFF"/>
+            </a:solidFill>
+            <a:prstDash val="solid"/>
+          </a:ln>
+          <a:effectLst>
+            <a:outerShdw sx="100000" sy="100000" kx="0" ky="0" algn="bl" rotWithShape="0" blurRad="76200" dist="25400" dir="5400000">
+              <a:srgbClr val="000000">
+                <a:alpha val="12000"/>
+              </a:srgbClr>
+            </a:outerShdw>
+          </a:effectLst>
+        </p:spPr>
+      </p:sp>
+      <p:sp>
+        <p:nvSpPr>
+          <p:cNvPr id="21" name="Shape 18"/>
+          <p:cNvSpPr/>
+          <p:nvPr/>
+        </p:nvSpPr>
+        <p:spPr>
+          <a:xfrm>
+            <a:off x="4892040" y="1618488"/>
+            <a:ext cx="457200" cy="457200"/>
+          </a:xfrm>
+          <a:prstGeom prst="ellipse">
+            <a:avLst/>
+          </a:prstGeom>
+          <a:solidFill>
+            <a:srgbClr val="001E3C"/>
+          </a:solidFill>
+          <a:ln w="12700">
+            <a:solidFill>
+              <a:srgbClr val="001E3C"/>
+            </a:solidFill>
+            <a:prstDash val="solid"/>
+          </a:ln>
+        </p:spPr>
+      </p:sp>
+      <p:pic>
+        <p:nvPicPr>
+          <p:cNvPr id="35" name="Picture 34" descr="image.png"/>
+          <p:cNvPicPr>
+            <a:picLocks noChangeAspect="1"/>
+          </p:cNvPicPr>
+          <p:nvPr/>
+        </p:nvPicPr>
+        <p:blipFill>
+          <a:blip r:embed="rId5"/>
+          <a:stretch>
+            <a:fillRect/>
+          </a:stretch>
+        </p:blipFill>
+        <p:spPr>
+          <a:xfrm>
+            <a:off x="5010912" y="1737360"/>
+            <a:ext cx="219456" cy="219456"/>
+          </a:xfrm>
+          <a:prstGeom prst="rect">
+            <a:avLst/>
+          </a:prstGeom>
+        </p:spPr>
+      </p:pic>
+      <p:sp>
+        <p:nvSpPr>
+          <p:cNvPr id="23" name="Text 19"/>
+          <p:cNvSpPr txBox="1"/>
+          <p:nvPr/>
+        </p:nvSpPr>
+        <p:spPr>
+          <a:xfrm>
+            <a:off x="5486400" y="1618488"/>
+            <a:ext cx="2743200" cy="457200"/>
+          </a:xfrm>
+          <a:prstGeom prst="rect">
+            <a:avLst/>
+          </a:prstGeom>
+          <a:noFill/>
+          <a:ln/>
+        </p:spPr>
+        <p:txBody>
+          <a:bodyPr wrap="square" lIns="0" tIns="0" rIns="0" bIns="0" rtlCol="0" anchor="ctr"/>
+          <a:lstStyle/>
+          <a:p>
+            <a:pPr indent="0" marL="0">
+              <a:buNone/>
+            </a:pPr>
+            <a:r>
+              <a:rPr lang="en-US" sz="1600" b="1" dirty="0">
+                <a:solidFill>
+                  <a:srgbClr val="001E3C"/>
+                </a:solidFill>
+                <a:latin typeface="Meiryo" pitchFamily="34" charset="0"/>
+                <a:ea typeface="Meiryo" pitchFamily="34" charset="-122"/>
+                <a:cs typeface="Meiryo" pitchFamily="34" charset="-120"/>
+              </a:rPr>
+              <a:t>動かす・閉じる</a:t>
+            </a:r>
+            <a:endParaRPr lang="en-US" sz="1600" dirty="0"/>
+          </a:p>
+        </p:txBody>
+      </p:sp>
+      <p:sp>
+        <p:nvSpPr>
+          <p:cNvPr id="24" name="Shape 20"/>
+          <p:cNvSpPr/>
+          <p:nvPr/>
+        </p:nvSpPr>
+        <p:spPr>
+          <a:xfrm>
+            <a:off x="4892040" y="2331720"/>
+            <a:ext cx="310896" cy="310896"/>
+          </a:xfrm>
+          <a:prstGeom prst="ellipse">
+            <a:avLst/>
+          </a:prstGeom>
+          <a:solidFill>
+            <a:srgbClr val="001E3C"/>
+          </a:solidFill>
+          <a:ln w="12700">
+            <a:solidFill>
+              <a:srgbClr val="001E3C"/>
+            </a:solidFill>
+            <a:prstDash val="solid"/>
+          </a:ln>
+        </p:spPr>
+      </p:sp>
+      <p:sp>
+        <p:nvSpPr>
+          <p:cNvPr id="25" name="Text 21"/>
+          <p:cNvSpPr txBox="1"/>
+          <p:nvPr/>
+        </p:nvSpPr>
+        <p:spPr>
+          <a:xfrm>
+            <a:off x="4892040" y="2331720"/>
+            <a:ext cx="310896" cy="310896"/>
+          </a:xfrm>
+          <a:prstGeom prst="rect">
+            <a:avLst/>
+          </a:prstGeom>
+          <a:noFill/>
+          <a:ln/>
+        </p:spPr>
+        <p:txBody>
+          <a:bodyPr wrap="square" lIns="0" tIns="0" rIns="0" bIns="0" rtlCol="0" anchor="ctr"/>
+          <a:lstStyle/>
+          <a:p>
+            <a:pPr algn="ctr" indent="0" marL="0">
+              <a:buNone/>
+            </a:pPr>
+            <a:r>
+              <a:rPr lang="en-US" sz="1100" b="1" dirty="0">
+                <a:solidFill>
+                  <a:srgbClr val="FFFFFF"/>
+                </a:solidFill>
+                <a:latin typeface="Consolas" pitchFamily="34" charset="0"/>
+                <a:ea typeface="Consolas" pitchFamily="34" charset="-122"/>
+                <a:cs typeface="Consolas" pitchFamily="34" charset="-120"/>
+              </a:rPr>
+              <a:t>1</a:t>
+            </a:r>
+            <a:endParaRPr lang="en-US" sz="1100" dirty="0"/>
+          </a:p>
+        </p:txBody>
+      </p:sp>
+      <p:sp>
+        <p:nvSpPr>
+          <p:cNvPr id="26" name="Text 22"/>
+          <p:cNvSpPr txBox="1"/>
+          <p:nvPr/>
+        </p:nvSpPr>
+        <p:spPr>
+          <a:xfrm>
+            <a:off x="5330952" y="2340864"/>
+            <a:ext cx="3172968" cy="274320"/>
+          </a:xfrm>
+          <a:prstGeom prst="rect">
+            <a:avLst/>
+          </a:prstGeom>
+          <a:noFill/>
+          <a:ln/>
+        </p:spPr>
+        <p:txBody>
+          <a:bodyPr wrap="square" lIns="0" tIns="0" rIns="0" bIns="0" rtlCol="0" anchor="t"/>
+          <a:lstStyle/>
+          <a:p>
+            <a:pPr indent="0" marL="0">
+              <a:buNone/>
+            </a:pPr>
+            <a:r>
+              <a:rPr lang="en-US" sz="1200" b="1" dirty="0">
+                <a:solidFill>
+                  <a:srgbClr val="001E3C"/>
+                </a:solidFill>
+                <a:latin typeface="Meiryo" pitchFamily="34" charset="0"/>
+                <a:ea typeface="Meiryo" pitchFamily="34" charset="-122"/>
+                <a:cs typeface="Meiryo" pitchFamily="34" charset="-120"/>
+              </a:rPr>
+              <a:t>ボードで項目を入れる</a:t>
+            </a:r>
+            <a:endParaRPr lang="en-US" sz="1200" dirty="0"/>
+          </a:p>
+        </p:txBody>
+      </p:sp>
+      <p:sp>
+        <p:nvSpPr>
+          <p:cNvPr id="27" name="Text 23"/>
+          <p:cNvSpPr txBox="1"/>
+          <p:nvPr/>
+        </p:nvSpPr>
+        <p:spPr>
+          <a:xfrm>
+            <a:off x="5330952" y="2606040"/>
+            <a:ext cx="3172968" cy="438912"/>
+          </a:xfrm>
+          <a:prstGeom prst="rect">
+            <a:avLst/>
+          </a:prstGeom>
+          <a:noFill/>
+          <a:ln/>
+        </p:spPr>
+        <p:txBody>
+          <a:bodyPr wrap="square" lIns="0" tIns="0" rIns="0" bIns="0" rtlCol="0" anchor="t"/>
+          <a:lstStyle/>
+          <a:p>
+            <a:pPr indent="0" marL="0">
+              <a:buNone/>
+            </a:pPr>
+            <a:r>
+              <a:rPr lang="en-US" sz="1000" dirty="0">
+                <a:solidFill>
+                  <a:srgbClr val="1B2B3A"/>
+                </a:solidFill>
+                <a:latin typeface="Meiryo" pitchFamily="34" charset="0"/>
+                <a:ea typeface="Meiryo" pitchFamily="34" charset="-122"/>
+                <a:cs typeface="Meiryo" pitchFamily="34" charset="-120"/>
+              </a:rPr>
+              <a:t>優先度・期日・進捗率・プロジェクト</a:t>
+            </a:r>
+            <a:endParaRPr lang="en-US" sz="1000" dirty="0"/>
+          </a:p>
+        </p:txBody>
+      </p:sp>
+      <p:sp>
+        <p:nvSpPr>
+          <p:cNvPr id="28" name="Shape 24"/>
+          <p:cNvSpPr/>
+          <p:nvPr/>
+        </p:nvSpPr>
+        <p:spPr>
+          <a:xfrm>
+            <a:off x="4892040" y="3063240"/>
+            <a:ext cx="310896" cy="310896"/>
+          </a:xfrm>
+          <a:prstGeom prst="ellipse">
+            <a:avLst/>
+          </a:prstGeom>
+          <a:solidFill>
+            <a:srgbClr val="001E3C"/>
+          </a:solidFill>
+          <a:ln w="12700">
+            <a:solidFill>
+              <a:srgbClr val="001E3C"/>
+            </a:solidFill>
+            <a:prstDash val="solid"/>
+          </a:ln>
+        </p:spPr>
+      </p:sp>
+      <p:sp>
+        <p:nvSpPr>
+          <p:cNvPr id="29" name="Text 25"/>
+          <p:cNvSpPr txBox="1"/>
+          <p:nvPr/>
+        </p:nvSpPr>
+        <p:spPr>
+          <a:xfrm>
+            <a:off x="4892040" y="3063240"/>
+            <a:ext cx="310896" cy="310896"/>
+          </a:xfrm>
+          <a:prstGeom prst="rect">
+            <a:avLst/>
+          </a:prstGeom>
+          <a:noFill/>
+          <a:ln/>
+        </p:spPr>
+        <p:txBody>
+          <a:bodyPr wrap="square" lIns="0" tIns="0" rIns="0" bIns="0" rtlCol="0" anchor="ctr"/>
+          <a:lstStyle/>
+          <a:p>
+            <a:pPr algn="ctr" indent="0" marL="0">
+              <a:buNone/>
+            </a:pPr>
+            <a:r>
+              <a:rPr lang="en-US" sz="1100" b="1" dirty="0">
+                <a:solidFill>
+                  <a:srgbClr val="FFFFFF"/>
+                </a:solidFill>
+                <a:latin typeface="Consolas" pitchFamily="34" charset="0"/>
+                <a:ea typeface="Consolas" pitchFamily="34" charset="-122"/>
+                <a:cs typeface="Consolas" pitchFamily="34" charset="-120"/>
+              </a:rPr>
+              <a:t>2</a:t>
+            </a:r>
+            <a:endParaRPr lang="en-US" sz="1100" dirty="0"/>
+          </a:p>
+        </p:txBody>
+      </p:sp>
+      <p:sp>
+        <p:nvSpPr>
+          <p:cNvPr id="30" name="Text 26"/>
+          <p:cNvSpPr txBox="1"/>
+          <p:nvPr/>
+        </p:nvSpPr>
+        <p:spPr>
+          <a:xfrm>
+            <a:off x="5330952" y="3072384"/>
+            <a:ext cx="3172968" cy="274320"/>
+          </a:xfrm>
+          <a:prstGeom prst="rect">
+            <a:avLst/>
+          </a:prstGeom>
+          <a:noFill/>
+          <a:ln/>
+        </p:spPr>
+        <p:txBody>
+          <a:bodyPr wrap="square" lIns="0" tIns="0" rIns="0" bIns="0" rtlCol="0" anchor="t"/>
+          <a:lstStyle/>
+          <a:p>
+            <a:pPr indent="0" marL="0">
+              <a:buNone/>
+            </a:pPr>
+            <a:r>
+              <a:rPr lang="en-US" sz="1200" b="1" dirty="0">
+                <a:solidFill>
+                  <a:srgbClr val="001E3C"/>
+                </a:solidFill>
+                <a:latin typeface="Meiryo" pitchFamily="34" charset="0"/>
+                <a:ea typeface="Meiryo" pitchFamily="34" charset="-122"/>
+                <a:cs typeface="Meiryo" pitchFamily="34" charset="-120"/>
+              </a:rPr>
+              <a:t>Issue を閉じる</a:t>
+            </a:r>
+            <a:endParaRPr lang="en-US" sz="1200" dirty="0"/>
+          </a:p>
+        </p:txBody>
+      </p:sp>
+      <p:sp>
+        <p:nvSpPr>
+          <p:cNvPr id="37" name="Text ticket note"/>
+          <p:cNvSpPr txBox="1"/>
+          <p:nvPr/>
+        </p:nvSpPr>
+        <p:spPr>
+          <a:xfrm>
+            <a:off x="5330952" y="3337560"/>
+            <a:ext cx="3172968" cy="438912"/>
+          </a:xfrm>
+          <a:prstGeom prst="rect">
+            <a:avLst/>
+          </a:prstGeom>
+          <a:noFill/>
+          <a:ln/>
+        </p:spPr>
+        <p:txBody>
+          <a:bodyPr wrap="square" lIns="0" tIns="0" rIns="0" bIns="0" rtlCol="0" anchor="t"/>
+          <a:lstStyle/>
+          <a:p>
+            <a:pPr indent="0" marL="0">
+              <a:buNone/>
+            </a:pPr>
+            <a:r>
+              <a:rPr lang="en-US" sz="1000" dirty="0">
+                <a:solidFill>
+                  <a:srgbClr val="1B2B3A"/>
+                </a:solidFill>
+                <a:latin typeface="Meiryo" pitchFamily="34" charset="0"/>
+                <a:ea typeface="Meiryo" pitchFamily="34" charset="-122"/>
+                <a:cs typeface="Meiryo" pitchFamily="34" charset="-120"/>
+              </a:rPr>
+              <a:t>ボードは「終了」、活動ページは完了に</a:t>
+            </a:r>
+            <a:endParaRPr lang="en-US" sz="1000" dirty="0"/>
+          </a:p>
+        </p:txBody>
+      </p:sp>
+      <p:sp>
+        <p:nvSpPr>
+          <p:cNvPr id="31" name="Shape 27"/>
+          <p:cNvSpPr/>
+          <p:nvPr/>
+        </p:nvSpPr>
+        <p:spPr>
+          <a:xfrm>
+            <a:off x="4892040" y="3794760"/>
+            <a:ext cx="310896" cy="310896"/>
+          </a:xfrm>
+          <a:prstGeom prst="ellipse">
+            <a:avLst/>
+          </a:prstGeom>
+          <a:solidFill>
+            <a:srgbClr val="001E3C"/>
+          </a:solidFill>
+          <a:ln w="12700">
+            <a:solidFill>
+              <a:srgbClr val="001E3C"/>
+            </a:solidFill>
+            <a:prstDash val="solid"/>
+          </a:ln>
+        </p:spPr>
+      </p:sp>
+      <p:sp>
+        <p:nvSpPr>
+          <p:cNvPr id="32" name="Text 28"/>
+          <p:cNvSpPr txBox="1"/>
+          <p:nvPr/>
+        </p:nvSpPr>
+        <p:spPr>
+          <a:xfrm>
+            <a:off x="4892040" y="3794760"/>
+            <a:ext cx="310896" cy="310896"/>
+          </a:xfrm>
+          <a:prstGeom prst="rect">
+            <a:avLst/>
+          </a:prstGeom>
+          <a:noFill/>
+          <a:ln/>
+        </p:spPr>
+        <p:txBody>
+          <a:bodyPr wrap="square" lIns="0" tIns="0" rIns="0" bIns="0" rtlCol="0" anchor="ctr"/>
+          <a:lstStyle/>
+          <a:p>
+            <a:pPr algn="ctr" indent="0" marL="0">
+              <a:buNone/>
+            </a:pPr>
+            <a:r>
+              <a:rPr lang="en-US" sz="1100" b="1" dirty="0">
+                <a:solidFill>
+                  <a:srgbClr val="FFFFFF"/>
+                </a:solidFill>
+                <a:latin typeface="Consolas" pitchFamily="34" charset="0"/>
+                <a:ea typeface="Consolas" pitchFamily="34" charset="-122"/>
+                <a:cs typeface="Consolas" pitchFamily="34" charset="-120"/>
+              </a:rPr>
+              <a:t>3</a:t>
+            </a:r>
+            <a:endParaRPr lang="en-US" sz="1100" dirty="0"/>
+          </a:p>
+        </p:txBody>
+      </p:sp>
+      <p:sp>
+        <p:nvSpPr>
+          <p:cNvPr id="33" name="Text 29"/>
+          <p:cNvSpPr txBox="1"/>
+          <p:nvPr/>
+        </p:nvSpPr>
+        <p:spPr>
+          <a:xfrm>
+            <a:off x="5330952" y="3803904"/>
+            <a:ext cx="3172968" cy="274320"/>
+          </a:xfrm>
+          <a:prstGeom prst="rect">
+            <a:avLst/>
+          </a:prstGeom>
+          <a:noFill/>
+          <a:ln/>
+        </p:spPr>
+        <p:txBody>
+          <a:bodyPr wrap="square" lIns="0" tIns="0" rIns="0" bIns="0" rtlCol="0" anchor="t"/>
+          <a:lstStyle/>
+          <a:p>
+            <a:pPr indent="0" marL="0">
+              <a:buNone/>
+            </a:pPr>
+            <a:r>
+              <a:rPr lang="en-US" sz="1200" b="1" dirty="0">
+                <a:solidFill>
+                  <a:srgbClr val="001E3C"/>
+                </a:solidFill>
+                <a:latin typeface="Meiryo" pitchFamily="34" charset="0"/>
+                <a:ea typeface="Meiryo" pitchFamily="34" charset="-122"/>
+                <a:cs typeface="Meiryo" pitchFamily="34" charset="-120"/>
+              </a:rPr>
+              <a:t>5 分以内に活動ページに出る</a:t>
+            </a:r>
+            <a:endParaRPr lang="en-US" sz="1200" dirty="0"/>
+          </a:p>
+        </p:txBody>
+      </p:sp>
+      <p:sp>
+        <p:nvSpPr>
+          <p:cNvPr id="34" name="Text 30"/>
+          <p:cNvSpPr txBox="1"/>
+          <p:nvPr/>
+        </p:nvSpPr>
+        <p:spPr>
+          <a:xfrm>
+            <a:off x="5330952" y="4069080"/>
+            <a:ext cx="3172968" cy="438912"/>
+          </a:xfrm>
+          <a:prstGeom prst="rect">
+            <a:avLst/>
+          </a:prstGeom>
+          <a:noFill/>
+          <a:ln/>
+        </p:spPr>
+        <p:txBody>
+          <a:bodyPr wrap="square" lIns="0" tIns="0" rIns="0" bIns="0" rtlCol="0" anchor="t"/>
+          <a:lstStyle/>
+          <a:p>
+            <a:pPr indent="0" marL="0">
+              <a:buNone/>
+            </a:pPr>
+            <a:r>
+              <a:rPr lang="en-US" sz="1000" dirty="0">
+                <a:solidFill>
+                  <a:srgbClr val="1B2B3A"/>
+                </a:solidFill>
+                <a:latin typeface="Meiryo" pitchFamily="34" charset="0"/>
+                <a:ea typeface="Meiryo" pitchFamily="34" charset="-122"/>
+                <a:cs typeface="Meiryo" pitchFamily="34" charset="-120"/>
+              </a:rPr>
+              <a:t>題名と本文は公開。担当者は出ない</a:t>
+            </a:r>
+            <a:endParaRPr lang="en-US" sz="1000" dirty="0"/>
+          </a:p>
+        </p:txBody>
+      </p:sp>
+    </p:spTree>
+  </p:cSld>
+  <p:clrMapOvr>
+    <a:masterClrMapping/>
+  </p:clrMapOvr>
+</p:sld>
+</file>
+
+<file path=ppt/slides/slide9.xml><?xml version="1.0" encoding="utf-8"?>
 <p:sld xmlns:a="http://schemas.openxmlformats.org/drawingml/2006/main" xmlns:r="http://schemas.openxmlformats.org/officeDocument/2006/relationships" xmlns:p="http://schemas.openxmlformats.org/presentationml/2006/main">
   <p:cSld name="Slide 7">
     <p:bg>
@@ -13091,736 +15024,6 @@
 </p:sld>
 </file>
 
-<file path=ppt/slides/slide9.xml><?xml version="1.0" encoding="utf-8"?>
-<p:sld xmlns:a="http://schemas.openxmlformats.org/drawingml/2006/main" xmlns:r="http://schemas.openxmlformats.org/officeDocument/2006/relationships" xmlns:p="http://schemas.openxmlformats.org/presentationml/2006/main">
-  <p:cSld name="Slide 8">
-    <p:bg>
-      <p:bgPr>
-        <a:solidFill>
-          <a:srgbClr val="001E3C"/>
-        </a:solidFill>
-      </p:bgPr>
-    </p:bg>
-    <p:spTree>
-      <p:nvGrpSpPr>
-        <p:cNvPr id="1" name=""/>
-        <p:cNvGrpSpPr/>
-        <p:nvPr/>
-      </p:nvGrpSpPr>
-      <p:grpSpPr>
-        <a:xfrm>
-          <a:off x="0" y="0"/>
-          <a:ext cx="0" cy="0"/>
-          <a:chOff x="0" y="0"/>
-          <a:chExt cx="0" cy="0"/>
-        </a:xfrm>
-      </p:grpSpPr>
-      <p:sp>
-        <p:nvSpPr>
-          <p:cNvPr id="2" name="Text 0"/>
-          <p:cNvSpPr txBox="1"/>
-          <p:nvPr/>
-        </p:nvSpPr>
-        <p:spPr>
-          <a:xfrm>
-            <a:off x="457200" y="320040"/>
-            <a:ext cx="6858000" cy="274320"/>
-          </a:xfrm>
-          <a:prstGeom prst="rect">
-            <a:avLst/>
-          </a:prstGeom>
-          <a:noFill/>
-          <a:ln/>
-        </p:spPr>
-        <p:txBody>
-          <a:bodyPr wrap="square" lIns="0" tIns="0" rIns="0" bIns="0" rtlCol="0" anchor="t"/>
-          <a:lstStyle/>
-          <a:p>
-            <a:pPr indent="0" marL="0">
-              <a:buNone/>
-            </a:pPr>
-            <a:r>
-              <a:rPr lang="en-US" sz="1100" dirty="0">
-                <a:solidFill>
-                  <a:srgbClr val="5BB8FF"/>
-                </a:solidFill>
-                <a:latin typeface="Consolas" pitchFamily="34" charset="0"/>
-                <a:ea typeface="Consolas" pitchFamily="34" charset="-122"/>
-                <a:cs typeface="Consolas" pitchFamily="34" charset="-120"/>
-              </a:rPr>
-              <a:t>// 03  ·  ルール</a:t>
-            </a:r>
-            <a:endParaRPr lang="en-US" sz="1100" dirty="0"/>
-          </a:p>
-        </p:txBody>
-      </p:sp>
-      <p:sp>
-        <p:nvSpPr>
-          <p:cNvPr id="3" name="Text 1"/>
-          <p:cNvSpPr txBox="1"/>
-          <p:nvPr/>
-        </p:nvSpPr>
-        <p:spPr>
-          <a:xfrm>
-            <a:off x="457200" y="594360"/>
-            <a:ext cx="8229600" cy="594360"/>
-          </a:xfrm>
-          <a:prstGeom prst="rect">
-            <a:avLst/>
-          </a:prstGeom>
-          <a:noFill/>
-          <a:ln/>
-        </p:spPr>
-        <p:txBody>
-          <a:bodyPr wrap="square" lIns="0" tIns="0" rIns="0" bIns="0" rtlCol="0" anchor="ctr"/>
-          <a:lstStyle/>
-          <a:p>
-            <a:pPr indent="0" marL="0">
-              <a:buNone/>
-            </a:pPr>
-            <a:r>
-              <a:rPr lang="en-US" sz="2600" b="1" dirty="0">
-                <a:solidFill>
-                  <a:srgbClr val="FFFFFF"/>
-                </a:solidFill>
-                <a:latin typeface="Meiryo" pitchFamily="34" charset="0"/>
-                <a:ea typeface="Meiryo" pitchFamily="34" charset="-122"/>
-                <a:cs typeface="Meiryo" pitchFamily="34" charset="-120"/>
-              </a:rPr>
-              <a:t>守ることは 4 つだけ</a:t>
-            </a:r>
-            <a:endParaRPr lang="en-US" sz="2600" dirty="0"/>
-          </a:p>
-        </p:txBody>
-      </p:sp>
-      <p:sp>
-        <p:nvSpPr>
-          <p:cNvPr id="4" name="Shape 2"/>
-          <p:cNvSpPr/>
-          <p:nvPr/>
-        </p:nvSpPr>
-        <p:spPr>
-          <a:xfrm>
-            <a:off x="457200" y="1463040"/>
-            <a:ext cx="4023360" cy="1463040"/>
-          </a:xfrm>
-          <a:prstGeom prst="rect">
-            <a:avLst/>
-          </a:prstGeom>
-          <a:solidFill>
-            <a:srgbClr val="FFFFFF"/>
-          </a:solidFill>
-          <a:ln w="12700">
-            <a:solidFill>
-              <a:srgbClr val="FFFFFF"/>
-            </a:solidFill>
-            <a:prstDash val="solid"/>
-          </a:ln>
-        </p:spPr>
-      </p:sp>
-      <p:sp>
-        <p:nvSpPr>
-          <p:cNvPr id="5" name="Shape 3"/>
-          <p:cNvSpPr/>
-          <p:nvPr/>
-        </p:nvSpPr>
-        <p:spPr>
-          <a:xfrm>
-            <a:off x="731520" y="1737360"/>
-            <a:ext cx="548640" cy="548640"/>
-          </a:xfrm>
-          <a:prstGeom prst="ellipse">
-            <a:avLst/>
-          </a:prstGeom>
-          <a:solidFill>
-            <a:srgbClr val="5BB8FF"/>
-          </a:solidFill>
-          <a:ln w="12700">
-            <a:solidFill>
-              <a:srgbClr val="5BB8FF"/>
-            </a:solidFill>
-            <a:prstDash val="solid"/>
-          </a:ln>
-        </p:spPr>
-      </p:sp>
-      <p:pic>
-        <p:nvPicPr>
-          <p:cNvPr id="6" name="Image 0" descr="preencoded.png">    </p:cNvPr>
-          <p:cNvPicPr>
-            <a:picLocks noChangeAspect="1"/>
-          </p:cNvPicPr>
-          <p:nvPr/>
-        </p:nvPicPr>
-        <p:blipFill>
-          <a:blip r:embed="rId1"/>
-          <a:stretch>
-            <a:fillRect/>
-          </a:stretch>
-        </p:blipFill>
-        <p:spPr>
-          <a:xfrm>
-            <a:off x="874166" y="1880006"/>
-            <a:ext cx="263347" cy="263347"/>
-          </a:xfrm>
-          <a:prstGeom prst="rect">
-            <a:avLst/>
-          </a:prstGeom>
-        </p:spPr>
-      </p:pic>
-      <p:sp>
-        <p:nvSpPr>
-          <p:cNvPr id="7" name="Text 4"/>
-          <p:cNvSpPr txBox="1"/>
-          <p:nvPr/>
-        </p:nvSpPr>
-        <p:spPr>
-          <a:xfrm>
-            <a:off x="1463040" y="1737360"/>
-            <a:ext cx="2788920" cy="365760"/>
-          </a:xfrm>
-          <a:prstGeom prst="rect">
-            <a:avLst/>
-          </a:prstGeom>
-          <a:noFill/>
-          <a:ln/>
-        </p:spPr>
-        <p:txBody>
-          <a:bodyPr wrap="square" lIns="0" tIns="0" rIns="0" bIns="0" rtlCol="0" anchor="t"/>
-          <a:lstStyle/>
-          <a:p>
-            <a:pPr indent="0" marL="0">
-              <a:buNone/>
-            </a:pPr>
-            <a:r>
-              <a:rPr lang="en-US" sz="1400" b="1" dirty="0">
-                <a:solidFill>
-                  <a:srgbClr val="001E3C"/>
-                </a:solidFill>
-                <a:latin typeface="Meiryo" pitchFamily="34" charset="0"/>
-                <a:ea typeface="Meiryo" pitchFamily="34" charset="-122"/>
-                <a:cs typeface="Meiryo" pitchFamily="34" charset="-120"/>
-              </a:rPr>
-              <a:t>main に直接 push しない</a:t>
-            </a:r>
-            <a:endParaRPr lang="en-US" sz="1400" dirty="0"/>
-          </a:p>
-        </p:txBody>
-      </p:sp>
-      <p:sp>
-        <p:nvSpPr>
-          <p:cNvPr id="8" name="Text 5"/>
-          <p:cNvSpPr txBox="1"/>
-          <p:nvPr/>
-        </p:nvSpPr>
-        <p:spPr>
-          <a:xfrm>
-            <a:off x="1463040" y="2148840"/>
-            <a:ext cx="2788920" cy="685800"/>
-          </a:xfrm>
-          <a:prstGeom prst="rect">
-            <a:avLst/>
-          </a:prstGeom>
-          <a:noFill/>
-          <a:ln/>
-        </p:spPr>
-        <p:txBody>
-          <a:bodyPr wrap="square" lIns="0" tIns="0" rIns="0" bIns="0" rtlCol="0" anchor="t"/>
-          <a:lstStyle/>
-          <a:p>
-            <a:pPr indent="0" marL="0">
-              <a:lnSpc>
-                <a:spcPct val="120000"/>
-              </a:lnSpc>
-              <a:buNone/>
-            </a:pPr>
-            <a:r>
-              <a:rPr lang="en-US" sz="1100" dirty="0">
-                <a:solidFill>
-                  <a:srgbClr val="1B2B3A"/>
-                </a:solidFill>
-                <a:latin typeface="Meiryo" pitchFamily="34" charset="0"/>
-                <a:ea typeface="Meiryo" pitchFamily="34" charset="-122"/>
-                <a:cs typeface="Meiryo" pitchFamily="34" charset="-120"/>
-              </a:rPr>
-              <a:t>必ずプルリクエストを出し、テストとレビューを通す。</a:t>
-            </a:r>
-            <a:endParaRPr lang="en-US" sz="1100" dirty="0"/>
-          </a:p>
-        </p:txBody>
-      </p:sp>
-      <p:sp>
-        <p:nvSpPr>
-          <p:cNvPr id="9" name="Shape 6"/>
-          <p:cNvSpPr/>
-          <p:nvPr/>
-        </p:nvSpPr>
-        <p:spPr>
-          <a:xfrm>
-            <a:off x="4663440" y="1463040"/>
-            <a:ext cx="4023360" cy="1463040"/>
-          </a:xfrm>
-          <a:prstGeom prst="rect">
-            <a:avLst/>
-          </a:prstGeom>
-          <a:solidFill>
-            <a:srgbClr val="FFFFFF"/>
-          </a:solidFill>
-          <a:ln w="12700">
-            <a:solidFill>
-              <a:srgbClr val="FFFFFF"/>
-            </a:solidFill>
-            <a:prstDash val="solid"/>
-          </a:ln>
-        </p:spPr>
-      </p:sp>
-      <p:sp>
-        <p:nvSpPr>
-          <p:cNvPr id="10" name="Shape 7"/>
-          <p:cNvSpPr/>
-          <p:nvPr/>
-        </p:nvSpPr>
-        <p:spPr>
-          <a:xfrm>
-            <a:off x="4937760" y="1737360"/>
-            <a:ext cx="548640" cy="548640"/>
-          </a:xfrm>
-          <a:prstGeom prst="ellipse">
-            <a:avLst/>
-          </a:prstGeom>
-          <a:solidFill>
-            <a:srgbClr val="5BB8FF"/>
-          </a:solidFill>
-          <a:ln w="12700">
-            <a:solidFill>
-              <a:srgbClr val="5BB8FF"/>
-            </a:solidFill>
-            <a:prstDash val="solid"/>
-          </a:ln>
-        </p:spPr>
-      </p:sp>
-      <p:pic>
-        <p:nvPicPr>
-          <p:cNvPr id="11" name="Image 1" descr="preencoded.png">    </p:cNvPr>
-          <p:cNvPicPr>
-            <a:picLocks noChangeAspect="1"/>
-          </p:cNvPicPr>
-          <p:nvPr/>
-        </p:nvPicPr>
-        <p:blipFill>
-          <a:blip r:embed="rId2"/>
-          <a:stretch>
-            <a:fillRect/>
-          </a:stretch>
-        </p:blipFill>
-        <p:spPr>
-          <a:xfrm>
-            <a:off x="5080406" y="1880006"/>
-            <a:ext cx="263347" cy="263347"/>
-          </a:xfrm>
-          <a:prstGeom prst="rect">
-            <a:avLst/>
-          </a:prstGeom>
-        </p:spPr>
-      </p:pic>
-      <p:sp>
-        <p:nvSpPr>
-          <p:cNvPr id="12" name="Text 8"/>
-          <p:cNvSpPr txBox="1"/>
-          <p:nvPr/>
-        </p:nvSpPr>
-        <p:spPr>
-          <a:xfrm>
-            <a:off x="5669280" y="1737360"/>
-            <a:ext cx="2788920" cy="365760"/>
-          </a:xfrm>
-          <a:prstGeom prst="rect">
-            <a:avLst/>
-          </a:prstGeom>
-          <a:noFill/>
-          <a:ln/>
-        </p:spPr>
-        <p:txBody>
-          <a:bodyPr wrap="square" lIns="0" tIns="0" rIns="0" bIns="0" rtlCol="0" anchor="t"/>
-          <a:lstStyle/>
-          <a:p>
-            <a:pPr indent="0" marL="0">
-              <a:buNone/>
-            </a:pPr>
-            <a:r>
-              <a:rPr lang="en-US" sz="1400" b="1" dirty="0">
-                <a:solidFill>
-                  <a:srgbClr val="001E3C"/>
-                </a:solidFill>
-                <a:latin typeface="Meiryo" pitchFamily="34" charset="0"/>
-                <a:ea typeface="Meiryo" pitchFamily="34" charset="-122"/>
-                <a:cs typeface="Meiryo" pitchFamily="34" charset="-120"/>
-              </a:rPr>
-              <a:t>パスワードや API キーを書かない</a:t>
-            </a:r>
-            <a:endParaRPr lang="en-US" sz="1400" dirty="0"/>
-          </a:p>
-        </p:txBody>
-      </p:sp>
-      <p:sp>
-        <p:nvSpPr>
-          <p:cNvPr id="13" name="Text 9"/>
-          <p:cNvSpPr txBox="1"/>
-          <p:nvPr/>
-        </p:nvSpPr>
-        <p:spPr>
-          <a:xfrm>
-            <a:off x="5669280" y="2148840"/>
-            <a:ext cx="2788920" cy="685800"/>
-          </a:xfrm>
-          <a:prstGeom prst="rect">
-            <a:avLst/>
-          </a:prstGeom>
-          <a:noFill/>
-          <a:ln/>
-        </p:spPr>
-        <p:txBody>
-          <a:bodyPr wrap="square" lIns="0" tIns="0" rIns="0" bIns="0" rtlCol="0" anchor="t"/>
-          <a:lstStyle/>
-          <a:p>
-            <a:pPr indent="0" marL="0">
-              <a:lnSpc>
-                <a:spcPct val="120000"/>
-              </a:lnSpc>
-              <a:buNone/>
-            </a:pPr>
-            <a:r>
-              <a:rPr lang="en-US" sz="1100" dirty="0">
-                <a:solidFill>
-                  <a:srgbClr val="1B2B3A"/>
-                </a:solidFill>
-                <a:latin typeface="Meiryo" pitchFamily="34" charset="0"/>
-                <a:ea typeface="Meiryo" pitchFamily="34" charset="-122"/>
-                <a:cs typeface="Meiryo" pitchFamily="34" charset="-120"/>
-              </a:rPr>
-              <a:t>消しても履歴に残り、WG の全員が見られる。.env に置く。</a:t>
-            </a:r>
-            <a:endParaRPr lang="en-US" sz="1100" dirty="0"/>
-          </a:p>
-        </p:txBody>
-      </p:sp>
-      <p:sp>
-        <p:nvSpPr>
-          <p:cNvPr id="14" name="Shape 10"/>
-          <p:cNvSpPr/>
-          <p:nvPr/>
-        </p:nvSpPr>
-        <p:spPr>
-          <a:xfrm>
-            <a:off x="457200" y="3108960"/>
-            <a:ext cx="4023360" cy="1463040"/>
-          </a:xfrm>
-          <a:prstGeom prst="rect">
-            <a:avLst/>
-          </a:prstGeom>
-          <a:solidFill>
-            <a:srgbClr val="FFFFFF"/>
-          </a:solidFill>
-          <a:ln w="12700">
-            <a:solidFill>
-              <a:srgbClr val="FFFFFF"/>
-            </a:solidFill>
-            <a:prstDash val="solid"/>
-          </a:ln>
-        </p:spPr>
-      </p:sp>
-      <p:sp>
-        <p:nvSpPr>
-          <p:cNvPr id="15" name="Shape 11"/>
-          <p:cNvSpPr/>
-          <p:nvPr/>
-        </p:nvSpPr>
-        <p:spPr>
-          <a:xfrm>
-            <a:off x="731520" y="3383280"/>
-            <a:ext cx="548640" cy="548640"/>
-          </a:xfrm>
-          <a:prstGeom prst="ellipse">
-            <a:avLst/>
-          </a:prstGeom>
-          <a:solidFill>
-            <a:srgbClr val="5BB8FF"/>
-          </a:solidFill>
-          <a:ln w="12700">
-            <a:solidFill>
-              <a:srgbClr val="5BB8FF"/>
-            </a:solidFill>
-            <a:prstDash val="solid"/>
-          </a:ln>
-        </p:spPr>
-      </p:sp>
-      <p:pic>
-        <p:nvPicPr>
-          <p:cNvPr id="16" name="Image 2" descr="preencoded.png">    </p:cNvPr>
-          <p:cNvPicPr>
-            <a:picLocks noChangeAspect="1"/>
-          </p:cNvPicPr>
-          <p:nvPr/>
-        </p:nvPicPr>
-        <p:blipFill>
-          <a:blip r:embed="rId3"/>
-          <a:stretch>
-            <a:fillRect/>
-          </a:stretch>
-        </p:blipFill>
-        <p:spPr>
-          <a:xfrm>
-            <a:off x="874166" y="3525926"/>
-            <a:ext cx="263347" cy="263347"/>
-          </a:xfrm>
-          <a:prstGeom prst="rect">
-            <a:avLst/>
-          </a:prstGeom>
-        </p:spPr>
-      </p:pic>
-      <p:sp>
-        <p:nvSpPr>
-          <p:cNvPr id="17" name="Text 12"/>
-          <p:cNvSpPr txBox="1"/>
-          <p:nvPr/>
-        </p:nvSpPr>
-        <p:spPr>
-          <a:xfrm>
-            <a:off x="1463040" y="3383280"/>
-            <a:ext cx="2788920" cy="365760"/>
-          </a:xfrm>
-          <a:prstGeom prst="rect">
-            <a:avLst/>
-          </a:prstGeom>
-          <a:noFill/>
-          <a:ln/>
-        </p:spPr>
-        <p:txBody>
-          <a:bodyPr wrap="square" lIns="0" tIns="0" rIns="0" bIns="0" rtlCol="0" anchor="t"/>
-          <a:lstStyle/>
-          <a:p>
-            <a:pPr indent="0" marL="0">
-              <a:buNone/>
-            </a:pPr>
-            <a:r>
-              <a:rPr lang="en-US" sz="1400" b="1" dirty="0">
-                <a:solidFill>
-                  <a:srgbClr val="001E3C"/>
-                </a:solidFill>
-                <a:latin typeface="Meiryo" pitchFamily="34" charset="0"/>
-                <a:ea typeface="Meiryo" pitchFamily="34" charset="-122"/>
-                <a:cs typeface="Meiryo" pitchFamily="34" charset="-120"/>
-              </a:rPr>
-              <a:t>大学のアドレスを出さない</a:t>
-            </a:r>
-            <a:endParaRPr lang="en-US" sz="1400" dirty="0"/>
-          </a:p>
-        </p:txBody>
-      </p:sp>
-      <p:sp>
-        <p:nvSpPr>
-          <p:cNvPr id="18" name="Text 13"/>
-          <p:cNvSpPr txBox="1"/>
-          <p:nvPr/>
-        </p:nvSpPr>
-        <p:spPr>
-          <a:xfrm>
-            <a:off x="1463040" y="3794760"/>
-            <a:ext cx="2788920" cy="685800"/>
-          </a:xfrm>
-          <a:prstGeom prst="rect">
-            <a:avLst/>
-          </a:prstGeom>
-          <a:noFill/>
-          <a:ln/>
-        </p:spPr>
-        <p:txBody>
-          <a:bodyPr wrap="square" lIns="0" tIns="0" rIns="0" bIns="0" rtlCol="0" anchor="t"/>
-          <a:lstStyle/>
-          <a:p>
-            <a:pPr indent="0" marL="0">
-              <a:lnSpc>
-                <a:spcPct val="120000"/>
-              </a:lnSpc>
-              <a:buNone/>
-            </a:pPr>
-            <a:r>
-              <a:rPr lang="en-US" sz="1100" dirty="0">
-                <a:solidFill>
-                  <a:srgbClr val="1B2B3A"/>
-                </a:solidFill>
-                <a:latin typeface="Meiryo" pitchFamily="34" charset="0"/>
-                <a:ea typeface="Meiryo" pitchFamily="34" charset="-122"/>
-                <a:cs typeface="Meiryo" pitchFamily="34" charset="-120"/>
-              </a:rPr>
-              <a:t>学籍番号が公開されてしまう。コード・README・コミットのメールすべて。</a:t>
-            </a:r>
-            <a:endParaRPr lang="en-US" sz="1100" dirty="0"/>
-          </a:p>
-        </p:txBody>
-      </p:sp>
-      <p:sp>
-        <p:nvSpPr>
-          <p:cNvPr id="19" name="Shape 14"/>
-          <p:cNvSpPr/>
-          <p:nvPr/>
-        </p:nvSpPr>
-        <p:spPr>
-          <a:xfrm>
-            <a:off x="4663440" y="3108960"/>
-            <a:ext cx="4023360" cy="1463040"/>
-          </a:xfrm>
-          <a:prstGeom prst="rect">
-            <a:avLst/>
-          </a:prstGeom>
-          <a:solidFill>
-            <a:srgbClr val="FFFFFF"/>
-          </a:solidFill>
-          <a:ln w="12700">
-            <a:solidFill>
-              <a:srgbClr val="FFFFFF"/>
-            </a:solidFill>
-            <a:prstDash val="solid"/>
-          </a:ln>
-        </p:spPr>
-      </p:sp>
-      <p:sp>
-        <p:nvSpPr>
-          <p:cNvPr id="20" name="Shape 15"/>
-          <p:cNvSpPr/>
-          <p:nvPr/>
-        </p:nvSpPr>
-        <p:spPr>
-          <a:xfrm>
-            <a:off x="4937760" y="3383280"/>
-            <a:ext cx="548640" cy="548640"/>
-          </a:xfrm>
-          <a:prstGeom prst="ellipse">
-            <a:avLst/>
-          </a:prstGeom>
-          <a:solidFill>
-            <a:srgbClr val="5BB8FF"/>
-          </a:solidFill>
-          <a:ln w="12700">
-            <a:solidFill>
-              <a:srgbClr val="5BB8FF"/>
-            </a:solidFill>
-            <a:prstDash val="solid"/>
-          </a:ln>
-        </p:spPr>
-      </p:sp>
-      <p:pic>
-        <p:nvPicPr>
-          <p:cNvPr id="21" name="Image 3" descr="preencoded.png">    </p:cNvPr>
-          <p:cNvPicPr>
-            <a:picLocks noChangeAspect="1"/>
-          </p:cNvPicPr>
-          <p:nvPr/>
-        </p:nvPicPr>
-        <p:blipFill>
-          <a:blip r:embed="rId4"/>
-          <a:stretch>
-            <a:fillRect/>
-          </a:stretch>
-        </p:blipFill>
-        <p:spPr>
-          <a:xfrm>
-            <a:off x="5080406" y="3525926"/>
-            <a:ext cx="263347" cy="263347"/>
-          </a:xfrm>
-          <a:prstGeom prst="rect">
-            <a:avLst/>
-          </a:prstGeom>
-        </p:spPr>
-      </p:pic>
-      <p:sp>
-        <p:nvSpPr>
-          <p:cNvPr id="22" name="Text 16"/>
-          <p:cNvSpPr txBox="1"/>
-          <p:nvPr/>
-        </p:nvSpPr>
-        <p:spPr>
-          <a:xfrm>
-            <a:off x="5669280" y="3383280"/>
-            <a:ext cx="2788920" cy="365760"/>
-          </a:xfrm>
-          <a:prstGeom prst="rect">
-            <a:avLst/>
-          </a:prstGeom>
-          <a:noFill/>
-          <a:ln/>
-        </p:spPr>
-        <p:txBody>
-          <a:bodyPr wrap="square" lIns="0" tIns="0" rIns="0" bIns="0" rtlCol="0" anchor="t"/>
-          <a:lstStyle/>
-          <a:p>
-            <a:pPr indent="0" marL="0">
-              <a:buNone/>
-            </a:pPr>
-            <a:r>
-              <a:rPr lang="en-US" sz="1400" b="1" dirty="0">
-                <a:solidFill>
-                  <a:srgbClr val="001E3C"/>
-                </a:solidFill>
-                <a:latin typeface="Meiryo" pitchFamily="34" charset="0"/>
-                <a:ea typeface="Meiryo" pitchFamily="34" charset="-122"/>
-                <a:cs typeface="Meiryo" pitchFamily="34" charset="-120"/>
-              </a:rPr>
-              <a:t>送る前にテストを流す</a:t>
-            </a:r>
-            <a:endParaRPr lang="en-US" sz="1400" dirty="0"/>
-          </a:p>
-        </p:txBody>
-      </p:sp>
-      <p:sp>
-        <p:nvSpPr>
-          <p:cNvPr id="23" name="Text 17"/>
-          <p:cNvSpPr txBox="1"/>
-          <p:nvPr/>
-        </p:nvSpPr>
-        <p:spPr>
-          <a:xfrm>
-            <a:off x="5669280" y="3794760"/>
-            <a:ext cx="2788920" cy="685800"/>
-          </a:xfrm>
-          <a:prstGeom prst="rect">
-            <a:avLst/>
-          </a:prstGeom>
-          <a:noFill/>
-          <a:ln/>
-        </p:spPr>
-        <p:txBody>
-          <a:bodyPr wrap="square" lIns="0" tIns="0" rIns="0" bIns="0" rtlCol="0" anchor="t"/>
-          <a:lstStyle/>
-          <a:p>
-            <a:pPr indent="0" marL="0">
-              <a:lnSpc>
-                <a:spcPct val="120000"/>
-              </a:lnSpc>
-              <a:buNone/>
-            </a:pPr>
-            <a:r>
-              <a:rPr lang="en-US" sz="1100" dirty="0">
-                <a:solidFill>
-                  <a:srgbClr val="1B2B3A"/>
-                </a:solidFill>
-                <a:latin typeface="Meiryo" pitchFamily="34" charset="0"/>
-                <a:ea typeface="Meiryo" pitchFamily="34" charset="-122"/>
-                <a:cs typeface="Meiryo" pitchFamily="34" charset="-120"/>
-              </a:rPr>
-              <a:t>python manage.py test が通ってから送る。</a:t>
-            </a:r>
-            <a:endParaRPr lang="en-US" sz="1100" dirty="0"/>
-          </a:p>
-        </p:txBody>
-      </p:sp>
-    </p:spTree>
-  </p:cSld>
-  <p:clrMapOvr>
-    <a:masterClrMapping/>
-  </p:clrMapOvr>
-</p:sld>
-</file>
-
 <file path=ppt/theme/theme1.xml><?xml version="1.0" encoding="utf-8"?>
 <a:theme xmlns:a="http://schemas.openxmlformats.org/drawingml/2006/main" name="Office Theme">
   <a:themeElements>

--- a/static/guide/03_開発の進め方.pptx
+++ b/static/guide/03_開発の進め方.pptx
@@ -13,6 +13,7 @@
     <p:sldId id="261" r:id="rId7"/>
     <p:sldId id="265" r:id="rId16"/>
     <p:sldId id="266" r:id="rId17"/>
+    <p:sldId id="267" r:id="rId18"/>
     <p:sldId id="262" r:id="rId8"/>
     <p:sldId id="263" r:id="rId9"/>
     <p:sldId id="264" r:id="rId10"/>
@@ -2515,6 +2516,1151 @@
 
 <file path=ppt/slides/slide10.xml><?xml version="1.0" encoding="utf-8"?>
 <p:sld xmlns:a="http://schemas.openxmlformats.org/drawingml/2006/main" xmlns:r="http://schemas.openxmlformats.org/officeDocument/2006/relationships" xmlns:p="http://schemas.openxmlformats.org/presentationml/2006/main">
+  <p:cSld name="Slide 7">
+    <p:bg>
+      <p:bgPr>
+        <a:solidFill>
+          <a:srgbClr val="F2F5F8"/>
+        </a:solidFill>
+      </p:bgPr>
+    </p:bg>
+    <p:spTree>
+      <p:nvGrpSpPr>
+        <p:cNvPr id="1" name=""/>
+        <p:cNvGrpSpPr/>
+        <p:nvPr/>
+      </p:nvGrpSpPr>
+      <p:grpSpPr>
+        <a:xfrm>
+          <a:off x="0" y="0"/>
+          <a:ext cx="0" cy="0"/>
+          <a:chOff x="0" y="0"/>
+          <a:chExt cx="0" cy="0"/>
+        </a:xfrm>
+      </p:grpSpPr>
+      <p:sp>
+        <p:nvSpPr>
+          <p:cNvPr id="2" name="Text 0"/>
+          <p:cNvSpPr txBox="1"/>
+          <p:nvPr/>
+        </p:nvSpPr>
+        <p:spPr>
+          <a:xfrm>
+            <a:off x="457200" y="320040"/>
+            <a:ext cx="6858000" cy="274320"/>
+          </a:xfrm>
+          <a:prstGeom prst="rect">
+            <a:avLst/>
+          </a:prstGeom>
+          <a:noFill/>
+          <a:ln/>
+        </p:spPr>
+        <p:txBody>
+          <a:bodyPr wrap="square" lIns="0" tIns="0" rIns="0" bIns="0" rtlCol="0" anchor="t"/>
+          <a:lstStyle/>
+          <a:p>
+            <a:pPr indent="0" marL="0">
+              <a:buNone/>
+            </a:pPr>
+            <a:r>
+              <a:rPr lang="en-US" sz="1100" dirty="0">
+                <a:solidFill>
+                  <a:srgbClr val="1A4A70"/>
+                </a:solidFill>
+                <a:latin typeface="Consolas" pitchFamily="34" charset="0"/>
+                <a:ea typeface="Consolas" pitchFamily="34" charset="-122"/>
+                <a:cs typeface="Consolas" pitchFamily="34" charset="-120"/>
+              </a:rPr>
+              <a:t>// 03  ·  よく使う操作</a:t>
+            </a:r>
+            <a:endParaRPr lang="en-US" sz="1100" dirty="0"/>
+          </a:p>
+        </p:txBody>
+      </p:sp>
+      <p:sp>
+        <p:nvSpPr>
+          <p:cNvPr id="3" name="Text 1"/>
+          <p:cNvSpPr txBox="1"/>
+          <p:nvPr/>
+        </p:nvSpPr>
+        <p:spPr>
+          <a:xfrm>
+            <a:off x="457200" y="594360"/>
+            <a:ext cx="8229600" cy="594360"/>
+          </a:xfrm>
+          <a:prstGeom prst="rect">
+            <a:avLst/>
+          </a:prstGeom>
+          <a:noFill/>
+          <a:ln/>
+        </p:spPr>
+        <p:txBody>
+          <a:bodyPr wrap="square" lIns="0" tIns="0" rIns="0" bIns="0" rtlCol="0" anchor="ctr"/>
+          <a:lstStyle/>
+          <a:p>
+            <a:pPr indent="0" marL="0">
+              <a:buNone/>
+            </a:pPr>
+            <a:r>
+              <a:rPr lang="en-US" sz="2600" b="1" dirty="0">
+                <a:solidFill>
+                  <a:srgbClr val="001E3C"/>
+                </a:solidFill>
+                <a:latin typeface="Meiryo" pitchFamily="34" charset="0"/>
+                <a:ea typeface="Meiryo" pitchFamily="34" charset="-122"/>
+                <a:cs typeface="Meiryo" pitchFamily="34" charset="-120"/>
+              </a:rPr>
+              <a:t>よく使う操作とコマンド</a:t>
+            </a:r>
+            <a:endParaRPr lang="en-US" sz="2600" dirty="0"/>
+          </a:p>
+        </p:txBody>
+      </p:sp>
+      <p:graphicFrame>
+        <p:nvGraphicFramePr>
+          <p:cNvPr id="8" name="Table 0"/>
+          <p:cNvGraphicFramePr>
+            <a:graphicFrameLocks noGrp="1"/>
+          </p:cNvGraphicFramePr>
+          <p:nvPr>
+            <p:extLst>
+              <p:ext uri="{D42A27DB-BD31-4B8C-83A1-F6EECF244321}">
+                <p14:modId xmlns:p14="http://schemas.microsoft.com/office/powerpoint/2010/main" val="1579011935"/>
+              </p:ext>
+            </p:extLst>
+          </p:nvPr>
+        </p:nvGraphicFramePr>
+        <p:xfrm>
+          <a:off x="457200" y="1325880"/>
+          <a:ext cx="8229600" cy="914400"/>
+        </p:xfrm>
+        <a:graphic>
+          <a:graphicData uri="http://schemas.openxmlformats.org/drawingml/2006/table">
+            <a:tbl>
+              <a:tblPr/>
+              <a:tblGrid>
+                <a:gridCol w="2743200"/>
+                <a:gridCol w="5486400"/>
+              </a:tblGrid>
+              <a:tr h="384048">
+                <a:tc>
+                  <a:txBody>
+                    <a:bodyPr/>
+                    <a:lstStyle/>
+                    <a:p>
+                      <a:pPr indent="0" marL="0">
+                        <a:buNone/>
+                      </a:pPr>
+                      <a:r>
+                        <a:rPr lang="en-US" sz="1100" b="1" dirty="0">
+                          <a:solidFill>
+                            <a:srgbClr val="FFFFFF"/>
+                          </a:solidFill>
+                          <a:latin typeface="Meiryo" pitchFamily="34" charset="0"/>
+                          <a:ea typeface="Meiryo" pitchFamily="34" charset="-122"/>
+                          <a:cs typeface="Meiryo" pitchFamily="34" charset="-120"/>
+                        </a:rPr>
+                        <a:t>やりたいこと</a:t>
+                      </a:r>
+                      <a:endParaRPr lang="en-US" sz="1100" dirty="0">
+                        <a:latin typeface="Meiryo" charset="0"/>
+                        <a:ea typeface="Meiryo" charset="0"/>
+                        <a:cs typeface="Meiryo" charset="0"/>
+                      </a:endParaRPr>
+                    </a:p>
+                  </a:txBody>
+                  <a:tcPr marL="7315200" marR="7315200" marT="0" marB="0" anchor="ctr">
+                    <a:lnL w="9525" cap="flat" cmpd="sng" algn="ctr">
+                      <a:solidFill>
+                        <a:srgbClr val="DDDDDD"/>
+                      </a:solidFill>
+                      <a:prstDash val="solid"/>
+                      <a:round/>
+                      <a:headEnd type="none" w="med" len="med"/>
+                      <a:tailEnd type="none" w="med" len="med"/>
+                    </a:lnL>
+                    <a:lnR w="9525" cap="flat" cmpd="sng" algn="ctr">
+                      <a:solidFill>
+                        <a:srgbClr val="DDDDDD"/>
+                      </a:solidFill>
+                      <a:prstDash val="solid"/>
+                      <a:round/>
+                      <a:headEnd type="none" w="med" len="med"/>
+                      <a:tailEnd type="none" w="med" len="med"/>
+                    </a:lnR>
+                    <a:lnT w="9525" cap="flat" cmpd="sng" algn="ctr">
+                      <a:solidFill>
+                        <a:srgbClr val="DDDDDD"/>
+                      </a:solidFill>
+                      <a:prstDash val="solid"/>
+                      <a:round/>
+                      <a:headEnd type="none" w="med" len="med"/>
+                      <a:tailEnd type="none" w="med" len="med"/>
+                    </a:lnT>
+                    <a:lnB w="9525" cap="flat" cmpd="sng" algn="ctr">
+                      <a:solidFill>
+                        <a:srgbClr val="DDDDDD"/>
+                      </a:solidFill>
+                      <a:prstDash val="solid"/>
+                      <a:round/>
+                      <a:headEnd type="none" w="med" len="med"/>
+                      <a:tailEnd type="none" w="med" len="med"/>
+                    </a:lnB>
+                    <a:solidFill>
+                      <a:srgbClr val="001E3C"/>
+                    </a:solidFill>
+                  </a:tcPr>
+                </a:tc>
+                <a:tc>
+                  <a:txBody>
+                    <a:bodyPr/>
+                    <a:lstStyle/>
+                    <a:p>
+                      <a:pPr indent="0" marL="0">
+                        <a:buNone/>
+                      </a:pPr>
+                      <a:r>
+                        <a:rPr lang="en-US" sz="1100" b="1" dirty="0">
+                          <a:solidFill>
+                            <a:srgbClr val="FFFFFF"/>
+                          </a:solidFill>
+                          <a:latin typeface="Meiryo" pitchFamily="34" charset="0"/>
+                          <a:ea typeface="Meiryo" pitchFamily="34" charset="-122"/>
+                          <a:cs typeface="Meiryo" pitchFamily="34" charset="-120"/>
+                        </a:rPr>
+                        <a:t>やり方</a:t>
+                      </a:r>
+                      <a:endParaRPr lang="en-US" sz="1100" dirty="0">
+                        <a:latin typeface="Meiryo" charset="0"/>
+                        <a:ea typeface="Meiryo" charset="0"/>
+                        <a:cs typeface="Meiryo" charset="0"/>
+                      </a:endParaRPr>
+                    </a:p>
+                  </a:txBody>
+                  <a:tcPr marL="7315200" marR="7315200" marT="0" marB="0" anchor="ctr">
+                    <a:lnL w="9525" cap="flat" cmpd="sng" algn="ctr">
+                      <a:solidFill>
+                        <a:srgbClr val="DDDDDD"/>
+                      </a:solidFill>
+                      <a:prstDash val="solid"/>
+                      <a:round/>
+                      <a:headEnd type="none" w="med" len="med"/>
+                      <a:tailEnd type="none" w="med" len="med"/>
+                    </a:lnL>
+                    <a:lnR w="9525" cap="flat" cmpd="sng" algn="ctr">
+                      <a:solidFill>
+                        <a:srgbClr val="DDDDDD"/>
+                      </a:solidFill>
+                      <a:prstDash val="solid"/>
+                      <a:round/>
+                      <a:headEnd type="none" w="med" len="med"/>
+                      <a:tailEnd type="none" w="med" len="med"/>
+                    </a:lnR>
+                    <a:lnT w="9525" cap="flat" cmpd="sng" algn="ctr">
+                      <a:solidFill>
+                        <a:srgbClr val="DDDDDD"/>
+                      </a:solidFill>
+                      <a:prstDash val="solid"/>
+                      <a:round/>
+                      <a:headEnd type="none" w="med" len="med"/>
+                      <a:tailEnd type="none" w="med" len="med"/>
+                    </a:lnT>
+                    <a:lnB w="9525" cap="flat" cmpd="sng" algn="ctr">
+                      <a:solidFill>
+                        <a:srgbClr val="DDDDDD"/>
+                      </a:solidFill>
+                      <a:prstDash val="solid"/>
+                      <a:round/>
+                      <a:headEnd type="none" w="med" len="med"/>
+                      <a:tailEnd type="none" w="med" len="med"/>
+                    </a:lnB>
+                    <a:solidFill>
+                      <a:srgbClr val="001E3C"/>
+                    </a:solidFill>
+                  </a:tcPr>
+                </a:tc>
+              </a:tr>
+              <a:tr h="384048">
+                <a:tc>
+                  <a:txBody>
+                    <a:bodyPr/>
+                    <a:lstStyle/>
+                    <a:p>
+                      <a:pPr indent="0" marL="0">
+                        <a:buNone/>
+                      </a:pPr>
+                      <a:r>
+                        <a:rPr lang="en-US" sz="1050" b="1" dirty="0">
+                          <a:solidFill>
+                            <a:srgbClr val="001E3C"/>
+                          </a:solidFill>
+                          <a:latin typeface="Meiryo" pitchFamily="34" charset="0"/>
+                          <a:ea typeface="Meiryo" pitchFamily="34" charset="-122"/>
+                          <a:cs typeface="Meiryo" pitchFamily="34" charset="-120"/>
+                        </a:rPr>
+                        <a:t>サイトを起動する</a:t>
+                      </a:r>
+                      <a:endParaRPr lang="en-US" sz="1050" dirty="0">
+                        <a:latin typeface="Meiryo" charset="0"/>
+                        <a:ea typeface="Meiryo" charset="0"/>
+                        <a:cs typeface="Meiryo" charset="0"/>
+                      </a:endParaRPr>
+                    </a:p>
+                  </a:txBody>
+                  <a:tcPr marL="7315200" marR="7315200" marT="0" marB="0" anchor="ctr">
+                    <a:lnL w="9525" cap="flat" cmpd="sng" algn="ctr">
+                      <a:solidFill>
+                        <a:srgbClr val="DDDDDD"/>
+                      </a:solidFill>
+                      <a:prstDash val="solid"/>
+                      <a:round/>
+                      <a:headEnd type="none" w="med" len="med"/>
+                      <a:tailEnd type="none" w="med" len="med"/>
+                    </a:lnL>
+                    <a:lnR w="9525" cap="flat" cmpd="sng" algn="ctr">
+                      <a:solidFill>
+                        <a:srgbClr val="DDDDDD"/>
+                      </a:solidFill>
+                      <a:prstDash val="solid"/>
+                      <a:round/>
+                      <a:headEnd type="none" w="med" len="med"/>
+                      <a:tailEnd type="none" w="med" len="med"/>
+                    </a:lnR>
+                    <a:lnT w="9525" cap="flat" cmpd="sng" algn="ctr">
+                      <a:solidFill>
+                        <a:srgbClr val="DDDDDD"/>
+                      </a:solidFill>
+                      <a:prstDash val="solid"/>
+                      <a:round/>
+                      <a:headEnd type="none" w="med" len="med"/>
+                      <a:tailEnd type="none" w="med" len="med"/>
+                    </a:lnT>
+                    <a:lnB w="9525" cap="flat" cmpd="sng" algn="ctr">
+                      <a:solidFill>
+                        <a:srgbClr val="DDDDDD"/>
+                      </a:solidFill>
+                      <a:prstDash val="solid"/>
+                      <a:round/>
+                      <a:headEnd type="none" w="med" len="med"/>
+                      <a:tailEnd type="none" w="med" len="med"/>
+                    </a:lnB>
+                    <a:solidFill>
+                      <a:srgbClr val="FFFFFF"/>
+                    </a:solidFill>
+                  </a:tcPr>
+                </a:tc>
+                <a:tc>
+                  <a:txBody>
+                    <a:bodyPr/>
+                    <a:lstStyle/>
+                    <a:p>
+                      <a:pPr indent="0" marL="0">
+                        <a:buNone/>
+                      </a:pPr>
+                      <a:r>
+                        <a:rPr lang="en-US" sz="1050" dirty="0">
+                          <a:solidFill>
+                            <a:srgbClr val="1B2B3A"/>
+                          </a:solidFill>
+                          <a:latin typeface="Meiryo" pitchFamily="34" charset="0"/>
+                          <a:ea typeface="Meiryo" pitchFamily="34" charset="-122"/>
+                          <a:cs typeface="Meiryo" pitchFamily="34" charset="-120"/>
+                        </a:rPr>
+                        <a:t>F5（止めるのは Shift + F5）</a:t>
+                      </a:r>
+                      <a:endParaRPr lang="en-US" sz="1050" dirty="0">
+                        <a:latin typeface="Meiryo" charset="0"/>
+                        <a:ea typeface="Meiryo" charset="0"/>
+                        <a:cs typeface="Meiryo" charset="0"/>
+                      </a:endParaRPr>
+                    </a:p>
+                  </a:txBody>
+                  <a:tcPr marL="7315200" marR="7315200" marT="0" marB="0" anchor="ctr">
+                    <a:lnL w="9525" cap="flat" cmpd="sng" algn="ctr">
+                      <a:solidFill>
+                        <a:srgbClr val="DDDDDD"/>
+                      </a:solidFill>
+                      <a:prstDash val="solid"/>
+                      <a:round/>
+                      <a:headEnd type="none" w="med" len="med"/>
+                      <a:tailEnd type="none" w="med" len="med"/>
+                    </a:lnL>
+                    <a:lnR w="9525" cap="flat" cmpd="sng" algn="ctr">
+                      <a:solidFill>
+                        <a:srgbClr val="DDDDDD"/>
+                      </a:solidFill>
+                      <a:prstDash val="solid"/>
+                      <a:round/>
+                      <a:headEnd type="none" w="med" len="med"/>
+                      <a:tailEnd type="none" w="med" len="med"/>
+                    </a:lnR>
+                    <a:lnT w="9525" cap="flat" cmpd="sng" algn="ctr">
+                      <a:solidFill>
+                        <a:srgbClr val="DDDDDD"/>
+                      </a:solidFill>
+                      <a:prstDash val="solid"/>
+                      <a:round/>
+                      <a:headEnd type="none" w="med" len="med"/>
+                      <a:tailEnd type="none" w="med" len="med"/>
+                    </a:lnT>
+                    <a:lnB w="9525" cap="flat" cmpd="sng" algn="ctr">
+                      <a:solidFill>
+                        <a:srgbClr val="DDDDDD"/>
+                      </a:solidFill>
+                      <a:prstDash val="solid"/>
+                      <a:round/>
+                      <a:headEnd type="none" w="med" len="med"/>
+                      <a:tailEnd type="none" w="med" len="med"/>
+                    </a:lnB>
+                    <a:solidFill>
+                      <a:srgbClr val="FFFFFF"/>
+                    </a:solidFill>
+                  </a:tcPr>
+                </a:tc>
+              </a:tr>
+              <a:tr h="384048">
+                <a:tc>
+                  <a:txBody>
+                    <a:bodyPr/>
+                    <a:lstStyle/>
+                    <a:p>
+                      <a:pPr indent="0" marL="0">
+                        <a:buNone/>
+                      </a:pPr>
+                      <a:r>
+                        <a:rPr lang="en-US" sz="1050" b="1" dirty="0">
+                          <a:solidFill>
+                            <a:srgbClr val="001E3C"/>
+                          </a:solidFill>
+                          <a:latin typeface="Meiryo" pitchFamily="34" charset="0"/>
+                          <a:ea typeface="Meiryo" pitchFamily="34" charset="-122"/>
+                          <a:cs typeface="Meiryo" pitchFamily="34" charset="-120"/>
+                        </a:rPr>
+                        <a:t>テストを流す</a:t>
+                      </a:r>
+                      <a:endParaRPr lang="en-US" sz="1050" dirty="0">
+                        <a:latin typeface="Meiryo" charset="0"/>
+                        <a:ea typeface="Meiryo" charset="0"/>
+                        <a:cs typeface="Meiryo" charset="0"/>
+                      </a:endParaRPr>
+                    </a:p>
+                  </a:txBody>
+                  <a:tcPr marL="7315200" marR="7315200" marT="0" marB="0" anchor="ctr">
+                    <a:lnL w="9525" cap="flat" cmpd="sng" algn="ctr">
+                      <a:solidFill>
+                        <a:srgbClr val="DDDDDD"/>
+                      </a:solidFill>
+                      <a:prstDash val="solid"/>
+                      <a:round/>
+                      <a:headEnd type="none" w="med" len="med"/>
+                      <a:tailEnd type="none" w="med" len="med"/>
+                    </a:lnL>
+                    <a:lnR w="9525" cap="flat" cmpd="sng" algn="ctr">
+                      <a:solidFill>
+                        <a:srgbClr val="DDDDDD"/>
+                      </a:solidFill>
+                      <a:prstDash val="solid"/>
+                      <a:round/>
+                      <a:headEnd type="none" w="med" len="med"/>
+                      <a:tailEnd type="none" w="med" len="med"/>
+                    </a:lnR>
+                    <a:lnT w="9525" cap="flat" cmpd="sng" algn="ctr">
+                      <a:solidFill>
+                        <a:srgbClr val="DDDDDD"/>
+                      </a:solidFill>
+                      <a:prstDash val="solid"/>
+                      <a:round/>
+                      <a:headEnd type="none" w="med" len="med"/>
+                      <a:tailEnd type="none" w="med" len="med"/>
+                    </a:lnT>
+                    <a:lnB w="9525" cap="flat" cmpd="sng" algn="ctr">
+                      <a:solidFill>
+                        <a:srgbClr val="DDDDDD"/>
+                      </a:solidFill>
+                      <a:prstDash val="solid"/>
+                      <a:round/>
+                      <a:headEnd type="none" w="med" len="med"/>
+                      <a:tailEnd type="none" w="med" len="med"/>
+                    </a:lnB>
+                    <a:solidFill>
+                      <a:srgbClr val="FFFFFF"/>
+                    </a:solidFill>
+                  </a:tcPr>
+                </a:tc>
+                <a:tc>
+                  <a:txBody>
+                    <a:bodyPr/>
+                    <a:lstStyle/>
+                    <a:p>
+                      <a:pPr indent="0" marL="0">
+                        <a:buNone/>
+                      </a:pPr>
+                      <a:r>
+                        <a:rPr lang="en-US" sz="1000" dirty="0">
+                          <a:solidFill>
+                            <a:srgbClr val="1A4A70"/>
+                          </a:solidFill>
+                          <a:latin typeface="Consolas" pitchFamily="34" charset="0"/>
+                          <a:ea typeface="Consolas" pitchFamily="34" charset="-122"/>
+                          <a:cs typeface="Consolas" pitchFamily="34" charset="-120"/>
+                        </a:rPr>
+                        <a:t>python manage.py test</a:t>
+                      </a:r>
+                      <a:endParaRPr lang="en-US" sz="1000" dirty="0">
+                        <a:latin typeface="Consolas" charset="0"/>
+                        <a:ea typeface="Consolas" charset="0"/>
+                        <a:cs typeface="Consolas" charset="0"/>
+                      </a:endParaRPr>
+                    </a:p>
+                  </a:txBody>
+                  <a:tcPr marL="7315200" marR="7315200" marT="0" marB="0" anchor="ctr">
+                    <a:lnL w="9525" cap="flat" cmpd="sng" algn="ctr">
+                      <a:solidFill>
+                        <a:srgbClr val="DDDDDD"/>
+                      </a:solidFill>
+                      <a:prstDash val="solid"/>
+                      <a:round/>
+                      <a:headEnd type="none" w="med" len="med"/>
+                      <a:tailEnd type="none" w="med" len="med"/>
+                    </a:lnL>
+                    <a:lnR w="9525" cap="flat" cmpd="sng" algn="ctr">
+                      <a:solidFill>
+                        <a:srgbClr val="DDDDDD"/>
+                      </a:solidFill>
+                      <a:prstDash val="solid"/>
+                      <a:round/>
+                      <a:headEnd type="none" w="med" len="med"/>
+                      <a:tailEnd type="none" w="med" len="med"/>
+                    </a:lnR>
+                    <a:lnT w="9525" cap="flat" cmpd="sng" algn="ctr">
+                      <a:solidFill>
+                        <a:srgbClr val="DDDDDD"/>
+                      </a:solidFill>
+                      <a:prstDash val="solid"/>
+                      <a:round/>
+                      <a:headEnd type="none" w="med" len="med"/>
+                      <a:tailEnd type="none" w="med" len="med"/>
+                    </a:lnT>
+                    <a:lnB w="9525" cap="flat" cmpd="sng" algn="ctr">
+                      <a:solidFill>
+                        <a:srgbClr val="DDDDDD"/>
+                      </a:solidFill>
+                      <a:prstDash val="solid"/>
+                      <a:round/>
+                      <a:headEnd type="none" w="med" len="med"/>
+                      <a:tailEnd type="none" w="med" len="med"/>
+                    </a:lnB>
+                    <a:solidFill>
+                      <a:srgbClr val="FFFFFF"/>
+                    </a:solidFill>
+                  </a:tcPr>
+                </a:tc>
+              </a:tr>
+              <a:tr h="384048">
+                <a:tc>
+                  <a:txBody>
+                    <a:bodyPr/>
+                    <a:lstStyle/>
+                    <a:p>
+                      <a:pPr indent="0" marL="0">
+                        <a:buNone/>
+                      </a:pPr>
+                      <a:r>
+                        <a:rPr lang="en-US" sz="1050" b="1" dirty="0">
+                          <a:solidFill>
+                            <a:srgbClr val="001E3C"/>
+                          </a:solidFill>
+                          <a:latin typeface="Meiryo" pitchFamily="34" charset="0"/>
+                          <a:ea typeface="Meiryo" pitchFamily="34" charset="-122"/>
+                          <a:cs typeface="Meiryo" pitchFamily="34" charset="-120"/>
+                        </a:rPr>
+                        <a:t>モデルを変えた</a:t>
+                      </a:r>
+                      <a:endParaRPr lang="en-US" sz="1050" dirty="0">
+                        <a:latin typeface="Meiryo" charset="0"/>
+                        <a:ea typeface="Meiryo" charset="0"/>
+                        <a:cs typeface="Meiryo" charset="0"/>
+                      </a:endParaRPr>
+                    </a:p>
+                  </a:txBody>
+                  <a:tcPr marL="7315200" marR="7315200" marT="0" marB="0" anchor="ctr">
+                    <a:lnL w="9525" cap="flat" cmpd="sng" algn="ctr">
+                      <a:solidFill>
+                        <a:srgbClr val="DDDDDD"/>
+                      </a:solidFill>
+                      <a:prstDash val="solid"/>
+                      <a:round/>
+                      <a:headEnd type="none" w="med" len="med"/>
+                      <a:tailEnd type="none" w="med" len="med"/>
+                    </a:lnL>
+                    <a:lnR w="9525" cap="flat" cmpd="sng" algn="ctr">
+                      <a:solidFill>
+                        <a:srgbClr val="DDDDDD"/>
+                      </a:solidFill>
+                      <a:prstDash val="solid"/>
+                      <a:round/>
+                      <a:headEnd type="none" w="med" len="med"/>
+                      <a:tailEnd type="none" w="med" len="med"/>
+                    </a:lnR>
+                    <a:lnT w="9525" cap="flat" cmpd="sng" algn="ctr">
+                      <a:solidFill>
+                        <a:srgbClr val="DDDDDD"/>
+                      </a:solidFill>
+                      <a:prstDash val="solid"/>
+                      <a:round/>
+                      <a:headEnd type="none" w="med" len="med"/>
+                      <a:tailEnd type="none" w="med" len="med"/>
+                    </a:lnT>
+                    <a:lnB w="9525" cap="flat" cmpd="sng" algn="ctr">
+                      <a:solidFill>
+                        <a:srgbClr val="DDDDDD"/>
+                      </a:solidFill>
+                      <a:prstDash val="solid"/>
+                      <a:round/>
+                      <a:headEnd type="none" w="med" len="med"/>
+                      <a:tailEnd type="none" w="med" len="med"/>
+                    </a:lnB>
+                    <a:solidFill>
+                      <a:srgbClr val="FFFFFF"/>
+                    </a:solidFill>
+                  </a:tcPr>
+                </a:tc>
+                <a:tc>
+                  <a:txBody>
+                    <a:bodyPr/>
+                    <a:lstStyle/>
+                    <a:p>
+                      <a:pPr indent="0" marL="0">
+                        <a:buNone/>
+                      </a:pPr>
+                      <a:r>
+                        <a:rPr lang="en-US" sz="1000" dirty="0">
+                          <a:solidFill>
+                            <a:srgbClr val="1A4A70"/>
+                          </a:solidFill>
+                          <a:latin typeface="Consolas" pitchFamily="34" charset="0"/>
+                          <a:ea typeface="Consolas" pitchFamily="34" charset="-122"/>
+                          <a:cs typeface="Consolas" pitchFamily="34" charset="-120"/>
+                        </a:rPr>
+                        <a:t>python manage.py makemigrations → migrate</a:t>
+                      </a:r>
+                      <a:endParaRPr lang="en-US" sz="1000" dirty="0">
+                        <a:latin typeface="Consolas" charset="0"/>
+                        <a:ea typeface="Consolas" charset="0"/>
+                        <a:cs typeface="Consolas" charset="0"/>
+                      </a:endParaRPr>
+                    </a:p>
+                  </a:txBody>
+                  <a:tcPr marL="7315200" marR="7315200" marT="0" marB="0" anchor="ctr">
+                    <a:lnL w="9525" cap="flat" cmpd="sng" algn="ctr">
+                      <a:solidFill>
+                        <a:srgbClr val="DDDDDD"/>
+                      </a:solidFill>
+                      <a:prstDash val="solid"/>
+                      <a:round/>
+                      <a:headEnd type="none" w="med" len="med"/>
+                      <a:tailEnd type="none" w="med" len="med"/>
+                    </a:lnL>
+                    <a:lnR w="9525" cap="flat" cmpd="sng" algn="ctr">
+                      <a:solidFill>
+                        <a:srgbClr val="DDDDDD"/>
+                      </a:solidFill>
+                      <a:prstDash val="solid"/>
+                      <a:round/>
+                      <a:headEnd type="none" w="med" len="med"/>
+                      <a:tailEnd type="none" w="med" len="med"/>
+                    </a:lnR>
+                    <a:lnT w="9525" cap="flat" cmpd="sng" algn="ctr">
+                      <a:solidFill>
+                        <a:srgbClr val="DDDDDD"/>
+                      </a:solidFill>
+                      <a:prstDash val="solid"/>
+                      <a:round/>
+                      <a:headEnd type="none" w="med" len="med"/>
+                      <a:tailEnd type="none" w="med" len="med"/>
+                    </a:lnT>
+                    <a:lnB w="9525" cap="flat" cmpd="sng" algn="ctr">
+                      <a:solidFill>
+                        <a:srgbClr val="DDDDDD"/>
+                      </a:solidFill>
+                      <a:prstDash val="solid"/>
+                      <a:round/>
+                      <a:headEnd type="none" w="med" len="med"/>
+                      <a:tailEnd type="none" w="med" len="med"/>
+                    </a:lnB>
+                    <a:solidFill>
+                      <a:srgbClr val="FFFFFF"/>
+                    </a:solidFill>
+                  </a:tcPr>
+                </a:tc>
+              </a:tr>
+              <a:tr h="384048">
+                <a:tc>
+                  <a:txBody>
+                    <a:bodyPr/>
+                    <a:lstStyle/>
+                    <a:p>
+                      <a:pPr indent="0" marL="0">
+                        <a:buNone/>
+                      </a:pPr>
+                      <a:r>
+                        <a:rPr lang="en-US" sz="1050" b="1" dirty="0">
+                          <a:solidFill>
+                            <a:srgbClr val="001E3C"/>
+                          </a:solidFill>
+                          <a:latin typeface="Meiryo" pitchFamily="34" charset="0"/>
+                          <a:ea typeface="Meiryo" pitchFamily="34" charset="-122"/>
+                          <a:cs typeface="Meiryo" pitchFamily="34" charset="-120"/>
+                        </a:rPr>
+                        <a:t>管理画面のアカウントを作る</a:t>
+                      </a:r>
+                      <a:endParaRPr lang="en-US" sz="1050" dirty="0">
+                        <a:latin typeface="Meiryo" charset="0"/>
+                        <a:ea typeface="Meiryo" charset="0"/>
+                        <a:cs typeface="Meiryo" charset="0"/>
+                      </a:endParaRPr>
+                    </a:p>
+                  </a:txBody>
+                  <a:tcPr marL="7315200" marR="7315200" marT="0" marB="0" anchor="ctr">
+                    <a:lnL w="9525" cap="flat" cmpd="sng" algn="ctr">
+                      <a:solidFill>
+                        <a:srgbClr val="DDDDDD"/>
+                      </a:solidFill>
+                      <a:prstDash val="solid"/>
+                      <a:round/>
+                      <a:headEnd type="none" w="med" len="med"/>
+                      <a:tailEnd type="none" w="med" len="med"/>
+                    </a:lnL>
+                    <a:lnR w="9525" cap="flat" cmpd="sng" algn="ctr">
+                      <a:solidFill>
+                        <a:srgbClr val="DDDDDD"/>
+                      </a:solidFill>
+                      <a:prstDash val="solid"/>
+                      <a:round/>
+                      <a:headEnd type="none" w="med" len="med"/>
+                      <a:tailEnd type="none" w="med" len="med"/>
+                    </a:lnR>
+                    <a:lnT w="9525" cap="flat" cmpd="sng" algn="ctr">
+                      <a:solidFill>
+                        <a:srgbClr val="DDDDDD"/>
+                      </a:solidFill>
+                      <a:prstDash val="solid"/>
+                      <a:round/>
+                      <a:headEnd type="none" w="med" len="med"/>
+                      <a:tailEnd type="none" w="med" len="med"/>
+                    </a:lnT>
+                    <a:lnB w="9525" cap="flat" cmpd="sng" algn="ctr">
+                      <a:solidFill>
+                        <a:srgbClr val="DDDDDD"/>
+                      </a:solidFill>
+                      <a:prstDash val="solid"/>
+                      <a:round/>
+                      <a:headEnd type="none" w="med" len="med"/>
+                      <a:tailEnd type="none" w="med" len="med"/>
+                    </a:lnB>
+                    <a:solidFill>
+                      <a:srgbClr val="FFFFFF"/>
+                    </a:solidFill>
+                  </a:tcPr>
+                </a:tc>
+                <a:tc>
+                  <a:txBody>
+                    <a:bodyPr/>
+                    <a:lstStyle/>
+                    <a:p>
+                      <a:pPr indent="0" marL="0">
+                        <a:buNone/>
+                      </a:pPr>
+                      <a:r>
+                        <a:rPr lang="en-US" sz="1000" dirty="0">
+                          <a:solidFill>
+                            <a:srgbClr val="1A4A70"/>
+                          </a:solidFill>
+                          <a:latin typeface="Consolas" pitchFamily="34" charset="0"/>
+                          <a:ea typeface="Consolas" pitchFamily="34" charset="-122"/>
+                          <a:cs typeface="Consolas" pitchFamily="34" charset="-120"/>
+                        </a:rPr>
+                        <a:t>python manage.py createsuperuser</a:t>
+                      </a:r>
+                      <a:endParaRPr lang="en-US" sz="1000" dirty="0">
+                        <a:latin typeface="Consolas" charset="0"/>
+                        <a:ea typeface="Consolas" charset="0"/>
+                        <a:cs typeface="Consolas" charset="0"/>
+                      </a:endParaRPr>
+                    </a:p>
+                  </a:txBody>
+                  <a:tcPr marL="7315200" marR="7315200" marT="0" marB="0" anchor="ctr">
+                    <a:lnL w="9525" cap="flat" cmpd="sng" algn="ctr">
+                      <a:solidFill>
+                        <a:srgbClr val="DDDDDD"/>
+                      </a:solidFill>
+                      <a:prstDash val="solid"/>
+                      <a:round/>
+                      <a:headEnd type="none" w="med" len="med"/>
+                      <a:tailEnd type="none" w="med" len="med"/>
+                    </a:lnL>
+                    <a:lnR w="9525" cap="flat" cmpd="sng" algn="ctr">
+                      <a:solidFill>
+                        <a:srgbClr val="DDDDDD"/>
+                      </a:solidFill>
+                      <a:prstDash val="solid"/>
+                      <a:round/>
+                      <a:headEnd type="none" w="med" len="med"/>
+                      <a:tailEnd type="none" w="med" len="med"/>
+                    </a:lnR>
+                    <a:lnT w="9525" cap="flat" cmpd="sng" algn="ctr">
+                      <a:solidFill>
+                        <a:srgbClr val="DDDDDD"/>
+                      </a:solidFill>
+                      <a:prstDash val="solid"/>
+                      <a:round/>
+                      <a:headEnd type="none" w="med" len="med"/>
+                      <a:tailEnd type="none" w="med" len="med"/>
+                    </a:lnT>
+                    <a:lnB w="9525" cap="flat" cmpd="sng" algn="ctr">
+                      <a:solidFill>
+                        <a:srgbClr val="DDDDDD"/>
+                      </a:solidFill>
+                      <a:prstDash val="solid"/>
+                      <a:round/>
+                      <a:headEnd type="none" w="med" len="med"/>
+                      <a:tailEnd type="none" w="med" len="med"/>
+                    </a:lnB>
+                    <a:solidFill>
+                      <a:srgbClr val="FFFFFF"/>
+                    </a:solidFill>
+                  </a:tcPr>
+                </a:tc>
+              </a:tr>
+              <a:tr h="384048">
+                <a:tc>
+                  <a:txBody>
+                    <a:bodyPr/>
+                    <a:lstStyle/>
+                    <a:p>
+                      <a:pPr indent="0" marL="0">
+                        <a:buNone/>
+                      </a:pPr>
+                      <a:r>
+                        <a:rPr lang="en-US" sz="1050" b="1" dirty="0">
+                          <a:solidFill>
+                            <a:srgbClr val="001E3C"/>
+                          </a:solidFill>
+                          <a:latin typeface="Meiryo" pitchFamily="34" charset="0"/>
+                          <a:ea typeface="Meiryo" pitchFamily="34" charset="-122"/>
+                          <a:cs typeface="Meiryo" pitchFamily="34" charset="-120"/>
+                        </a:rPr>
+                        <a:t>パッケージを足す</a:t>
+                      </a:r>
+                      <a:endParaRPr lang="en-US" sz="1050" dirty="0">
+                        <a:latin typeface="Meiryo" charset="0"/>
+                        <a:ea typeface="Meiryo" charset="0"/>
+                        <a:cs typeface="Meiryo" charset="0"/>
+                      </a:endParaRPr>
+                    </a:p>
+                  </a:txBody>
+                  <a:tcPr marL="7315200" marR="7315200" marT="0" marB="0" anchor="ctr">
+                    <a:lnL w="9525" cap="flat" cmpd="sng" algn="ctr">
+                      <a:solidFill>
+                        <a:srgbClr val="DDDDDD"/>
+                      </a:solidFill>
+                      <a:prstDash val="solid"/>
+                      <a:round/>
+                      <a:headEnd type="none" w="med" len="med"/>
+                      <a:tailEnd type="none" w="med" len="med"/>
+                    </a:lnL>
+                    <a:lnR w="9525" cap="flat" cmpd="sng" algn="ctr">
+                      <a:solidFill>
+                        <a:srgbClr val="DDDDDD"/>
+                      </a:solidFill>
+                      <a:prstDash val="solid"/>
+                      <a:round/>
+                      <a:headEnd type="none" w="med" len="med"/>
+                      <a:tailEnd type="none" w="med" len="med"/>
+                    </a:lnR>
+                    <a:lnT w="9525" cap="flat" cmpd="sng" algn="ctr">
+                      <a:solidFill>
+                        <a:srgbClr val="DDDDDD"/>
+                      </a:solidFill>
+                      <a:prstDash val="solid"/>
+                      <a:round/>
+                      <a:headEnd type="none" w="med" len="med"/>
+                      <a:tailEnd type="none" w="med" len="med"/>
+                    </a:lnT>
+                    <a:lnB w="9525" cap="flat" cmpd="sng" algn="ctr">
+                      <a:solidFill>
+                        <a:srgbClr val="DDDDDD"/>
+                      </a:solidFill>
+                      <a:prstDash val="solid"/>
+                      <a:round/>
+                      <a:headEnd type="none" w="med" len="med"/>
+                      <a:tailEnd type="none" w="med" len="med"/>
+                    </a:lnB>
+                    <a:solidFill>
+                      <a:srgbClr val="FFFFFF"/>
+                    </a:solidFill>
+                  </a:tcPr>
+                </a:tc>
+                <a:tc>
+                  <a:txBody>
+                    <a:bodyPr/>
+                    <a:lstStyle/>
+                    <a:p>
+                      <a:pPr indent="0" marL="0">
+                        <a:buNone/>
+                      </a:pPr>
+                      <a:r>
+                        <a:rPr lang="en-US" sz="1000" dirty="0">
+                          <a:solidFill>
+                            <a:srgbClr val="1A4A70"/>
+                          </a:solidFill>
+                          <a:latin typeface="Consolas" pitchFamily="34" charset="0"/>
+                          <a:ea typeface="Consolas" pitchFamily="34" charset="-122"/>
+                          <a:cs typeface="Consolas" pitchFamily="34" charset="-120"/>
+                        </a:rPr>
+                        <a:t>requirements.txt に書き、pip install -r requirements.txt</a:t>
+                      </a:r>
+                      <a:endParaRPr lang="en-US" sz="1000" dirty="0">
+                        <a:latin typeface="Consolas" charset="0"/>
+                        <a:ea typeface="Consolas" charset="0"/>
+                        <a:cs typeface="Consolas" charset="0"/>
+                      </a:endParaRPr>
+                    </a:p>
+                  </a:txBody>
+                  <a:tcPr marL="7315200" marR="7315200" marT="0" marB="0" anchor="ctr">
+                    <a:lnL w="9525" cap="flat" cmpd="sng" algn="ctr">
+                      <a:solidFill>
+                        <a:srgbClr val="DDDDDD"/>
+                      </a:solidFill>
+                      <a:prstDash val="solid"/>
+                      <a:round/>
+                      <a:headEnd type="none" w="med" len="med"/>
+                      <a:tailEnd type="none" w="med" len="med"/>
+                    </a:lnL>
+                    <a:lnR w="9525" cap="flat" cmpd="sng" algn="ctr">
+                      <a:solidFill>
+                        <a:srgbClr val="DDDDDD"/>
+                      </a:solidFill>
+                      <a:prstDash val="solid"/>
+                      <a:round/>
+                      <a:headEnd type="none" w="med" len="med"/>
+                      <a:tailEnd type="none" w="med" len="med"/>
+                    </a:lnR>
+                    <a:lnT w="9525" cap="flat" cmpd="sng" algn="ctr">
+                      <a:solidFill>
+                        <a:srgbClr val="DDDDDD"/>
+                      </a:solidFill>
+                      <a:prstDash val="solid"/>
+                      <a:round/>
+                      <a:headEnd type="none" w="med" len="med"/>
+                      <a:tailEnd type="none" w="med" len="med"/>
+                    </a:lnT>
+                    <a:lnB w="9525" cap="flat" cmpd="sng" algn="ctr">
+                      <a:solidFill>
+                        <a:srgbClr val="DDDDDD"/>
+                      </a:solidFill>
+                      <a:prstDash val="solid"/>
+                      <a:round/>
+                      <a:headEnd type="none" w="med" len="med"/>
+                      <a:tailEnd type="none" w="med" len="med"/>
+                    </a:lnB>
+                    <a:solidFill>
+                      <a:srgbClr val="FFFFFF"/>
+                    </a:solidFill>
+                  </a:tcPr>
+                </a:tc>
+              </a:tr>
+              <a:tr h="384048">
+                <a:tc>
+                  <a:txBody>
+                    <a:bodyPr/>
+                    <a:lstStyle/>
+                    <a:p>
+                      <a:pPr indent="0" marL="0">
+                        <a:buNone/>
+                      </a:pPr>
+                      <a:r>
+                        <a:rPr lang="en-US" sz="1050" b="1" dirty="0">
+                          <a:solidFill>
+                            <a:srgbClr val="001E3C"/>
+                          </a:solidFill>
+                          <a:latin typeface="Meiryo" pitchFamily="34" charset="0"/>
+                          <a:ea typeface="Meiryo" pitchFamily="34" charset="-122"/>
+                          <a:cs typeface="Meiryo" pitchFamily="34" charset="-120"/>
+                        </a:rPr>
+                        <a:t>ターミナルを開く</a:t>
+                      </a:r>
+                      <a:endParaRPr lang="en-US" sz="1050" dirty="0">
+                        <a:latin typeface="Meiryo" charset="0"/>
+                        <a:ea typeface="Meiryo" charset="0"/>
+                        <a:cs typeface="Meiryo" charset="0"/>
+                      </a:endParaRPr>
+                    </a:p>
+                  </a:txBody>
+                  <a:tcPr marL="7315200" marR="7315200" marT="0" marB="0" anchor="ctr">
+                    <a:lnL w="9525" cap="flat" cmpd="sng" algn="ctr">
+                      <a:solidFill>
+                        <a:srgbClr val="DDDDDD"/>
+                      </a:solidFill>
+                      <a:prstDash val="solid"/>
+                      <a:round/>
+                      <a:headEnd type="none" w="med" len="med"/>
+                      <a:tailEnd type="none" w="med" len="med"/>
+                    </a:lnL>
+                    <a:lnR w="9525" cap="flat" cmpd="sng" algn="ctr">
+                      <a:solidFill>
+                        <a:srgbClr val="DDDDDD"/>
+                      </a:solidFill>
+                      <a:prstDash val="solid"/>
+                      <a:round/>
+                      <a:headEnd type="none" w="med" len="med"/>
+                      <a:tailEnd type="none" w="med" len="med"/>
+                    </a:lnR>
+                    <a:lnT w="9525" cap="flat" cmpd="sng" algn="ctr">
+                      <a:solidFill>
+                        <a:srgbClr val="DDDDDD"/>
+                      </a:solidFill>
+                      <a:prstDash val="solid"/>
+                      <a:round/>
+                      <a:headEnd type="none" w="med" len="med"/>
+                      <a:tailEnd type="none" w="med" len="med"/>
+                    </a:lnT>
+                    <a:lnB w="9525" cap="flat" cmpd="sng" algn="ctr">
+                      <a:solidFill>
+                        <a:srgbClr val="DDDDDD"/>
+                      </a:solidFill>
+                      <a:prstDash val="solid"/>
+                      <a:round/>
+                      <a:headEnd type="none" w="med" len="med"/>
+                      <a:tailEnd type="none" w="med" len="med"/>
+                    </a:lnB>
+                    <a:solidFill>
+                      <a:srgbClr val="FFFFFF"/>
+                    </a:solidFill>
+                  </a:tcPr>
+                </a:tc>
+                <a:tc>
+                  <a:txBody>
+                    <a:bodyPr/>
+                    <a:lstStyle/>
+                    <a:p>
+                      <a:pPr indent="0" marL="0">
+                        <a:buNone/>
+                      </a:pPr>
+                      <a:r>
+                        <a:rPr lang="en-US" sz="1050" dirty="0">
+                          <a:solidFill>
+                            <a:srgbClr val="1B2B3A"/>
+                          </a:solidFill>
+                          <a:latin typeface="Meiryo" pitchFamily="34" charset="0"/>
+                          <a:ea typeface="Meiryo" pitchFamily="34" charset="-122"/>
+                          <a:cs typeface="Meiryo" pitchFamily="34" charset="-120"/>
+                        </a:rPr>
+                        <a:t>「ターミナル」→「新しいターミナル」</a:t>
+                      </a:r>
+                      <a:endParaRPr lang="en-US" sz="1050" dirty="0">
+                        <a:latin typeface="Meiryo" charset="0"/>
+                        <a:ea typeface="Meiryo" charset="0"/>
+                        <a:cs typeface="Meiryo" charset="0"/>
+                      </a:endParaRPr>
+                    </a:p>
+                  </a:txBody>
+                  <a:tcPr marL="7315200" marR="7315200" marT="0" marB="0" anchor="ctr">
+                    <a:lnL w="9525" cap="flat" cmpd="sng" algn="ctr">
+                      <a:solidFill>
+                        <a:srgbClr val="DDDDDD"/>
+                      </a:solidFill>
+                      <a:prstDash val="solid"/>
+                      <a:round/>
+                      <a:headEnd type="none" w="med" len="med"/>
+                      <a:tailEnd type="none" w="med" len="med"/>
+                    </a:lnL>
+                    <a:lnR w="9525" cap="flat" cmpd="sng" algn="ctr">
+                      <a:solidFill>
+                        <a:srgbClr val="DDDDDD"/>
+                      </a:solidFill>
+                      <a:prstDash val="solid"/>
+                      <a:round/>
+                      <a:headEnd type="none" w="med" len="med"/>
+                      <a:tailEnd type="none" w="med" len="med"/>
+                    </a:lnR>
+                    <a:lnT w="9525" cap="flat" cmpd="sng" algn="ctr">
+                      <a:solidFill>
+                        <a:srgbClr val="DDDDDD"/>
+                      </a:solidFill>
+                      <a:prstDash val="solid"/>
+                      <a:round/>
+                      <a:headEnd type="none" w="med" len="med"/>
+                      <a:tailEnd type="none" w="med" len="med"/>
+                    </a:lnT>
+                    <a:lnB w="9525" cap="flat" cmpd="sng" algn="ctr">
+                      <a:solidFill>
+                        <a:srgbClr val="DDDDDD"/>
+                      </a:solidFill>
+                      <a:prstDash val="solid"/>
+                      <a:round/>
+                      <a:headEnd type="none" w="med" len="med"/>
+                      <a:tailEnd type="none" w="med" len="med"/>
+                    </a:lnB>
+                    <a:solidFill>
+                      <a:srgbClr val="FFFFFF"/>
+                    </a:solidFill>
+                  </a:tcPr>
+                </a:tc>
+              </a:tr>
+            </a:tbl>
+          </a:graphicData>
+        </a:graphic>
+      </p:graphicFrame>
+      <p:sp>
+        <p:nvSpPr>
+          <p:cNvPr id="5" name="Text 2"/>
+          <p:cNvSpPr txBox="1"/>
+          <p:nvPr/>
+        </p:nvSpPr>
+        <p:spPr>
+          <a:xfrm>
+            <a:off x="457200" y="4160520"/>
+            <a:ext cx="8229600" cy="365760"/>
+          </a:xfrm>
+          <a:prstGeom prst="rect">
+            <a:avLst/>
+          </a:prstGeom>
+          <a:noFill/>
+          <a:ln/>
+        </p:spPr>
+        <p:txBody>
+          <a:bodyPr wrap="square" lIns="0" tIns="0" rIns="0" bIns="0" rtlCol="0" anchor="t"/>
+          <a:lstStyle/>
+          <a:p>
+            <a:pPr indent="0" marL="0">
+              <a:buNone/>
+            </a:pPr>
+            <a:r>
+              <a:rPr lang="en-US" sz="1050" dirty="0">
+                <a:solidFill>
+                  <a:srgbClr val="5A6B7B"/>
+                </a:solidFill>
+                <a:latin typeface="Meiryo" pitchFamily="34" charset="0"/>
+                <a:ea typeface="Meiryo" pitchFamily="34" charset="-122"/>
+                <a:cs typeface="Meiryo" pitchFamily="34" charset="-120"/>
+              </a:rPr>
+              <a:t>コマンドは Windows でも Mac でも同じ（作業部屋の中は Linux のため）。パッケージの版は homepage とそろえる（公開のとき合流するため）。</a:t>
+            </a:r>
+            <a:endParaRPr lang="en-US" sz="1050" dirty="0"/>
+          </a:p>
+        </p:txBody>
+      </p:sp>
+    </p:spTree>
+  </p:cSld>
+  <p:clrMapOvr>
+    <a:masterClrMapping/>
+  </p:clrMapOvr>
+</p:sld>
+</file>
+
+<file path=ppt/slides/slide11.xml><?xml version="1.0" encoding="utf-8"?>
+<p:sld xmlns:a="http://schemas.openxmlformats.org/drawingml/2006/main" xmlns:r="http://schemas.openxmlformats.org/officeDocument/2006/relationships" xmlns:p="http://schemas.openxmlformats.org/presentationml/2006/main">
   <p:cSld name="Slide 8">
     <p:bg>
       <p:bgPr>
@@ -3243,7 +4389,7 @@
 </p:sld>
 </file>
 
-<file path=ppt/slides/slide11.xml><?xml version="1.0" encoding="utf-8"?>
+<file path=ppt/slides/slide12.xml><?xml version="1.0" encoding="utf-8"?>
 <p:sld xmlns:a="http://schemas.openxmlformats.org/drawingml/2006/main" xmlns:r="http://schemas.openxmlformats.org/officeDocument/2006/relationships" xmlns:p="http://schemas.openxmlformats.org/presentationml/2006/main">
   <p:cSld name="Slide 9">
     <p:bg>
@@ -13880,8 +15026,8 @@
 </file>
 
 <file path=ppt/slides/slide9.xml><?xml version="1.0" encoding="utf-8"?>
-<p:sld xmlns:a="http://schemas.openxmlformats.org/drawingml/2006/main" xmlns:r="http://schemas.openxmlformats.org/officeDocument/2006/relationships" xmlns:p="http://schemas.openxmlformats.org/presentationml/2006/main">
-  <p:cSld name="Slide 7">
+<p:sld xmlns:a="http://schemas.openxmlformats.org/drawingml/2006/main" xmlns:p="http://schemas.openxmlformats.org/presentationml/2006/main" xmlns:r="http://schemas.openxmlformats.org/officeDocument/2006/relationships">
+  <p:cSld name="Slide 3">
     <p:bg>
       <p:bgPr>
         <a:solidFill>
@@ -13936,7 +15082,7 @@
                 <a:ea typeface="Consolas" pitchFamily="34" charset="-122"/>
                 <a:cs typeface="Consolas" pitchFamily="34" charset="-120"/>
               </a:rPr>
-              <a:t>// 03  ·  よく使う操作</a:t>
+              <a:t>// 03  ·  活動ページ</a:t>
             </a:r>
             <a:endParaRPr lang="en-US" sz="1100" dirty="0"/>
           </a:p>
@@ -13975,1044 +15121,1101 @@
                 <a:ea typeface="Meiryo" pitchFamily="34" charset="-122"/>
                 <a:cs typeface="Meiryo" pitchFamily="34" charset="-120"/>
               </a:rPr>
-              <a:t>よく使う操作とコマンド</a:t>
+              <a:t>日程と作業の分け方</a:t>
             </a:r>
             <a:endParaRPr lang="en-US" sz="2600" dirty="0"/>
           </a:p>
         </p:txBody>
       </p:sp>
-      <p:graphicFrame>
-        <p:nvGraphicFramePr>
-          <p:cNvPr id="8" name="Table 0"/>
-          <p:cNvGraphicFramePr>
-            <a:graphicFrameLocks noGrp="1"/>
-          </p:cNvGraphicFramePr>
-          <p:nvPr>
-            <p:extLst>
-              <p:ext uri="{D42A27DB-BD31-4B8C-83A1-F6EECF244321}">
-                <p14:modId xmlns:p14="http://schemas.microsoft.com/office/powerpoint/2010/main" val="1579011935"/>
-              </p:ext>
-            </p:extLst>
-          </p:nvPr>
-        </p:nvGraphicFramePr>
-        <p:xfrm>
-          <a:off x="457200" y="1325880"/>
-          <a:ext cx="8229600" cy="914400"/>
-        </p:xfrm>
-        <a:graphic>
-          <a:graphicData uri="http://schemas.openxmlformats.org/drawingml/2006/table">
-            <a:tbl>
-              <a:tblPr/>
-              <a:tblGrid>
-                <a:gridCol w="2743200"/>
-                <a:gridCol w="5486400"/>
-              </a:tblGrid>
-              <a:tr h="384048">
-                <a:tc>
-                  <a:txBody>
-                    <a:bodyPr/>
-                    <a:lstStyle/>
-                    <a:p>
-                      <a:pPr indent="0" marL="0">
-                        <a:buNone/>
-                      </a:pPr>
-                      <a:r>
-                        <a:rPr lang="en-US" sz="1100" b="1" dirty="0">
-                          <a:solidFill>
-                            <a:srgbClr val="FFFFFF"/>
-                          </a:solidFill>
-                          <a:latin typeface="Meiryo" pitchFamily="34" charset="0"/>
-                          <a:ea typeface="Meiryo" pitchFamily="34" charset="-122"/>
-                          <a:cs typeface="Meiryo" pitchFamily="34" charset="-120"/>
-                        </a:rPr>
-                        <a:t>やりたいこと</a:t>
-                      </a:r>
-                      <a:endParaRPr lang="en-US" sz="1100" dirty="0">
-                        <a:latin typeface="Meiryo" charset="0"/>
-                        <a:ea typeface="Meiryo" charset="0"/>
-                        <a:cs typeface="Meiryo" charset="0"/>
-                      </a:endParaRPr>
-                    </a:p>
-                  </a:txBody>
-                  <a:tcPr marL="7315200" marR="7315200" marT="0" marB="0" anchor="ctr">
-                    <a:lnL w="9525" cap="flat" cmpd="sng" algn="ctr">
-                      <a:solidFill>
-                        <a:srgbClr val="DDDDDD"/>
-                      </a:solidFill>
-                      <a:prstDash val="solid"/>
-                      <a:round/>
-                      <a:headEnd type="none" w="med" len="med"/>
-                      <a:tailEnd type="none" w="med" len="med"/>
-                    </a:lnL>
-                    <a:lnR w="9525" cap="flat" cmpd="sng" algn="ctr">
-                      <a:solidFill>
-                        <a:srgbClr val="DDDDDD"/>
-                      </a:solidFill>
-                      <a:prstDash val="solid"/>
-                      <a:round/>
-                      <a:headEnd type="none" w="med" len="med"/>
-                      <a:tailEnd type="none" w="med" len="med"/>
-                    </a:lnR>
-                    <a:lnT w="9525" cap="flat" cmpd="sng" algn="ctr">
-                      <a:solidFill>
-                        <a:srgbClr val="DDDDDD"/>
-                      </a:solidFill>
-                      <a:prstDash val="solid"/>
-                      <a:round/>
-                      <a:headEnd type="none" w="med" len="med"/>
-                      <a:tailEnd type="none" w="med" len="med"/>
-                    </a:lnT>
-                    <a:lnB w="9525" cap="flat" cmpd="sng" algn="ctr">
-                      <a:solidFill>
-                        <a:srgbClr val="DDDDDD"/>
-                      </a:solidFill>
-                      <a:prstDash val="solid"/>
-                      <a:round/>
-                      <a:headEnd type="none" w="med" len="med"/>
-                      <a:tailEnd type="none" w="med" len="med"/>
-                    </a:lnB>
-                    <a:solidFill>
-                      <a:srgbClr val="001E3C"/>
-                    </a:solidFill>
-                  </a:tcPr>
-                </a:tc>
-                <a:tc>
-                  <a:txBody>
-                    <a:bodyPr/>
-                    <a:lstStyle/>
-                    <a:p>
-                      <a:pPr indent="0" marL="0">
-                        <a:buNone/>
-                      </a:pPr>
-                      <a:r>
-                        <a:rPr lang="en-US" sz="1100" b="1" dirty="0">
-                          <a:solidFill>
-                            <a:srgbClr val="FFFFFF"/>
-                          </a:solidFill>
-                          <a:latin typeface="Meiryo" pitchFamily="34" charset="0"/>
-                          <a:ea typeface="Meiryo" pitchFamily="34" charset="-122"/>
-                          <a:cs typeface="Meiryo" pitchFamily="34" charset="-120"/>
-                        </a:rPr>
-                        <a:t>やり方</a:t>
-                      </a:r>
-                      <a:endParaRPr lang="en-US" sz="1100" dirty="0">
-                        <a:latin typeface="Meiryo" charset="0"/>
-                        <a:ea typeface="Meiryo" charset="0"/>
-                        <a:cs typeface="Meiryo" charset="0"/>
-                      </a:endParaRPr>
-                    </a:p>
-                  </a:txBody>
-                  <a:tcPr marL="7315200" marR="7315200" marT="0" marB="0" anchor="ctr">
-                    <a:lnL w="9525" cap="flat" cmpd="sng" algn="ctr">
-                      <a:solidFill>
-                        <a:srgbClr val="DDDDDD"/>
-                      </a:solidFill>
-                      <a:prstDash val="solid"/>
-                      <a:round/>
-                      <a:headEnd type="none" w="med" len="med"/>
-                      <a:tailEnd type="none" w="med" len="med"/>
-                    </a:lnL>
-                    <a:lnR w="9525" cap="flat" cmpd="sng" algn="ctr">
-                      <a:solidFill>
-                        <a:srgbClr val="DDDDDD"/>
-                      </a:solidFill>
-                      <a:prstDash val="solid"/>
-                      <a:round/>
-                      <a:headEnd type="none" w="med" len="med"/>
-                      <a:tailEnd type="none" w="med" len="med"/>
-                    </a:lnR>
-                    <a:lnT w="9525" cap="flat" cmpd="sng" algn="ctr">
-                      <a:solidFill>
-                        <a:srgbClr val="DDDDDD"/>
-                      </a:solidFill>
-                      <a:prstDash val="solid"/>
-                      <a:round/>
-                      <a:headEnd type="none" w="med" len="med"/>
-                      <a:tailEnd type="none" w="med" len="med"/>
-                    </a:lnT>
-                    <a:lnB w="9525" cap="flat" cmpd="sng" algn="ctr">
-                      <a:solidFill>
-                        <a:srgbClr val="DDDDDD"/>
-                      </a:solidFill>
-                      <a:prstDash val="solid"/>
-                      <a:round/>
-                      <a:headEnd type="none" w="med" len="med"/>
-                      <a:tailEnd type="none" w="med" len="med"/>
-                    </a:lnB>
-                    <a:solidFill>
-                      <a:srgbClr val="001E3C"/>
-                    </a:solidFill>
-                  </a:tcPr>
-                </a:tc>
-              </a:tr>
-              <a:tr h="384048">
-                <a:tc>
-                  <a:txBody>
-                    <a:bodyPr/>
-                    <a:lstStyle/>
-                    <a:p>
-                      <a:pPr indent="0" marL="0">
-                        <a:buNone/>
-                      </a:pPr>
-                      <a:r>
-                        <a:rPr lang="en-US" sz="1050" b="1" dirty="0">
-                          <a:solidFill>
-                            <a:srgbClr val="001E3C"/>
-                          </a:solidFill>
-                          <a:latin typeface="Meiryo" pitchFamily="34" charset="0"/>
-                          <a:ea typeface="Meiryo" pitchFamily="34" charset="-122"/>
-                          <a:cs typeface="Meiryo" pitchFamily="34" charset="-120"/>
-                        </a:rPr>
-                        <a:t>サイトを起動する</a:t>
-                      </a:r>
-                      <a:endParaRPr lang="en-US" sz="1050" dirty="0">
-                        <a:latin typeface="Meiryo" charset="0"/>
-                        <a:ea typeface="Meiryo" charset="0"/>
-                        <a:cs typeface="Meiryo" charset="0"/>
-                      </a:endParaRPr>
-                    </a:p>
-                  </a:txBody>
-                  <a:tcPr marL="7315200" marR="7315200" marT="0" marB="0" anchor="ctr">
-                    <a:lnL w="9525" cap="flat" cmpd="sng" algn="ctr">
-                      <a:solidFill>
-                        <a:srgbClr val="DDDDDD"/>
-                      </a:solidFill>
-                      <a:prstDash val="solid"/>
-                      <a:round/>
-                      <a:headEnd type="none" w="med" len="med"/>
-                      <a:tailEnd type="none" w="med" len="med"/>
-                    </a:lnL>
-                    <a:lnR w="9525" cap="flat" cmpd="sng" algn="ctr">
-                      <a:solidFill>
-                        <a:srgbClr val="DDDDDD"/>
-                      </a:solidFill>
-                      <a:prstDash val="solid"/>
-                      <a:round/>
-                      <a:headEnd type="none" w="med" len="med"/>
-                      <a:tailEnd type="none" w="med" len="med"/>
-                    </a:lnR>
-                    <a:lnT w="9525" cap="flat" cmpd="sng" algn="ctr">
-                      <a:solidFill>
-                        <a:srgbClr val="DDDDDD"/>
-                      </a:solidFill>
-                      <a:prstDash val="solid"/>
-                      <a:round/>
-                      <a:headEnd type="none" w="med" len="med"/>
-                      <a:tailEnd type="none" w="med" len="med"/>
-                    </a:lnT>
-                    <a:lnB w="9525" cap="flat" cmpd="sng" algn="ctr">
-                      <a:solidFill>
-                        <a:srgbClr val="DDDDDD"/>
-                      </a:solidFill>
-                      <a:prstDash val="solid"/>
-                      <a:round/>
-                      <a:headEnd type="none" w="med" len="med"/>
-                      <a:tailEnd type="none" w="med" len="med"/>
-                    </a:lnB>
-                    <a:solidFill>
-                      <a:srgbClr val="FFFFFF"/>
-                    </a:solidFill>
-                  </a:tcPr>
-                </a:tc>
-                <a:tc>
-                  <a:txBody>
-                    <a:bodyPr/>
-                    <a:lstStyle/>
-                    <a:p>
-                      <a:pPr indent="0" marL="0">
-                        <a:buNone/>
-                      </a:pPr>
-                      <a:r>
-                        <a:rPr lang="en-US" sz="1050" dirty="0">
-                          <a:solidFill>
-                            <a:srgbClr val="1B2B3A"/>
-                          </a:solidFill>
-                          <a:latin typeface="Meiryo" pitchFamily="34" charset="0"/>
-                          <a:ea typeface="Meiryo" pitchFamily="34" charset="-122"/>
-                          <a:cs typeface="Meiryo" pitchFamily="34" charset="-120"/>
-                        </a:rPr>
-                        <a:t>F5（止めるのは Shift + F5）</a:t>
-                      </a:r>
-                      <a:endParaRPr lang="en-US" sz="1050" dirty="0">
-                        <a:latin typeface="Meiryo" charset="0"/>
-                        <a:ea typeface="Meiryo" charset="0"/>
-                        <a:cs typeface="Meiryo" charset="0"/>
-                      </a:endParaRPr>
-                    </a:p>
-                  </a:txBody>
-                  <a:tcPr marL="7315200" marR="7315200" marT="0" marB="0" anchor="ctr">
-                    <a:lnL w="9525" cap="flat" cmpd="sng" algn="ctr">
-                      <a:solidFill>
-                        <a:srgbClr val="DDDDDD"/>
-                      </a:solidFill>
-                      <a:prstDash val="solid"/>
-                      <a:round/>
-                      <a:headEnd type="none" w="med" len="med"/>
-                      <a:tailEnd type="none" w="med" len="med"/>
-                    </a:lnL>
-                    <a:lnR w="9525" cap="flat" cmpd="sng" algn="ctr">
-                      <a:solidFill>
-                        <a:srgbClr val="DDDDDD"/>
-                      </a:solidFill>
-                      <a:prstDash val="solid"/>
-                      <a:round/>
-                      <a:headEnd type="none" w="med" len="med"/>
-                      <a:tailEnd type="none" w="med" len="med"/>
-                    </a:lnR>
-                    <a:lnT w="9525" cap="flat" cmpd="sng" algn="ctr">
-                      <a:solidFill>
-                        <a:srgbClr val="DDDDDD"/>
-                      </a:solidFill>
-                      <a:prstDash val="solid"/>
-                      <a:round/>
-                      <a:headEnd type="none" w="med" len="med"/>
-                      <a:tailEnd type="none" w="med" len="med"/>
-                    </a:lnT>
-                    <a:lnB w="9525" cap="flat" cmpd="sng" algn="ctr">
-                      <a:solidFill>
-                        <a:srgbClr val="DDDDDD"/>
-                      </a:solidFill>
-                      <a:prstDash val="solid"/>
-                      <a:round/>
-                      <a:headEnd type="none" w="med" len="med"/>
-                      <a:tailEnd type="none" w="med" len="med"/>
-                    </a:lnB>
-                    <a:solidFill>
-                      <a:srgbClr val="FFFFFF"/>
-                    </a:solidFill>
-                  </a:tcPr>
-                </a:tc>
-              </a:tr>
-              <a:tr h="384048">
-                <a:tc>
-                  <a:txBody>
-                    <a:bodyPr/>
-                    <a:lstStyle/>
-                    <a:p>
-                      <a:pPr indent="0" marL="0">
-                        <a:buNone/>
-                      </a:pPr>
-                      <a:r>
-                        <a:rPr lang="en-US" sz="1050" b="1" dirty="0">
-                          <a:solidFill>
-                            <a:srgbClr val="001E3C"/>
-                          </a:solidFill>
-                          <a:latin typeface="Meiryo" pitchFamily="34" charset="0"/>
-                          <a:ea typeface="Meiryo" pitchFamily="34" charset="-122"/>
-                          <a:cs typeface="Meiryo" pitchFamily="34" charset="-120"/>
-                        </a:rPr>
-                        <a:t>テストを流す</a:t>
-                      </a:r>
-                      <a:endParaRPr lang="en-US" sz="1050" dirty="0">
-                        <a:latin typeface="Meiryo" charset="0"/>
-                        <a:ea typeface="Meiryo" charset="0"/>
-                        <a:cs typeface="Meiryo" charset="0"/>
-                      </a:endParaRPr>
-                    </a:p>
-                  </a:txBody>
-                  <a:tcPr marL="7315200" marR="7315200" marT="0" marB="0" anchor="ctr">
-                    <a:lnL w="9525" cap="flat" cmpd="sng" algn="ctr">
-                      <a:solidFill>
-                        <a:srgbClr val="DDDDDD"/>
-                      </a:solidFill>
-                      <a:prstDash val="solid"/>
-                      <a:round/>
-                      <a:headEnd type="none" w="med" len="med"/>
-                      <a:tailEnd type="none" w="med" len="med"/>
-                    </a:lnL>
-                    <a:lnR w="9525" cap="flat" cmpd="sng" algn="ctr">
-                      <a:solidFill>
-                        <a:srgbClr val="DDDDDD"/>
-                      </a:solidFill>
-                      <a:prstDash val="solid"/>
-                      <a:round/>
-                      <a:headEnd type="none" w="med" len="med"/>
-                      <a:tailEnd type="none" w="med" len="med"/>
-                    </a:lnR>
-                    <a:lnT w="9525" cap="flat" cmpd="sng" algn="ctr">
-                      <a:solidFill>
-                        <a:srgbClr val="DDDDDD"/>
-                      </a:solidFill>
-                      <a:prstDash val="solid"/>
-                      <a:round/>
-                      <a:headEnd type="none" w="med" len="med"/>
-                      <a:tailEnd type="none" w="med" len="med"/>
-                    </a:lnT>
-                    <a:lnB w="9525" cap="flat" cmpd="sng" algn="ctr">
-                      <a:solidFill>
-                        <a:srgbClr val="DDDDDD"/>
-                      </a:solidFill>
-                      <a:prstDash val="solid"/>
-                      <a:round/>
-                      <a:headEnd type="none" w="med" len="med"/>
-                      <a:tailEnd type="none" w="med" len="med"/>
-                    </a:lnB>
-                    <a:solidFill>
-                      <a:srgbClr val="FFFFFF"/>
-                    </a:solidFill>
-                  </a:tcPr>
-                </a:tc>
-                <a:tc>
-                  <a:txBody>
-                    <a:bodyPr/>
-                    <a:lstStyle/>
-                    <a:p>
-                      <a:pPr indent="0" marL="0">
-                        <a:buNone/>
-                      </a:pPr>
-                      <a:r>
-                        <a:rPr lang="en-US" sz="1000" dirty="0">
-                          <a:solidFill>
-                            <a:srgbClr val="1A4A70"/>
-                          </a:solidFill>
-                          <a:latin typeface="Consolas" pitchFamily="34" charset="0"/>
-                          <a:ea typeface="Consolas" pitchFamily="34" charset="-122"/>
-                          <a:cs typeface="Consolas" pitchFamily="34" charset="-120"/>
-                        </a:rPr>
-                        <a:t>python manage.py test</a:t>
-                      </a:r>
-                      <a:endParaRPr lang="en-US" sz="1000" dirty="0">
-                        <a:latin typeface="Consolas" charset="0"/>
-                        <a:ea typeface="Consolas" charset="0"/>
-                        <a:cs typeface="Consolas" charset="0"/>
-                      </a:endParaRPr>
-                    </a:p>
-                  </a:txBody>
-                  <a:tcPr marL="7315200" marR="7315200" marT="0" marB="0" anchor="ctr">
-                    <a:lnL w="9525" cap="flat" cmpd="sng" algn="ctr">
-                      <a:solidFill>
-                        <a:srgbClr val="DDDDDD"/>
-                      </a:solidFill>
-                      <a:prstDash val="solid"/>
-                      <a:round/>
-                      <a:headEnd type="none" w="med" len="med"/>
-                      <a:tailEnd type="none" w="med" len="med"/>
-                    </a:lnL>
-                    <a:lnR w="9525" cap="flat" cmpd="sng" algn="ctr">
-                      <a:solidFill>
-                        <a:srgbClr val="DDDDDD"/>
-                      </a:solidFill>
-                      <a:prstDash val="solid"/>
-                      <a:round/>
-                      <a:headEnd type="none" w="med" len="med"/>
-                      <a:tailEnd type="none" w="med" len="med"/>
-                    </a:lnR>
-                    <a:lnT w="9525" cap="flat" cmpd="sng" algn="ctr">
-                      <a:solidFill>
-                        <a:srgbClr val="DDDDDD"/>
-                      </a:solidFill>
-                      <a:prstDash val="solid"/>
-                      <a:round/>
-                      <a:headEnd type="none" w="med" len="med"/>
-                      <a:tailEnd type="none" w="med" len="med"/>
-                    </a:lnT>
-                    <a:lnB w="9525" cap="flat" cmpd="sng" algn="ctr">
-                      <a:solidFill>
-                        <a:srgbClr val="DDDDDD"/>
-                      </a:solidFill>
-                      <a:prstDash val="solid"/>
-                      <a:round/>
-                      <a:headEnd type="none" w="med" len="med"/>
-                      <a:tailEnd type="none" w="med" len="med"/>
-                    </a:lnB>
-                    <a:solidFill>
-                      <a:srgbClr val="FFFFFF"/>
-                    </a:solidFill>
-                  </a:tcPr>
-                </a:tc>
-              </a:tr>
-              <a:tr h="384048">
-                <a:tc>
-                  <a:txBody>
-                    <a:bodyPr/>
-                    <a:lstStyle/>
-                    <a:p>
-                      <a:pPr indent="0" marL="0">
-                        <a:buNone/>
-                      </a:pPr>
-                      <a:r>
-                        <a:rPr lang="en-US" sz="1050" b="1" dirty="0">
-                          <a:solidFill>
-                            <a:srgbClr val="001E3C"/>
-                          </a:solidFill>
-                          <a:latin typeface="Meiryo" pitchFamily="34" charset="0"/>
-                          <a:ea typeface="Meiryo" pitchFamily="34" charset="-122"/>
-                          <a:cs typeface="Meiryo" pitchFamily="34" charset="-120"/>
-                        </a:rPr>
-                        <a:t>モデルを変えた</a:t>
-                      </a:r>
-                      <a:endParaRPr lang="en-US" sz="1050" dirty="0">
-                        <a:latin typeface="Meiryo" charset="0"/>
-                        <a:ea typeface="Meiryo" charset="0"/>
-                        <a:cs typeface="Meiryo" charset="0"/>
-                      </a:endParaRPr>
-                    </a:p>
-                  </a:txBody>
-                  <a:tcPr marL="7315200" marR="7315200" marT="0" marB="0" anchor="ctr">
-                    <a:lnL w="9525" cap="flat" cmpd="sng" algn="ctr">
-                      <a:solidFill>
-                        <a:srgbClr val="DDDDDD"/>
-                      </a:solidFill>
-                      <a:prstDash val="solid"/>
-                      <a:round/>
-                      <a:headEnd type="none" w="med" len="med"/>
-                      <a:tailEnd type="none" w="med" len="med"/>
-                    </a:lnL>
-                    <a:lnR w="9525" cap="flat" cmpd="sng" algn="ctr">
-                      <a:solidFill>
-                        <a:srgbClr val="DDDDDD"/>
-                      </a:solidFill>
-                      <a:prstDash val="solid"/>
-                      <a:round/>
-                      <a:headEnd type="none" w="med" len="med"/>
-                      <a:tailEnd type="none" w="med" len="med"/>
-                    </a:lnR>
-                    <a:lnT w="9525" cap="flat" cmpd="sng" algn="ctr">
-                      <a:solidFill>
-                        <a:srgbClr val="DDDDDD"/>
-                      </a:solidFill>
-                      <a:prstDash val="solid"/>
-                      <a:round/>
-                      <a:headEnd type="none" w="med" len="med"/>
-                      <a:tailEnd type="none" w="med" len="med"/>
-                    </a:lnT>
-                    <a:lnB w="9525" cap="flat" cmpd="sng" algn="ctr">
-                      <a:solidFill>
-                        <a:srgbClr val="DDDDDD"/>
-                      </a:solidFill>
-                      <a:prstDash val="solid"/>
-                      <a:round/>
-                      <a:headEnd type="none" w="med" len="med"/>
-                      <a:tailEnd type="none" w="med" len="med"/>
-                    </a:lnB>
-                    <a:solidFill>
-                      <a:srgbClr val="FFFFFF"/>
-                    </a:solidFill>
-                  </a:tcPr>
-                </a:tc>
-                <a:tc>
-                  <a:txBody>
-                    <a:bodyPr/>
-                    <a:lstStyle/>
-                    <a:p>
-                      <a:pPr indent="0" marL="0">
-                        <a:buNone/>
-                      </a:pPr>
-                      <a:r>
-                        <a:rPr lang="en-US" sz="1000" dirty="0">
-                          <a:solidFill>
-                            <a:srgbClr val="1A4A70"/>
-                          </a:solidFill>
-                          <a:latin typeface="Consolas" pitchFamily="34" charset="0"/>
-                          <a:ea typeface="Consolas" pitchFamily="34" charset="-122"/>
-                          <a:cs typeface="Consolas" pitchFamily="34" charset="-120"/>
-                        </a:rPr>
-                        <a:t>python manage.py makemigrations → migrate</a:t>
-                      </a:r>
-                      <a:endParaRPr lang="en-US" sz="1000" dirty="0">
-                        <a:latin typeface="Consolas" charset="0"/>
-                        <a:ea typeface="Consolas" charset="0"/>
-                        <a:cs typeface="Consolas" charset="0"/>
-                      </a:endParaRPr>
-                    </a:p>
-                  </a:txBody>
-                  <a:tcPr marL="7315200" marR="7315200" marT="0" marB="0" anchor="ctr">
-                    <a:lnL w="9525" cap="flat" cmpd="sng" algn="ctr">
-                      <a:solidFill>
-                        <a:srgbClr val="DDDDDD"/>
-                      </a:solidFill>
-                      <a:prstDash val="solid"/>
-                      <a:round/>
-                      <a:headEnd type="none" w="med" len="med"/>
-                      <a:tailEnd type="none" w="med" len="med"/>
-                    </a:lnL>
-                    <a:lnR w="9525" cap="flat" cmpd="sng" algn="ctr">
-                      <a:solidFill>
-                        <a:srgbClr val="DDDDDD"/>
-                      </a:solidFill>
-                      <a:prstDash val="solid"/>
-                      <a:round/>
-                      <a:headEnd type="none" w="med" len="med"/>
-                      <a:tailEnd type="none" w="med" len="med"/>
-                    </a:lnR>
-                    <a:lnT w="9525" cap="flat" cmpd="sng" algn="ctr">
-                      <a:solidFill>
-                        <a:srgbClr val="DDDDDD"/>
-                      </a:solidFill>
-                      <a:prstDash val="solid"/>
-                      <a:round/>
-                      <a:headEnd type="none" w="med" len="med"/>
-                      <a:tailEnd type="none" w="med" len="med"/>
-                    </a:lnT>
-                    <a:lnB w="9525" cap="flat" cmpd="sng" algn="ctr">
-                      <a:solidFill>
-                        <a:srgbClr val="DDDDDD"/>
-                      </a:solidFill>
-                      <a:prstDash val="solid"/>
-                      <a:round/>
-                      <a:headEnd type="none" w="med" len="med"/>
-                      <a:tailEnd type="none" w="med" len="med"/>
-                    </a:lnB>
-                    <a:solidFill>
-                      <a:srgbClr val="FFFFFF"/>
-                    </a:solidFill>
-                  </a:tcPr>
-                </a:tc>
-              </a:tr>
-              <a:tr h="384048">
-                <a:tc>
-                  <a:txBody>
-                    <a:bodyPr/>
-                    <a:lstStyle/>
-                    <a:p>
-                      <a:pPr indent="0" marL="0">
-                        <a:buNone/>
-                      </a:pPr>
-                      <a:r>
-                        <a:rPr lang="en-US" sz="1050" b="1" dirty="0">
-                          <a:solidFill>
-                            <a:srgbClr val="001E3C"/>
-                          </a:solidFill>
-                          <a:latin typeface="Meiryo" pitchFamily="34" charset="0"/>
-                          <a:ea typeface="Meiryo" pitchFamily="34" charset="-122"/>
-                          <a:cs typeface="Meiryo" pitchFamily="34" charset="-120"/>
-                        </a:rPr>
-                        <a:t>管理画面のアカウントを作る</a:t>
-                      </a:r>
-                      <a:endParaRPr lang="en-US" sz="1050" dirty="0">
-                        <a:latin typeface="Meiryo" charset="0"/>
-                        <a:ea typeface="Meiryo" charset="0"/>
-                        <a:cs typeface="Meiryo" charset="0"/>
-                      </a:endParaRPr>
-                    </a:p>
-                  </a:txBody>
-                  <a:tcPr marL="7315200" marR="7315200" marT="0" marB="0" anchor="ctr">
-                    <a:lnL w="9525" cap="flat" cmpd="sng" algn="ctr">
-                      <a:solidFill>
-                        <a:srgbClr val="DDDDDD"/>
-                      </a:solidFill>
-                      <a:prstDash val="solid"/>
-                      <a:round/>
-                      <a:headEnd type="none" w="med" len="med"/>
-                      <a:tailEnd type="none" w="med" len="med"/>
-                    </a:lnL>
-                    <a:lnR w="9525" cap="flat" cmpd="sng" algn="ctr">
-                      <a:solidFill>
-                        <a:srgbClr val="DDDDDD"/>
-                      </a:solidFill>
-                      <a:prstDash val="solid"/>
-                      <a:round/>
-                      <a:headEnd type="none" w="med" len="med"/>
-                      <a:tailEnd type="none" w="med" len="med"/>
-                    </a:lnR>
-                    <a:lnT w="9525" cap="flat" cmpd="sng" algn="ctr">
-                      <a:solidFill>
-                        <a:srgbClr val="DDDDDD"/>
-                      </a:solidFill>
-                      <a:prstDash val="solid"/>
-                      <a:round/>
-                      <a:headEnd type="none" w="med" len="med"/>
-                      <a:tailEnd type="none" w="med" len="med"/>
-                    </a:lnT>
-                    <a:lnB w="9525" cap="flat" cmpd="sng" algn="ctr">
-                      <a:solidFill>
-                        <a:srgbClr val="DDDDDD"/>
-                      </a:solidFill>
-                      <a:prstDash val="solid"/>
-                      <a:round/>
-                      <a:headEnd type="none" w="med" len="med"/>
-                      <a:tailEnd type="none" w="med" len="med"/>
-                    </a:lnB>
-                    <a:solidFill>
-                      <a:srgbClr val="FFFFFF"/>
-                    </a:solidFill>
-                  </a:tcPr>
-                </a:tc>
-                <a:tc>
-                  <a:txBody>
-                    <a:bodyPr/>
-                    <a:lstStyle/>
-                    <a:p>
-                      <a:pPr indent="0" marL="0">
-                        <a:buNone/>
-                      </a:pPr>
-                      <a:r>
-                        <a:rPr lang="en-US" sz="1000" dirty="0">
-                          <a:solidFill>
-                            <a:srgbClr val="1A4A70"/>
-                          </a:solidFill>
-                          <a:latin typeface="Consolas" pitchFamily="34" charset="0"/>
-                          <a:ea typeface="Consolas" pitchFamily="34" charset="-122"/>
-                          <a:cs typeface="Consolas" pitchFamily="34" charset="-120"/>
-                        </a:rPr>
-                        <a:t>python manage.py createsuperuser</a:t>
-                      </a:r>
-                      <a:endParaRPr lang="en-US" sz="1000" dirty="0">
-                        <a:latin typeface="Consolas" charset="0"/>
-                        <a:ea typeface="Consolas" charset="0"/>
-                        <a:cs typeface="Consolas" charset="0"/>
-                      </a:endParaRPr>
-                    </a:p>
-                  </a:txBody>
-                  <a:tcPr marL="7315200" marR="7315200" marT="0" marB="0" anchor="ctr">
-                    <a:lnL w="9525" cap="flat" cmpd="sng" algn="ctr">
-                      <a:solidFill>
-                        <a:srgbClr val="DDDDDD"/>
-                      </a:solidFill>
-                      <a:prstDash val="solid"/>
-                      <a:round/>
-                      <a:headEnd type="none" w="med" len="med"/>
-                      <a:tailEnd type="none" w="med" len="med"/>
-                    </a:lnL>
-                    <a:lnR w="9525" cap="flat" cmpd="sng" algn="ctr">
-                      <a:solidFill>
-                        <a:srgbClr val="DDDDDD"/>
-                      </a:solidFill>
-                      <a:prstDash val="solid"/>
-                      <a:round/>
-                      <a:headEnd type="none" w="med" len="med"/>
-                      <a:tailEnd type="none" w="med" len="med"/>
-                    </a:lnR>
-                    <a:lnT w="9525" cap="flat" cmpd="sng" algn="ctr">
-                      <a:solidFill>
-                        <a:srgbClr val="DDDDDD"/>
-                      </a:solidFill>
-                      <a:prstDash val="solid"/>
-                      <a:round/>
-                      <a:headEnd type="none" w="med" len="med"/>
-                      <a:tailEnd type="none" w="med" len="med"/>
-                    </a:lnT>
-                    <a:lnB w="9525" cap="flat" cmpd="sng" algn="ctr">
-                      <a:solidFill>
-                        <a:srgbClr val="DDDDDD"/>
-                      </a:solidFill>
-                      <a:prstDash val="solid"/>
-                      <a:round/>
-                      <a:headEnd type="none" w="med" len="med"/>
-                      <a:tailEnd type="none" w="med" len="med"/>
-                    </a:lnB>
-                    <a:solidFill>
-                      <a:srgbClr val="FFFFFF"/>
-                    </a:solidFill>
-                  </a:tcPr>
-                </a:tc>
-              </a:tr>
-              <a:tr h="384048">
-                <a:tc>
-                  <a:txBody>
-                    <a:bodyPr/>
-                    <a:lstStyle/>
-                    <a:p>
-                      <a:pPr indent="0" marL="0">
-                        <a:buNone/>
-                      </a:pPr>
-                      <a:r>
-                        <a:rPr lang="en-US" sz="1050" b="1" dirty="0">
-                          <a:solidFill>
-                            <a:srgbClr val="001E3C"/>
-                          </a:solidFill>
-                          <a:latin typeface="Meiryo" pitchFamily="34" charset="0"/>
-                          <a:ea typeface="Meiryo" pitchFamily="34" charset="-122"/>
-                          <a:cs typeface="Meiryo" pitchFamily="34" charset="-120"/>
-                        </a:rPr>
-                        <a:t>パッケージを足す</a:t>
-                      </a:r>
-                      <a:endParaRPr lang="en-US" sz="1050" dirty="0">
-                        <a:latin typeface="Meiryo" charset="0"/>
-                        <a:ea typeface="Meiryo" charset="0"/>
-                        <a:cs typeface="Meiryo" charset="0"/>
-                      </a:endParaRPr>
-                    </a:p>
-                  </a:txBody>
-                  <a:tcPr marL="7315200" marR="7315200" marT="0" marB="0" anchor="ctr">
-                    <a:lnL w="9525" cap="flat" cmpd="sng" algn="ctr">
-                      <a:solidFill>
-                        <a:srgbClr val="DDDDDD"/>
-                      </a:solidFill>
-                      <a:prstDash val="solid"/>
-                      <a:round/>
-                      <a:headEnd type="none" w="med" len="med"/>
-                      <a:tailEnd type="none" w="med" len="med"/>
-                    </a:lnL>
-                    <a:lnR w="9525" cap="flat" cmpd="sng" algn="ctr">
-                      <a:solidFill>
-                        <a:srgbClr val="DDDDDD"/>
-                      </a:solidFill>
-                      <a:prstDash val="solid"/>
-                      <a:round/>
-                      <a:headEnd type="none" w="med" len="med"/>
-                      <a:tailEnd type="none" w="med" len="med"/>
-                    </a:lnR>
-                    <a:lnT w="9525" cap="flat" cmpd="sng" algn="ctr">
-                      <a:solidFill>
-                        <a:srgbClr val="DDDDDD"/>
-                      </a:solidFill>
-                      <a:prstDash val="solid"/>
-                      <a:round/>
-                      <a:headEnd type="none" w="med" len="med"/>
-                      <a:tailEnd type="none" w="med" len="med"/>
-                    </a:lnT>
-                    <a:lnB w="9525" cap="flat" cmpd="sng" algn="ctr">
-                      <a:solidFill>
-                        <a:srgbClr val="DDDDDD"/>
-                      </a:solidFill>
-                      <a:prstDash val="solid"/>
-                      <a:round/>
-                      <a:headEnd type="none" w="med" len="med"/>
-                      <a:tailEnd type="none" w="med" len="med"/>
-                    </a:lnB>
-                    <a:solidFill>
-                      <a:srgbClr val="FFFFFF"/>
-                    </a:solidFill>
-                  </a:tcPr>
-                </a:tc>
-                <a:tc>
-                  <a:txBody>
-                    <a:bodyPr/>
-                    <a:lstStyle/>
-                    <a:p>
-                      <a:pPr indent="0" marL="0">
-                        <a:buNone/>
-                      </a:pPr>
-                      <a:r>
-                        <a:rPr lang="en-US" sz="1000" dirty="0">
-                          <a:solidFill>
-                            <a:srgbClr val="1A4A70"/>
-                          </a:solidFill>
-                          <a:latin typeface="Consolas" pitchFamily="34" charset="0"/>
-                          <a:ea typeface="Consolas" pitchFamily="34" charset="-122"/>
-                          <a:cs typeface="Consolas" pitchFamily="34" charset="-120"/>
-                        </a:rPr>
-                        <a:t>requirements.txt に書き、pip install -r requirements.txt</a:t>
-                      </a:r>
-                      <a:endParaRPr lang="en-US" sz="1000" dirty="0">
-                        <a:latin typeface="Consolas" charset="0"/>
-                        <a:ea typeface="Consolas" charset="0"/>
-                        <a:cs typeface="Consolas" charset="0"/>
-                      </a:endParaRPr>
-                    </a:p>
-                  </a:txBody>
-                  <a:tcPr marL="7315200" marR="7315200" marT="0" marB="0" anchor="ctr">
-                    <a:lnL w="9525" cap="flat" cmpd="sng" algn="ctr">
-                      <a:solidFill>
-                        <a:srgbClr val="DDDDDD"/>
-                      </a:solidFill>
-                      <a:prstDash val="solid"/>
-                      <a:round/>
-                      <a:headEnd type="none" w="med" len="med"/>
-                      <a:tailEnd type="none" w="med" len="med"/>
-                    </a:lnL>
-                    <a:lnR w="9525" cap="flat" cmpd="sng" algn="ctr">
-                      <a:solidFill>
-                        <a:srgbClr val="DDDDDD"/>
-                      </a:solidFill>
-                      <a:prstDash val="solid"/>
-                      <a:round/>
-                      <a:headEnd type="none" w="med" len="med"/>
-                      <a:tailEnd type="none" w="med" len="med"/>
-                    </a:lnR>
-                    <a:lnT w="9525" cap="flat" cmpd="sng" algn="ctr">
-                      <a:solidFill>
-                        <a:srgbClr val="DDDDDD"/>
-                      </a:solidFill>
-                      <a:prstDash val="solid"/>
-                      <a:round/>
-                      <a:headEnd type="none" w="med" len="med"/>
-                      <a:tailEnd type="none" w="med" len="med"/>
-                    </a:lnT>
-                    <a:lnB w="9525" cap="flat" cmpd="sng" algn="ctr">
-                      <a:solidFill>
-                        <a:srgbClr val="DDDDDD"/>
-                      </a:solidFill>
-                      <a:prstDash val="solid"/>
-                      <a:round/>
-                      <a:headEnd type="none" w="med" len="med"/>
-                      <a:tailEnd type="none" w="med" len="med"/>
-                    </a:lnB>
-                    <a:solidFill>
-                      <a:srgbClr val="FFFFFF"/>
-                    </a:solidFill>
-                  </a:tcPr>
-                </a:tc>
-              </a:tr>
-              <a:tr h="384048">
-                <a:tc>
-                  <a:txBody>
-                    <a:bodyPr/>
-                    <a:lstStyle/>
-                    <a:p>
-                      <a:pPr indent="0" marL="0">
-                        <a:buNone/>
-                      </a:pPr>
-                      <a:r>
-                        <a:rPr lang="en-US" sz="1050" b="1" dirty="0">
-                          <a:solidFill>
-                            <a:srgbClr val="001E3C"/>
-                          </a:solidFill>
-                          <a:latin typeface="Meiryo" pitchFamily="34" charset="0"/>
-                          <a:ea typeface="Meiryo" pitchFamily="34" charset="-122"/>
-                          <a:cs typeface="Meiryo" pitchFamily="34" charset="-120"/>
-                        </a:rPr>
-                        <a:t>ターミナルを開く</a:t>
-                      </a:r>
-                      <a:endParaRPr lang="en-US" sz="1050" dirty="0">
-                        <a:latin typeface="Meiryo" charset="0"/>
-                        <a:ea typeface="Meiryo" charset="0"/>
-                        <a:cs typeface="Meiryo" charset="0"/>
-                      </a:endParaRPr>
-                    </a:p>
-                  </a:txBody>
-                  <a:tcPr marL="7315200" marR="7315200" marT="0" marB="0" anchor="ctr">
-                    <a:lnL w="9525" cap="flat" cmpd="sng" algn="ctr">
-                      <a:solidFill>
-                        <a:srgbClr val="DDDDDD"/>
-                      </a:solidFill>
-                      <a:prstDash val="solid"/>
-                      <a:round/>
-                      <a:headEnd type="none" w="med" len="med"/>
-                      <a:tailEnd type="none" w="med" len="med"/>
-                    </a:lnL>
-                    <a:lnR w="9525" cap="flat" cmpd="sng" algn="ctr">
-                      <a:solidFill>
-                        <a:srgbClr val="DDDDDD"/>
-                      </a:solidFill>
-                      <a:prstDash val="solid"/>
-                      <a:round/>
-                      <a:headEnd type="none" w="med" len="med"/>
-                      <a:tailEnd type="none" w="med" len="med"/>
-                    </a:lnR>
-                    <a:lnT w="9525" cap="flat" cmpd="sng" algn="ctr">
-                      <a:solidFill>
-                        <a:srgbClr val="DDDDDD"/>
-                      </a:solidFill>
-                      <a:prstDash val="solid"/>
-                      <a:round/>
-                      <a:headEnd type="none" w="med" len="med"/>
-                      <a:tailEnd type="none" w="med" len="med"/>
-                    </a:lnT>
-                    <a:lnB w="9525" cap="flat" cmpd="sng" algn="ctr">
-                      <a:solidFill>
-                        <a:srgbClr val="DDDDDD"/>
-                      </a:solidFill>
-                      <a:prstDash val="solid"/>
-                      <a:round/>
-                      <a:headEnd type="none" w="med" len="med"/>
-                      <a:tailEnd type="none" w="med" len="med"/>
-                    </a:lnB>
-                    <a:solidFill>
-                      <a:srgbClr val="FFFFFF"/>
-                    </a:solidFill>
-                  </a:tcPr>
-                </a:tc>
-                <a:tc>
-                  <a:txBody>
-                    <a:bodyPr/>
-                    <a:lstStyle/>
-                    <a:p>
-                      <a:pPr indent="0" marL="0">
-                        <a:buNone/>
-                      </a:pPr>
-                      <a:r>
-                        <a:rPr lang="en-US" sz="1050" dirty="0">
-                          <a:solidFill>
-                            <a:srgbClr val="1B2B3A"/>
-                          </a:solidFill>
-                          <a:latin typeface="Meiryo" pitchFamily="34" charset="0"/>
-                          <a:ea typeface="Meiryo" pitchFamily="34" charset="-122"/>
-                          <a:cs typeface="Meiryo" pitchFamily="34" charset="-120"/>
-                        </a:rPr>
-                        <a:t>「ターミナル」→「新しいターミナル」</a:t>
-                      </a:r>
-                      <a:endParaRPr lang="en-US" sz="1050" dirty="0">
-                        <a:latin typeface="Meiryo" charset="0"/>
-                        <a:ea typeface="Meiryo" charset="0"/>
-                        <a:cs typeface="Meiryo" charset="0"/>
-                      </a:endParaRPr>
-                    </a:p>
-                  </a:txBody>
-                  <a:tcPr marL="7315200" marR="7315200" marT="0" marB="0" anchor="ctr">
-                    <a:lnL w="9525" cap="flat" cmpd="sng" algn="ctr">
-                      <a:solidFill>
-                        <a:srgbClr val="DDDDDD"/>
-                      </a:solidFill>
-                      <a:prstDash val="solid"/>
-                      <a:round/>
-                      <a:headEnd type="none" w="med" len="med"/>
-                      <a:tailEnd type="none" w="med" len="med"/>
-                    </a:lnL>
-                    <a:lnR w="9525" cap="flat" cmpd="sng" algn="ctr">
-                      <a:solidFill>
-                        <a:srgbClr val="DDDDDD"/>
-                      </a:solidFill>
-                      <a:prstDash val="solid"/>
-                      <a:round/>
-                      <a:headEnd type="none" w="med" len="med"/>
-                      <a:tailEnd type="none" w="med" len="med"/>
-                    </a:lnR>
-                    <a:lnT w="9525" cap="flat" cmpd="sng" algn="ctr">
-                      <a:solidFill>
-                        <a:srgbClr val="DDDDDD"/>
-                      </a:solidFill>
-                      <a:prstDash val="solid"/>
-                      <a:round/>
-                      <a:headEnd type="none" w="med" len="med"/>
-                      <a:tailEnd type="none" w="med" len="med"/>
-                    </a:lnT>
-                    <a:lnB w="9525" cap="flat" cmpd="sng" algn="ctr">
-                      <a:solidFill>
-                        <a:srgbClr val="DDDDDD"/>
-                      </a:solidFill>
-                      <a:prstDash val="solid"/>
-                      <a:round/>
-                      <a:headEnd type="none" w="med" len="med"/>
-                      <a:tailEnd type="none" w="med" len="med"/>
-                    </a:lnB>
-                    <a:solidFill>
-                      <a:srgbClr val="FFFFFF"/>
-                    </a:solidFill>
-                  </a:tcPr>
-                </a:tc>
-              </a:tr>
-            </a:tbl>
-          </a:graphicData>
-        </a:graphic>
-      </p:graphicFrame>
-      <p:sp>
-        <p:nvSpPr>
-          <p:cNvPr id="5" name="Text 2"/>
-          <p:cNvSpPr txBox="1"/>
-          <p:nvPr/>
-        </p:nvSpPr>
-        <p:spPr>
-          <a:xfrm>
-            <a:off x="457200" y="4160520"/>
-            <a:ext cx="8229600" cy="365760"/>
-          </a:xfrm>
-          <a:prstGeom prst="rect">
-            <a:avLst/>
-          </a:prstGeom>
-          <a:noFill/>
-          <a:ln/>
-        </p:spPr>
-        <p:txBody>
-          <a:bodyPr wrap="square" lIns="0" tIns="0" rIns="0" bIns="0" rtlCol="0" anchor="t"/>
-          <a:lstStyle/>
-          <a:p>
-            <a:pPr indent="0" marL="0">
-              <a:buNone/>
-            </a:pPr>
-            <a:r>
-              <a:rPr lang="en-US" sz="1050" dirty="0">
-                <a:solidFill>
-                  <a:srgbClr val="5A6B7B"/>
+      <p:sp>
+        <p:nvSpPr>
+          <p:cNvPr id="4" name="Shape 2"/>
+          <p:cNvSpPr/>
+          <p:nvPr/>
+        </p:nvSpPr>
+        <p:spPr>
+          <a:xfrm>
+            <a:off x="457200" y="1417320"/>
+            <a:ext cx="4023360" cy="3154680"/>
+          </a:xfrm>
+          <a:prstGeom prst="rect">
+            <a:avLst/>
+          </a:prstGeom>
+          <a:solidFill>
+            <a:srgbClr val="FFFFFF"/>
+          </a:solidFill>
+          <a:ln w="12700">
+            <a:solidFill>
+              <a:srgbClr val="FFFFFF"/>
+            </a:solidFill>
+            <a:prstDash val="solid"/>
+          </a:ln>
+          <a:effectLst>
+            <a:outerShdw sx="100000" sy="100000" kx="0" ky="0" algn="bl" rotWithShape="0" blurRad="76200" dist="25400" dir="5400000">
+              <a:srgbClr val="000000">
+                <a:alpha val="12000"/>
+              </a:srgbClr>
+            </a:outerShdw>
+          </a:effectLst>
+        </p:spPr>
+      </p:sp>
+      <p:sp>
+        <p:nvSpPr>
+          <p:cNvPr id="5" name="Shape 3"/>
+          <p:cNvSpPr/>
+          <p:nvPr/>
+        </p:nvSpPr>
+        <p:spPr>
+          <a:xfrm>
+            <a:off x="685800" y="1618488"/>
+            <a:ext cx="457200" cy="457200"/>
+          </a:xfrm>
+          <a:prstGeom prst="ellipse">
+            <a:avLst/>
+          </a:prstGeom>
+          <a:solidFill>
+            <a:srgbClr val="5BB8FF"/>
+          </a:solidFill>
+          <a:ln w="12700">
+            <a:solidFill>
+              <a:srgbClr val="5BB8FF"/>
+            </a:solidFill>
+            <a:prstDash val="solid"/>
+          </a:ln>
+        </p:spPr>
+      </p:sp>
+      <p:pic>
+        <p:nvPicPr>
+          <p:cNvPr id="36" name="Picture 35" descr="image.png"/>
+          <p:cNvPicPr>
+            <a:picLocks noChangeAspect="1"/>
+          </p:cNvPicPr>
+          <p:nvPr/>
+        </p:nvPicPr>
+        <p:blipFill>
+          <a:blip r:embed="rId6"/>
+          <a:stretch>
+            <a:fillRect/>
+          </a:stretch>
+        </p:blipFill>
+        <p:spPr>
+          <a:xfrm>
+            <a:off x="804672" y="1737360"/>
+            <a:ext cx="219456" cy="219456"/>
+          </a:xfrm>
+          <a:prstGeom prst="rect">
+            <a:avLst/>
+          </a:prstGeom>
+        </p:spPr>
+      </p:pic>
+      <p:sp>
+        <p:nvSpPr>
+          <p:cNvPr id="7" name="Text 4"/>
+          <p:cNvSpPr txBox="1"/>
+          <p:nvPr/>
+        </p:nvSpPr>
+        <p:spPr>
+          <a:xfrm>
+            <a:off x="1280160" y="1618488"/>
+            <a:ext cx="2743200" cy="457200"/>
+          </a:xfrm>
+          <a:prstGeom prst="rect">
+            <a:avLst/>
+          </a:prstGeom>
+          <a:noFill/>
+          <a:ln/>
+        </p:spPr>
+        <p:txBody>
+          <a:bodyPr wrap="square" lIns="0" tIns="0" rIns="0" bIns="0" rtlCol="0" anchor="ctr"/>
+          <a:lstStyle/>
+          <a:p>
+            <a:pPr indent="0" marL="0">
+              <a:buNone/>
+            </a:pPr>
+            <a:r>
+              <a:rPr lang="en-US" sz="1600" b="1" dirty="0">
+                <a:solidFill>
+                  <a:srgbClr val="001E3C"/>
                 </a:solidFill>
                 <a:latin typeface="Meiryo" pitchFamily="34" charset="0"/>
                 <a:ea typeface="Meiryo" pitchFamily="34" charset="-122"/>
                 <a:cs typeface="Meiryo" pitchFamily="34" charset="-120"/>
               </a:rPr>
-              <a:t>コマンドは Windows でも Mac でも同じ（作業部屋の中は Linux のため）。パッケージの版は homepage とそろえる（公開のとき合流するため）。</a:t>
-            </a:r>
-            <a:endParaRPr lang="en-US" sz="1050" dirty="0"/>
+              <a:t>ガントチャート</a:t>
+            </a:r>
+            <a:endParaRPr lang="en-US" sz="1600" dirty="0"/>
+          </a:p>
+        </p:txBody>
+      </p:sp>
+      <p:sp>
+        <p:nvSpPr>
+          <p:cNvPr id="8" name="Shape 5"/>
+          <p:cNvSpPr/>
+          <p:nvPr/>
+        </p:nvSpPr>
+        <p:spPr>
+          <a:xfrm>
+            <a:off x="685800" y="2331720"/>
+            <a:ext cx="310896" cy="310896"/>
+          </a:xfrm>
+          <a:prstGeom prst="ellipse">
+            <a:avLst/>
+          </a:prstGeom>
+          <a:solidFill>
+            <a:srgbClr val="001E3C"/>
+          </a:solidFill>
+          <a:ln w="12700">
+            <a:solidFill>
+              <a:srgbClr val="001E3C"/>
+            </a:solidFill>
+            <a:prstDash val="solid"/>
+          </a:ln>
+        </p:spPr>
+      </p:sp>
+      <p:sp>
+        <p:nvSpPr>
+          <p:cNvPr id="9" name="Text 6"/>
+          <p:cNvSpPr txBox="1"/>
+          <p:nvPr/>
+        </p:nvSpPr>
+        <p:spPr>
+          <a:xfrm>
+            <a:off x="685800" y="2331720"/>
+            <a:ext cx="310896" cy="310896"/>
+          </a:xfrm>
+          <a:prstGeom prst="rect">
+            <a:avLst/>
+          </a:prstGeom>
+          <a:noFill/>
+          <a:ln/>
+        </p:spPr>
+        <p:txBody>
+          <a:bodyPr wrap="square" lIns="0" tIns="0" rIns="0" bIns="0" rtlCol="0" anchor="ctr"/>
+          <a:lstStyle/>
+          <a:p>
+            <a:pPr algn="ctr" indent="0" marL="0">
+              <a:buNone/>
+            </a:pPr>
+            <a:r>
+              <a:rPr lang="en-US" sz="1100" b="1" dirty="0">
+                <a:solidFill>
+                  <a:srgbClr val="FFFFFF"/>
+                </a:solidFill>
+                <a:latin typeface="Consolas" pitchFamily="34" charset="0"/>
+                <a:ea typeface="Consolas" pitchFamily="34" charset="-122"/>
+                <a:cs typeface="Consolas" pitchFamily="34" charset="-120"/>
+              </a:rPr>
+              <a:t>1</a:t>
+            </a:r>
+            <a:endParaRPr lang="en-US" sz="1100" dirty="0"/>
+          </a:p>
+        </p:txBody>
+      </p:sp>
+      <p:sp>
+        <p:nvSpPr>
+          <p:cNvPr id="10" name="Text 7"/>
+          <p:cNvSpPr txBox="1"/>
+          <p:nvPr/>
+        </p:nvSpPr>
+        <p:spPr>
+          <a:xfrm>
+            <a:off x="1124712" y="2340864"/>
+            <a:ext cx="3172968" cy="274320"/>
+          </a:xfrm>
+          <a:prstGeom prst="rect">
+            <a:avLst/>
+          </a:prstGeom>
+          <a:noFill/>
+          <a:ln/>
+        </p:spPr>
+        <p:txBody>
+          <a:bodyPr wrap="square" lIns="0" tIns="0" rIns="0" bIns="0" rtlCol="0" anchor="t"/>
+          <a:lstStyle/>
+          <a:p>
+            <a:pPr indent="0" marL="0">
+              <a:buNone/>
+            </a:pPr>
+            <a:r>
+              <a:rPr lang="en-US" sz="1200" b="1" dirty="0">
+                <a:solidFill>
+                  <a:srgbClr val="001E3C"/>
+                </a:solidFill>
+                <a:latin typeface="Meiryo" pitchFamily="34" charset="0"/>
+                <a:ea typeface="Meiryo" pitchFamily="34" charset="-122"/>
+                <a:cs typeface="Meiryo" pitchFamily="34" charset="-120"/>
+              </a:rPr>
+              <a:t>開始日と期日を入れる</a:t>
+            </a:r>
+            <a:endParaRPr lang="en-US" sz="1200" dirty="0"/>
+          </a:p>
+        </p:txBody>
+      </p:sp>
+      <p:sp>
+        <p:nvSpPr>
+          <p:cNvPr id="11" name="Text 8"/>
+          <p:cNvSpPr txBox="1"/>
+          <p:nvPr/>
+        </p:nvSpPr>
+        <p:spPr>
+          <a:xfrm>
+            <a:off x="1124712" y="2606040"/>
+            <a:ext cx="3172968" cy="438912"/>
+          </a:xfrm>
+          <a:prstGeom prst="rect">
+            <a:avLst/>
+          </a:prstGeom>
+          <a:noFill/>
+          <a:ln/>
+        </p:spPr>
+        <p:txBody>
+          <a:bodyPr wrap="square" lIns="0" tIns="0" rIns="0" bIns="0" rtlCol="0" anchor="t"/>
+          <a:lstStyle/>
+          <a:p>
+            <a:pPr indent="0" marL="0">
+              <a:buNone/>
+            </a:pPr>
+            <a:r>
+              <a:rPr lang="en-US" sz="1000" dirty="0">
+                <a:solidFill>
+                  <a:srgbClr val="1B2B3A"/>
+                </a:solidFill>
+                <a:latin typeface="Meiryo" pitchFamily="34" charset="0"/>
+                <a:ea typeface="Meiryo" pitchFamily="34" charset="-122"/>
+                <a:cs typeface="Meiryo" pitchFamily="34" charset="-120"/>
+              </a:rPr>
+              <a:t>Issue の右の Projects の欄で</a:t>
+            </a:r>
+            <a:endParaRPr lang="en-US" sz="1000" dirty="0"/>
+          </a:p>
+        </p:txBody>
+      </p:sp>
+      <p:sp>
+        <p:nvSpPr>
+          <p:cNvPr id="12" name="Shape 9"/>
+          <p:cNvSpPr/>
+          <p:nvPr/>
+        </p:nvSpPr>
+        <p:spPr>
+          <a:xfrm>
+            <a:off x="685800" y="3063240"/>
+            <a:ext cx="310896" cy="310896"/>
+          </a:xfrm>
+          <a:prstGeom prst="ellipse">
+            <a:avLst/>
+          </a:prstGeom>
+          <a:solidFill>
+            <a:srgbClr val="001E3C"/>
+          </a:solidFill>
+          <a:ln w="12700">
+            <a:solidFill>
+              <a:srgbClr val="001E3C"/>
+            </a:solidFill>
+            <a:prstDash val="solid"/>
+          </a:ln>
+        </p:spPr>
+      </p:sp>
+      <p:sp>
+        <p:nvSpPr>
+          <p:cNvPr id="13" name="Text 10"/>
+          <p:cNvSpPr txBox="1"/>
+          <p:nvPr/>
+        </p:nvSpPr>
+        <p:spPr>
+          <a:xfrm>
+            <a:off x="685800" y="3063240"/>
+            <a:ext cx="310896" cy="310896"/>
+          </a:xfrm>
+          <a:prstGeom prst="rect">
+            <a:avLst/>
+          </a:prstGeom>
+          <a:noFill/>
+          <a:ln/>
+        </p:spPr>
+        <p:txBody>
+          <a:bodyPr wrap="square" lIns="0" tIns="0" rIns="0" bIns="0" rtlCol="0" anchor="ctr"/>
+          <a:lstStyle/>
+          <a:p>
+            <a:pPr algn="ctr" indent="0" marL="0">
+              <a:buNone/>
+            </a:pPr>
+            <a:r>
+              <a:rPr lang="en-US" sz="1100" b="1" dirty="0">
+                <a:solidFill>
+                  <a:srgbClr val="FFFFFF"/>
+                </a:solidFill>
+                <a:latin typeface="Consolas" pitchFamily="34" charset="0"/>
+                <a:ea typeface="Consolas" pitchFamily="34" charset="-122"/>
+                <a:cs typeface="Consolas" pitchFamily="34" charset="-120"/>
+              </a:rPr>
+              <a:t>2</a:t>
+            </a:r>
+            <a:endParaRPr lang="en-US" sz="1100" dirty="0"/>
+          </a:p>
+        </p:txBody>
+      </p:sp>
+      <p:sp>
+        <p:nvSpPr>
+          <p:cNvPr id="14" name="Text 11"/>
+          <p:cNvSpPr txBox="1"/>
+          <p:nvPr/>
+        </p:nvSpPr>
+        <p:spPr>
+          <a:xfrm>
+            <a:off x="1124712" y="3072384"/>
+            <a:ext cx="3172968" cy="274320"/>
+          </a:xfrm>
+          <a:prstGeom prst="rect">
+            <a:avLst/>
+          </a:prstGeom>
+          <a:noFill/>
+          <a:ln/>
+        </p:spPr>
+        <p:txBody>
+          <a:bodyPr wrap="square" lIns="0" tIns="0" rIns="0" bIns="0" rtlCol="0" anchor="t"/>
+          <a:lstStyle/>
+          <a:p>
+            <a:pPr indent="0" marL="0">
+              <a:buNone/>
+            </a:pPr>
+            <a:r>
+              <a:rPr lang="en-US" sz="1200" b="1" dirty="0">
+                <a:solidFill>
+                  <a:srgbClr val="001E3C"/>
+                </a:solidFill>
+                <a:latin typeface="Meiryo" pitchFamily="34" charset="0"/>
+                <a:ea typeface="Meiryo" pitchFamily="34" charset="-122"/>
+                <a:cs typeface="Meiryo" pitchFamily="34" charset="-120"/>
+              </a:rPr>
+              <a:t>ボードのタブ「ガントチャート」</a:t>
+            </a:r>
+            <a:endParaRPr lang="en-US" sz="1200" dirty="0"/>
+          </a:p>
+        </p:txBody>
+      </p:sp>
+      <p:sp>
+        <p:nvSpPr>
+          <p:cNvPr id="15" name="Text 12"/>
+          <p:cNvSpPr txBox="1"/>
+          <p:nvPr/>
+        </p:nvSpPr>
+        <p:spPr>
+          <a:xfrm>
+            <a:off x="1124712" y="3337560"/>
+            <a:ext cx="3172968" cy="438912"/>
+          </a:xfrm>
+          <a:prstGeom prst="rect">
+            <a:avLst/>
+          </a:prstGeom>
+          <a:noFill/>
+          <a:ln/>
+        </p:spPr>
+        <p:txBody>
+          <a:bodyPr wrap="square" lIns="0" tIns="0" rIns="0" bIns="0" rtlCol="0" anchor="t"/>
+          <a:lstStyle/>
+          <a:p>
+            <a:pPr indent="0" marL="0">
+              <a:buNone/>
+            </a:pPr>
+            <a:r>
+              <a:rPr lang="en-US" sz="1000" dirty="0">
+                <a:solidFill>
+                  <a:srgbClr val="1B2B3A"/>
+                </a:solidFill>
+                <a:latin typeface="Meiryo" pitchFamily="34" charset="0"/>
+                <a:ea typeface="Meiryo" pitchFamily="34" charset="-122"/>
+                <a:cs typeface="Meiryo" pitchFamily="34" charset="-120"/>
+              </a:rPr>
+              <a:t>開始日〜期日が横棒で並ぶ</a:t>
+            </a:r>
+            <a:endParaRPr lang="en-US" sz="1000" dirty="0"/>
+          </a:p>
+        </p:txBody>
+      </p:sp>
+      <p:sp>
+        <p:nvSpPr>
+          <p:cNvPr id="16" name="Shape 13"/>
+          <p:cNvSpPr/>
+          <p:nvPr/>
+        </p:nvSpPr>
+        <p:spPr>
+          <a:xfrm>
+            <a:off x="685800" y="3794760"/>
+            <a:ext cx="310896" cy="310896"/>
+          </a:xfrm>
+          <a:prstGeom prst="ellipse">
+            <a:avLst/>
+          </a:prstGeom>
+          <a:solidFill>
+            <a:srgbClr val="001E3C"/>
+          </a:solidFill>
+          <a:ln w="12700">
+            <a:solidFill>
+              <a:srgbClr val="001E3C"/>
+            </a:solidFill>
+            <a:prstDash val="solid"/>
+          </a:ln>
+        </p:spPr>
+      </p:sp>
+      <p:sp>
+        <p:nvSpPr>
+          <p:cNvPr id="17" name="Text 14"/>
+          <p:cNvSpPr txBox="1"/>
+          <p:nvPr/>
+        </p:nvSpPr>
+        <p:spPr>
+          <a:xfrm>
+            <a:off x="685800" y="3794760"/>
+            <a:ext cx="310896" cy="310896"/>
+          </a:xfrm>
+          <a:prstGeom prst="rect">
+            <a:avLst/>
+          </a:prstGeom>
+          <a:noFill/>
+          <a:ln/>
+        </p:spPr>
+        <p:txBody>
+          <a:bodyPr wrap="square" lIns="0" tIns="0" rIns="0" bIns="0" rtlCol="0" anchor="ctr"/>
+          <a:lstStyle/>
+          <a:p>
+            <a:pPr algn="ctr" indent="0" marL="0">
+              <a:buNone/>
+            </a:pPr>
+            <a:r>
+              <a:rPr lang="en-US" sz="1100" b="1" dirty="0">
+                <a:solidFill>
+                  <a:srgbClr val="FFFFFF"/>
+                </a:solidFill>
+                <a:latin typeface="Consolas" pitchFamily="34" charset="0"/>
+                <a:ea typeface="Consolas" pitchFamily="34" charset="-122"/>
+                <a:cs typeface="Consolas" pitchFamily="34" charset="-120"/>
+              </a:rPr>
+              <a:t>3</a:t>
+            </a:r>
+            <a:endParaRPr lang="en-US" sz="1100" dirty="0"/>
+          </a:p>
+        </p:txBody>
+      </p:sp>
+      <p:sp>
+        <p:nvSpPr>
+          <p:cNvPr id="18" name="Text 15"/>
+          <p:cNvSpPr txBox="1"/>
+          <p:nvPr/>
+        </p:nvSpPr>
+        <p:spPr>
+          <a:xfrm>
+            <a:off x="1124712" y="3803904"/>
+            <a:ext cx="3172968" cy="274320"/>
+          </a:xfrm>
+          <a:prstGeom prst="rect">
+            <a:avLst/>
+          </a:prstGeom>
+          <a:noFill/>
+          <a:ln/>
+        </p:spPr>
+        <p:txBody>
+          <a:bodyPr wrap="square" lIns="0" tIns="0" rIns="0" bIns="0" rtlCol="0" anchor="t"/>
+          <a:lstStyle/>
+          <a:p>
+            <a:pPr indent="0" marL="0">
+              <a:buNone/>
+            </a:pPr>
+            <a:r>
+              <a:rPr lang="en-US" sz="1200" b="1" dirty="0">
+                <a:solidFill>
+                  <a:srgbClr val="001E3C"/>
+                </a:solidFill>
+                <a:latin typeface="Meiryo" pitchFamily="34" charset="0"/>
+                <a:ea typeface="Meiryo" pitchFamily="34" charset="-122"/>
+                <a:cs typeface="Meiryo" pitchFamily="34" charset="-120"/>
+              </a:rPr>
+              <a:t>横棒を動かして日程を直す</a:t>
+            </a:r>
+            <a:endParaRPr lang="en-US" sz="1200" dirty="0"/>
+          </a:p>
+        </p:txBody>
+      </p:sp>
+      <p:sp>
+        <p:nvSpPr>
+          <p:cNvPr id="19" name="Text 16"/>
+          <p:cNvSpPr txBox="1"/>
+          <p:nvPr/>
+        </p:nvSpPr>
+        <p:spPr>
+          <a:xfrm>
+            <a:off x="1124712" y="4069080"/>
+            <a:ext cx="3172968" cy="438912"/>
+          </a:xfrm>
+          <a:prstGeom prst="rect">
+            <a:avLst/>
+          </a:prstGeom>
+          <a:noFill/>
+          <a:ln/>
+        </p:spPr>
+        <p:txBody>
+          <a:bodyPr wrap="square" lIns="0" tIns="0" rIns="0" bIns="0" rtlCol="0" anchor="t"/>
+          <a:lstStyle/>
+          <a:p>
+            <a:pPr indent="0" marL="0">
+              <a:buNone/>
+            </a:pPr>
+            <a:r>
+              <a:rPr lang="en-US" sz="1000" dirty="0">
+                <a:solidFill>
+                  <a:srgbClr val="1B2B3A"/>
+                </a:solidFill>
+                <a:latin typeface="Meiryo" pitchFamily="34" charset="0"/>
+                <a:ea typeface="Meiryo" pitchFamily="34" charset="-122"/>
+                <a:cs typeface="Meiryo" pitchFamily="34" charset="-120"/>
+              </a:rPr>
+              <a:t>端を伸ばすと期日が変わる</a:t>
+            </a:r>
+            <a:endParaRPr lang="en-US" sz="1000" dirty="0"/>
+          </a:p>
+        </p:txBody>
+      </p:sp>
+      <p:sp>
+        <p:nvSpPr>
+          <p:cNvPr id="20" name="Shape 17"/>
+          <p:cNvSpPr/>
+          <p:nvPr/>
+        </p:nvSpPr>
+        <p:spPr>
+          <a:xfrm>
+            <a:off x="4663440" y="1417320"/>
+            <a:ext cx="4023360" cy="3154680"/>
+          </a:xfrm>
+          <a:prstGeom prst="rect">
+            <a:avLst/>
+          </a:prstGeom>
+          <a:solidFill>
+            <a:srgbClr val="FFFFFF"/>
+          </a:solidFill>
+          <a:ln w="12700">
+            <a:solidFill>
+              <a:srgbClr val="FFFFFF"/>
+            </a:solidFill>
+            <a:prstDash val="solid"/>
+          </a:ln>
+          <a:effectLst>
+            <a:outerShdw sx="100000" sy="100000" kx="0" ky="0" algn="bl" rotWithShape="0" blurRad="76200" dist="25400" dir="5400000">
+              <a:srgbClr val="000000">
+                <a:alpha val="12000"/>
+              </a:srgbClr>
+            </a:outerShdw>
+          </a:effectLst>
+        </p:spPr>
+      </p:sp>
+      <p:sp>
+        <p:nvSpPr>
+          <p:cNvPr id="21" name="Shape 18"/>
+          <p:cNvSpPr/>
+          <p:nvPr/>
+        </p:nvSpPr>
+        <p:spPr>
+          <a:xfrm>
+            <a:off x="4892040" y="1618488"/>
+            <a:ext cx="457200" cy="457200"/>
+          </a:xfrm>
+          <a:prstGeom prst="ellipse">
+            <a:avLst/>
+          </a:prstGeom>
+          <a:solidFill>
+            <a:srgbClr val="001E3C"/>
+          </a:solidFill>
+          <a:ln w="12700">
+            <a:solidFill>
+              <a:srgbClr val="001E3C"/>
+            </a:solidFill>
+            <a:prstDash val="solid"/>
+          </a:ln>
+        </p:spPr>
+      </p:sp>
+      <p:pic>
+        <p:nvPicPr>
+          <p:cNvPr id="35" name="Picture 34" descr="image.png"/>
+          <p:cNvPicPr>
+            <a:picLocks noChangeAspect="1"/>
+          </p:cNvPicPr>
+          <p:nvPr/>
+        </p:nvPicPr>
+        <p:blipFill>
+          <a:blip r:embed="rId5"/>
+          <a:stretch>
+            <a:fillRect/>
+          </a:stretch>
+        </p:blipFill>
+        <p:spPr>
+          <a:xfrm>
+            <a:off x="5010912" y="1737360"/>
+            <a:ext cx="219456" cy="219456"/>
+          </a:xfrm>
+          <a:prstGeom prst="rect">
+            <a:avLst/>
+          </a:prstGeom>
+        </p:spPr>
+      </p:pic>
+      <p:sp>
+        <p:nvSpPr>
+          <p:cNvPr id="23" name="Text 19"/>
+          <p:cNvSpPr txBox="1"/>
+          <p:nvPr/>
+        </p:nvSpPr>
+        <p:spPr>
+          <a:xfrm>
+            <a:off x="5486400" y="1618488"/>
+            <a:ext cx="2743200" cy="457200"/>
+          </a:xfrm>
+          <a:prstGeom prst="rect">
+            <a:avLst/>
+          </a:prstGeom>
+          <a:noFill/>
+          <a:ln/>
+        </p:spPr>
+        <p:txBody>
+          <a:bodyPr wrap="square" lIns="0" tIns="0" rIns="0" bIns="0" rtlCol="0" anchor="ctr"/>
+          <a:lstStyle/>
+          <a:p>
+            <a:pPr indent="0" marL="0">
+              <a:buNone/>
+            </a:pPr>
+            <a:r>
+              <a:rPr lang="en-US" sz="1600" b="1" dirty="0">
+                <a:solidFill>
+                  <a:srgbClr val="001E3C"/>
+                </a:solidFill>
+                <a:latin typeface="Meiryo" pitchFamily="34" charset="0"/>
+                <a:ea typeface="Meiryo" pitchFamily="34" charset="-122"/>
+                <a:cs typeface="Meiryo" pitchFamily="34" charset="-120"/>
+              </a:rPr>
+              <a:t>WBS</a:t>
+            </a:r>
+            <a:endParaRPr lang="en-US" sz="1600" dirty="0"/>
+          </a:p>
+        </p:txBody>
+      </p:sp>
+      <p:sp>
+        <p:nvSpPr>
+          <p:cNvPr id="24" name="Shape 20"/>
+          <p:cNvSpPr/>
+          <p:nvPr/>
+        </p:nvSpPr>
+        <p:spPr>
+          <a:xfrm>
+            <a:off x="4892040" y="2331720"/>
+            <a:ext cx="310896" cy="310896"/>
+          </a:xfrm>
+          <a:prstGeom prst="ellipse">
+            <a:avLst/>
+          </a:prstGeom>
+          <a:solidFill>
+            <a:srgbClr val="001E3C"/>
+          </a:solidFill>
+          <a:ln w="12700">
+            <a:solidFill>
+              <a:srgbClr val="001E3C"/>
+            </a:solidFill>
+            <a:prstDash val="solid"/>
+          </a:ln>
+        </p:spPr>
+      </p:sp>
+      <p:sp>
+        <p:nvSpPr>
+          <p:cNvPr id="25" name="Text 21"/>
+          <p:cNvSpPr txBox="1"/>
+          <p:nvPr/>
+        </p:nvSpPr>
+        <p:spPr>
+          <a:xfrm>
+            <a:off x="4892040" y="2331720"/>
+            <a:ext cx="310896" cy="310896"/>
+          </a:xfrm>
+          <a:prstGeom prst="rect">
+            <a:avLst/>
+          </a:prstGeom>
+          <a:noFill/>
+          <a:ln/>
+        </p:spPr>
+        <p:txBody>
+          <a:bodyPr wrap="square" lIns="0" tIns="0" rIns="0" bIns="0" rtlCol="0" anchor="ctr"/>
+          <a:lstStyle/>
+          <a:p>
+            <a:pPr algn="ctr" indent="0" marL="0">
+              <a:buNone/>
+            </a:pPr>
+            <a:r>
+              <a:rPr lang="en-US" sz="1100" b="1" dirty="0">
+                <a:solidFill>
+                  <a:srgbClr val="FFFFFF"/>
+                </a:solidFill>
+                <a:latin typeface="Consolas" pitchFamily="34" charset="0"/>
+                <a:ea typeface="Consolas" pitchFamily="34" charset="-122"/>
+                <a:cs typeface="Consolas" pitchFamily="34" charset="-120"/>
+              </a:rPr>
+              <a:t>1</a:t>
+            </a:r>
+            <a:endParaRPr lang="en-US" sz="1100" dirty="0"/>
+          </a:p>
+        </p:txBody>
+      </p:sp>
+      <p:sp>
+        <p:nvSpPr>
+          <p:cNvPr id="26" name="Text 22"/>
+          <p:cNvSpPr txBox="1"/>
+          <p:nvPr/>
+        </p:nvSpPr>
+        <p:spPr>
+          <a:xfrm>
+            <a:off x="5330952" y="2340864"/>
+            <a:ext cx="3172968" cy="274320"/>
+          </a:xfrm>
+          <a:prstGeom prst="rect">
+            <a:avLst/>
+          </a:prstGeom>
+          <a:noFill/>
+          <a:ln/>
+        </p:spPr>
+        <p:txBody>
+          <a:bodyPr wrap="square" lIns="0" tIns="0" rIns="0" bIns="0" rtlCol="0" anchor="t"/>
+          <a:lstStyle/>
+          <a:p>
+            <a:pPr indent="0" marL="0">
+              <a:buNone/>
+            </a:pPr>
+            <a:r>
+              <a:rPr lang="en-US" sz="1200" b="1" dirty="0">
+                <a:solidFill>
+                  <a:srgbClr val="001E3C"/>
+                </a:solidFill>
+                <a:latin typeface="Meiryo" pitchFamily="34" charset="0"/>
+                <a:ea typeface="Meiryo" pitchFamily="34" charset="-122"/>
+                <a:cs typeface="Meiryo" pitchFamily="34" charset="-120"/>
+              </a:rPr>
+              <a:t>「Create sub-issue」で分ける</a:t>
+            </a:r>
+            <a:endParaRPr lang="en-US" sz="1200" dirty="0"/>
+          </a:p>
+        </p:txBody>
+      </p:sp>
+      <p:sp>
+        <p:nvSpPr>
+          <p:cNvPr id="27" name="Text 23"/>
+          <p:cNvSpPr txBox="1"/>
+          <p:nvPr/>
+        </p:nvSpPr>
+        <p:spPr>
+          <a:xfrm>
+            <a:off x="5330952" y="2606040"/>
+            <a:ext cx="3172968" cy="438912"/>
+          </a:xfrm>
+          <a:prstGeom prst="rect">
+            <a:avLst/>
+          </a:prstGeom>
+          <a:noFill/>
+          <a:ln/>
+        </p:spPr>
+        <p:txBody>
+          <a:bodyPr wrap="square" lIns="0" tIns="0" rIns="0" bIns="0" rtlCol="0" anchor="t"/>
+          <a:lstStyle/>
+          <a:p>
+            <a:pPr indent="0" marL="0">
+              <a:buNone/>
+            </a:pPr>
+            <a:r>
+              <a:rPr lang="en-US" sz="1000" dirty="0">
+                <a:solidFill>
+                  <a:srgbClr val="1B2B3A"/>
+                </a:solidFill>
+                <a:latin typeface="Meiryo" pitchFamily="34" charset="0"/>
+                <a:ea typeface="Meiryo" pitchFamily="34" charset="-122"/>
+                <a:cs typeface="Meiryo" pitchFamily="34" charset="-120"/>
+              </a:rPr>
+              <a:t>大きい作業の下に子のチケットを作る</a:t>
+            </a:r>
+            <a:endParaRPr lang="en-US" sz="1000" dirty="0"/>
+          </a:p>
+        </p:txBody>
+      </p:sp>
+      <p:sp>
+        <p:nvSpPr>
+          <p:cNvPr id="28" name="Shape 24"/>
+          <p:cNvSpPr/>
+          <p:nvPr/>
+        </p:nvSpPr>
+        <p:spPr>
+          <a:xfrm>
+            <a:off x="4892040" y="3063240"/>
+            <a:ext cx="310896" cy="310896"/>
+          </a:xfrm>
+          <a:prstGeom prst="ellipse">
+            <a:avLst/>
+          </a:prstGeom>
+          <a:solidFill>
+            <a:srgbClr val="001E3C"/>
+          </a:solidFill>
+          <a:ln w="12700">
+            <a:solidFill>
+              <a:srgbClr val="001E3C"/>
+            </a:solidFill>
+            <a:prstDash val="solid"/>
+          </a:ln>
+        </p:spPr>
+      </p:sp>
+      <p:sp>
+        <p:nvSpPr>
+          <p:cNvPr id="29" name="Text 25"/>
+          <p:cNvSpPr txBox="1"/>
+          <p:nvPr/>
+        </p:nvSpPr>
+        <p:spPr>
+          <a:xfrm>
+            <a:off x="4892040" y="3063240"/>
+            <a:ext cx="310896" cy="310896"/>
+          </a:xfrm>
+          <a:prstGeom prst="rect">
+            <a:avLst/>
+          </a:prstGeom>
+          <a:noFill/>
+          <a:ln/>
+        </p:spPr>
+        <p:txBody>
+          <a:bodyPr wrap="square" lIns="0" tIns="0" rIns="0" bIns="0" rtlCol="0" anchor="ctr"/>
+          <a:lstStyle/>
+          <a:p>
+            <a:pPr algn="ctr" indent="0" marL="0">
+              <a:buNone/>
+            </a:pPr>
+            <a:r>
+              <a:rPr lang="en-US" sz="1100" b="1" dirty="0">
+                <a:solidFill>
+                  <a:srgbClr val="FFFFFF"/>
+                </a:solidFill>
+                <a:latin typeface="Consolas" pitchFamily="34" charset="0"/>
+                <a:ea typeface="Consolas" pitchFamily="34" charset="-122"/>
+                <a:cs typeface="Consolas" pitchFamily="34" charset="-120"/>
+              </a:rPr>
+              <a:t>2</a:t>
+            </a:r>
+            <a:endParaRPr lang="en-US" sz="1100" dirty="0"/>
+          </a:p>
+        </p:txBody>
+      </p:sp>
+      <p:sp>
+        <p:nvSpPr>
+          <p:cNvPr id="30" name="Text 26"/>
+          <p:cNvSpPr txBox="1"/>
+          <p:nvPr/>
+        </p:nvSpPr>
+        <p:spPr>
+          <a:xfrm>
+            <a:off x="5330952" y="3072384"/>
+            <a:ext cx="3172968" cy="274320"/>
+          </a:xfrm>
+          <a:prstGeom prst="rect">
+            <a:avLst/>
+          </a:prstGeom>
+          <a:noFill/>
+          <a:ln/>
+        </p:spPr>
+        <p:txBody>
+          <a:bodyPr wrap="square" lIns="0" tIns="0" rIns="0" bIns="0" rtlCol="0" anchor="t"/>
+          <a:lstStyle/>
+          <a:p>
+            <a:pPr indent="0" marL="0">
+              <a:buNone/>
+            </a:pPr>
+            <a:r>
+              <a:rPr lang="en-US" sz="1200" b="1" dirty="0">
+                <a:solidFill>
+                  <a:srgbClr val="001E3C"/>
+                </a:solidFill>
+                <a:latin typeface="Meiryo" pitchFamily="34" charset="0"/>
+                <a:ea typeface="Meiryo" pitchFamily="34" charset="-122"/>
+                <a:cs typeface="Meiryo" pitchFamily="34" charset="-120"/>
+              </a:rPr>
+              <a:t>ボードのタブ「WBS」</a:t>
+            </a:r>
+            <a:endParaRPr lang="en-US" sz="1200" dirty="0"/>
+          </a:p>
+        </p:txBody>
+      </p:sp>
+      <p:sp>
+        <p:nvSpPr>
+          <p:cNvPr id="37" name="Text ticket note"/>
+          <p:cNvSpPr txBox="1"/>
+          <p:nvPr/>
+        </p:nvSpPr>
+        <p:spPr>
+          <a:xfrm>
+            <a:off x="5330952" y="3337560"/>
+            <a:ext cx="3172968" cy="438912"/>
+          </a:xfrm>
+          <a:prstGeom prst="rect">
+            <a:avLst/>
+          </a:prstGeom>
+          <a:noFill/>
+          <a:ln/>
+        </p:spPr>
+        <p:txBody>
+          <a:bodyPr wrap="square" lIns="0" tIns="0" rIns="0" bIns="0" rtlCol="0" anchor="t"/>
+          <a:lstStyle/>
+          <a:p>
+            <a:pPr indent="0" marL="0">
+              <a:buNone/>
+            </a:pPr>
+            <a:r>
+              <a:rPr lang="en-US" sz="1000" dirty="0">
+                <a:solidFill>
+                  <a:srgbClr val="1B2B3A"/>
+                </a:solidFill>
+                <a:latin typeface="Meiryo" pitchFamily="34" charset="0"/>
+                <a:ea typeface="Meiryo" pitchFamily="34" charset="-122"/>
+                <a:cs typeface="Meiryo" pitchFamily="34" charset="-120"/>
+              </a:rPr>
+              <a:t>親ごとに子がまとまり、進み具合が出る</a:t>
+            </a:r>
+            <a:endParaRPr lang="en-US" sz="1000" dirty="0"/>
+          </a:p>
+        </p:txBody>
+      </p:sp>
+      <p:sp>
+        <p:nvSpPr>
+          <p:cNvPr id="31" name="Shape 27"/>
+          <p:cNvSpPr/>
+          <p:nvPr/>
+        </p:nvSpPr>
+        <p:spPr>
+          <a:xfrm>
+            <a:off x="4892040" y="3794760"/>
+            <a:ext cx="310896" cy="310896"/>
+          </a:xfrm>
+          <a:prstGeom prst="ellipse">
+            <a:avLst/>
+          </a:prstGeom>
+          <a:solidFill>
+            <a:srgbClr val="001E3C"/>
+          </a:solidFill>
+          <a:ln w="12700">
+            <a:solidFill>
+              <a:srgbClr val="001E3C"/>
+            </a:solidFill>
+            <a:prstDash val="solid"/>
+          </a:ln>
+        </p:spPr>
+      </p:sp>
+      <p:sp>
+        <p:nvSpPr>
+          <p:cNvPr id="32" name="Text 28"/>
+          <p:cNvSpPr txBox="1"/>
+          <p:nvPr/>
+        </p:nvSpPr>
+        <p:spPr>
+          <a:xfrm>
+            <a:off x="4892040" y="3794760"/>
+            <a:ext cx="310896" cy="310896"/>
+          </a:xfrm>
+          <a:prstGeom prst="rect">
+            <a:avLst/>
+          </a:prstGeom>
+          <a:noFill/>
+          <a:ln/>
+        </p:spPr>
+        <p:txBody>
+          <a:bodyPr wrap="square" lIns="0" tIns="0" rIns="0" bIns="0" rtlCol="0" anchor="ctr"/>
+          <a:lstStyle/>
+          <a:p>
+            <a:pPr algn="ctr" indent="0" marL="0">
+              <a:buNone/>
+            </a:pPr>
+            <a:r>
+              <a:rPr lang="en-US" sz="1100" b="1" dirty="0">
+                <a:solidFill>
+                  <a:srgbClr val="FFFFFF"/>
+                </a:solidFill>
+                <a:latin typeface="Consolas" pitchFamily="34" charset="0"/>
+                <a:ea typeface="Consolas" pitchFamily="34" charset="-122"/>
+                <a:cs typeface="Consolas" pitchFamily="34" charset="-120"/>
+              </a:rPr>
+              <a:t>3</a:t>
+            </a:r>
+            <a:endParaRPr lang="en-US" sz="1100" dirty="0"/>
+          </a:p>
+        </p:txBody>
+      </p:sp>
+      <p:sp>
+        <p:nvSpPr>
+          <p:cNvPr id="33" name="Text 29"/>
+          <p:cNvSpPr txBox="1"/>
+          <p:nvPr/>
+        </p:nvSpPr>
+        <p:spPr>
+          <a:xfrm>
+            <a:off x="5330952" y="3803904"/>
+            <a:ext cx="3172968" cy="274320"/>
+          </a:xfrm>
+          <a:prstGeom prst="rect">
+            <a:avLst/>
+          </a:prstGeom>
+          <a:noFill/>
+          <a:ln/>
+        </p:spPr>
+        <p:txBody>
+          <a:bodyPr wrap="square" lIns="0" tIns="0" rIns="0" bIns="0" rtlCol="0" anchor="t"/>
+          <a:lstStyle/>
+          <a:p>
+            <a:pPr indent="0" marL="0">
+              <a:buNone/>
+            </a:pPr>
+            <a:r>
+              <a:rPr lang="en-US" sz="1200" b="1" dirty="0">
+                <a:solidFill>
+                  <a:srgbClr val="001E3C"/>
+                </a:solidFill>
+                <a:latin typeface="Meiryo" pitchFamily="34" charset="0"/>
+                <a:ea typeface="Meiryo" pitchFamily="34" charset="-122"/>
+                <a:cs typeface="Meiryo" pitchFamily="34" charset="-120"/>
+              </a:rPr>
+              <a:t>子にも開始日と期日を入れる</a:t>
+            </a:r>
+            <a:endParaRPr lang="en-US" sz="1200" dirty="0"/>
+          </a:p>
+        </p:txBody>
+      </p:sp>
+      <p:sp>
+        <p:nvSpPr>
+          <p:cNvPr id="34" name="Text 30"/>
+          <p:cNvSpPr txBox="1"/>
+          <p:nvPr/>
+        </p:nvSpPr>
+        <p:spPr>
+          <a:xfrm>
+            <a:off x="5330952" y="4069080"/>
+            <a:ext cx="3172968" cy="438912"/>
+          </a:xfrm>
+          <a:prstGeom prst="rect">
+            <a:avLst/>
+          </a:prstGeom>
+          <a:noFill/>
+          <a:ln/>
+        </p:spPr>
+        <p:txBody>
+          <a:bodyPr wrap="square" lIns="0" tIns="0" rIns="0" bIns="0" rtlCol="0" anchor="t"/>
+          <a:lstStyle/>
+          <a:p>
+            <a:pPr indent="0" marL="0">
+              <a:buNone/>
+            </a:pPr>
+            <a:r>
+              <a:rPr lang="en-US" sz="1000" dirty="0">
+                <a:solidFill>
+                  <a:srgbClr val="1B2B3A"/>
+                </a:solidFill>
+                <a:latin typeface="Meiryo" pitchFamily="34" charset="0"/>
+                <a:ea typeface="Meiryo" pitchFamily="34" charset="-122"/>
+                <a:cs typeface="Meiryo" pitchFamily="34" charset="-120"/>
+              </a:rPr>
+              <a:t>ガントチャートに作業ごとの横棒が出る</a:t>
+            </a:r>
+            <a:endParaRPr lang="en-US" sz="1000" dirty="0"/>
           </a:p>
         </p:txBody>
       </p:sp>

--- a/static/guide/03_開発の進め方.pptx
+++ b/static/guide/03_開発の進め方.pptx
@@ -15121,7 +15121,7 @@
                 <a:ea typeface="Meiryo" pitchFamily="34" charset="-122"/>
                 <a:cs typeface="Meiryo" pitchFamily="34" charset="-120"/>
               </a:rPr>
-              <a:t>日程と作業の分け方</a:t>
+              <a:t>作業の分け方と日程</a:t>
             </a:r>
             <a:endParaRPr lang="en-US" sz="2600" dirty="0"/>
           </a:p>
@@ -15241,7 +15241,7 @@
                 <a:ea typeface="Meiryo" pitchFamily="34" charset="-122"/>
                 <a:cs typeface="Meiryo" pitchFamily="34" charset="-120"/>
               </a:rPr>
-              <a:t>ガントチャート</a:t>
+              <a:t>WBS</a:t>
             </a:r>
             <a:endParaRPr lang="en-US" sz="1600" dirty="0"/>
           </a:p>
@@ -15344,7 +15344,7 @@
                 <a:ea typeface="Meiryo" pitchFamily="34" charset="-122"/>
                 <a:cs typeface="Meiryo" pitchFamily="34" charset="-120"/>
               </a:rPr>
-              <a:t>開始日と期日を入れる</a:t>
+              <a:t>「Create sub-issue」で分ける</a:t>
             </a:r>
             <a:endParaRPr lang="en-US" sz="1200" dirty="0"/>
           </a:p>
@@ -15383,7 +15383,7 @@
                 <a:ea typeface="Meiryo" pitchFamily="34" charset="-122"/>
                 <a:cs typeface="Meiryo" pitchFamily="34" charset="-120"/>
               </a:rPr>
-              <a:t>Issue の右の Projects の欄で</a:t>
+              <a:t>大きい作業の下に子のチケットを作る</a:t>
             </a:r>
             <a:endParaRPr lang="en-US" sz="1000" dirty="0"/>
           </a:p>
@@ -15486,7 +15486,7 @@
                 <a:ea typeface="Meiryo" pitchFamily="34" charset="-122"/>
                 <a:cs typeface="Meiryo" pitchFamily="34" charset="-120"/>
               </a:rPr>
-              <a:t>ボードのタブ「ガントチャート」</a:t>
+              <a:t>ボードのタブ「WBS」</a:t>
             </a:r>
             <a:endParaRPr lang="en-US" sz="1200" dirty="0"/>
           </a:p>
@@ -15525,7 +15525,7 @@
                 <a:ea typeface="Meiryo" pitchFamily="34" charset="-122"/>
                 <a:cs typeface="Meiryo" pitchFamily="34" charset="-120"/>
               </a:rPr>
-              <a:t>開始日〜期日が横棒で並ぶ</a:t>
+              <a:t>親ごとに子がまとまり、進み具合が出る</a:t>
             </a:r>
             <a:endParaRPr lang="en-US" sz="1000" dirty="0"/>
           </a:p>
@@ -15628,7 +15628,7 @@
                 <a:ea typeface="Meiryo" pitchFamily="34" charset="-122"/>
                 <a:cs typeface="Meiryo" pitchFamily="34" charset="-120"/>
               </a:rPr>
-              <a:t>横棒を動かして日程を直す</a:t>
+              <a:t>子にも開始日と期日を入れる</a:t>
             </a:r>
             <a:endParaRPr lang="en-US" sz="1200" dirty="0"/>
           </a:p>
@@ -15667,7 +15667,7 @@
                 <a:ea typeface="Meiryo" pitchFamily="34" charset="-122"/>
                 <a:cs typeface="Meiryo" pitchFamily="34" charset="-120"/>
               </a:rPr>
-              <a:t>端を伸ばすと期日が変わる</a:t>
+              <a:t>ガントチャートに作業ごとの横棒が出る</a:t>
             </a:r>
             <a:endParaRPr lang="en-US" sz="1000" dirty="0"/>
           </a:p>
@@ -15787,7 +15787,7 @@
                 <a:ea typeface="Meiryo" pitchFamily="34" charset="-122"/>
                 <a:cs typeface="Meiryo" pitchFamily="34" charset="-120"/>
               </a:rPr>
-              <a:t>WBS</a:t>
+              <a:t>ガントチャート</a:t>
             </a:r>
             <a:endParaRPr lang="en-US" sz="1600" dirty="0"/>
           </a:p>
@@ -15890,7 +15890,7 @@
                 <a:ea typeface="Meiryo" pitchFamily="34" charset="-122"/>
                 <a:cs typeface="Meiryo" pitchFamily="34" charset="-120"/>
               </a:rPr>
-              <a:t>「Create sub-issue」で分ける</a:t>
+              <a:t>開始日と期日を入れる</a:t>
             </a:r>
             <a:endParaRPr lang="en-US" sz="1200" dirty="0"/>
           </a:p>
@@ -15929,7 +15929,7 @@
                 <a:ea typeface="Meiryo" pitchFamily="34" charset="-122"/>
                 <a:cs typeface="Meiryo" pitchFamily="34" charset="-120"/>
               </a:rPr>
-              <a:t>大きい作業の下に子のチケットを作る</a:t>
+              <a:t>Issue の右の Projects の欄で</a:t>
             </a:r>
             <a:endParaRPr lang="en-US" sz="1000" dirty="0"/>
           </a:p>
@@ -16032,7 +16032,7 @@
                 <a:ea typeface="Meiryo" pitchFamily="34" charset="-122"/>
                 <a:cs typeface="Meiryo" pitchFamily="34" charset="-120"/>
               </a:rPr>
-              <a:t>ボードのタブ「WBS」</a:t>
+              <a:t>ボードのタブ「ガントチャート」</a:t>
             </a:r>
             <a:endParaRPr lang="en-US" sz="1200" dirty="0"/>
           </a:p>
@@ -16071,7 +16071,7 @@
                 <a:ea typeface="Meiryo" pitchFamily="34" charset="-122"/>
                 <a:cs typeface="Meiryo" pitchFamily="34" charset="-120"/>
               </a:rPr>
-              <a:t>親ごとに子がまとまり、進み具合が出る</a:t>
+              <a:t>開始日〜期日が横棒で並ぶ</a:t>
             </a:r>
             <a:endParaRPr lang="en-US" sz="1000" dirty="0"/>
           </a:p>
@@ -16174,7 +16174,7 @@
                 <a:ea typeface="Meiryo" pitchFamily="34" charset="-122"/>
                 <a:cs typeface="Meiryo" pitchFamily="34" charset="-120"/>
               </a:rPr>
-              <a:t>子にも開始日と期日を入れる</a:t>
+              <a:t>横棒を動かして日程を直す</a:t>
             </a:r>
             <a:endParaRPr lang="en-US" sz="1200" dirty="0"/>
           </a:p>
@@ -16213,7 +16213,7 @@
                 <a:ea typeface="Meiryo" pitchFamily="34" charset="-122"/>
                 <a:cs typeface="Meiryo" pitchFamily="34" charset="-120"/>
               </a:rPr>
-              <a:t>ガントチャートに作業ごとの横棒が出る</a:t>
+              <a:t>端を伸ばすと期日が変わる</a:t>
             </a:r>
             <a:endParaRPr lang="en-US" sz="1000" dirty="0"/>
           </a:p>
